--- a/MovieMate_TFG_Presentacion_v2.pptx
+++ b/MovieMate_TFG_Presentacion_v2.pptx
@@ -4,29 +4,32 @@
   <p:sldMasterIdLst>
     <p:sldMasterId id="2147483648" r:id="rId1"/>
   </p:sldMasterIdLst>
+  <p:notesMasterIdLst>
+    <p:notesMasterId r:id="rId22"/>
+  </p:notesMasterIdLst>
   <p:sldIdLst>
-    <p:sldId id="256" r:id="rId7"/>
-    <p:sldId id="257" r:id="rId9"/>
-    <p:sldId id="258" r:id="rId10"/>
-    <p:sldId id="259" r:id="rId11"/>
-    <p:sldId id="260" r:id="rId12"/>
-    <p:sldId id="261" r:id="rId13"/>
-    <p:sldId id="262" r:id="rId14"/>
-    <p:sldId id="263" r:id="rId15"/>
-    <p:sldId id="264" r:id="rId16"/>
-    <p:sldId id="265" r:id="rId17"/>
-    <p:sldId id="266" r:id="rId18"/>
-    <p:sldId id="267" r:id="rId19"/>
-    <p:sldId id="268" r:id="rId20"/>
-    <p:sldId id="269" r:id="rId21"/>
-    <p:sldId id="270" r:id="rId22"/>
-    <p:sldId id="271" r:id="rId23"/>
-    <p:sldId id="272" r:id="rId24"/>
-    <p:sldId id="273" r:id="rId25"/>
-    <p:sldId id="274" r:id="rId26"/>
-    <p:sldId id="275" r:id="rId27"/>
+    <p:sldId id="256" r:id="rId2"/>
+    <p:sldId id="257" r:id="rId3"/>
+    <p:sldId id="258" r:id="rId4"/>
+    <p:sldId id="259" r:id="rId5"/>
+    <p:sldId id="260" r:id="rId6"/>
+    <p:sldId id="261" r:id="rId7"/>
+    <p:sldId id="262" r:id="rId8"/>
+    <p:sldId id="263" r:id="rId9"/>
+    <p:sldId id="264" r:id="rId10"/>
+    <p:sldId id="265" r:id="rId11"/>
+    <p:sldId id="266" r:id="rId12"/>
+    <p:sldId id="267" r:id="rId13"/>
+    <p:sldId id="268" r:id="rId14"/>
+    <p:sldId id="269" r:id="rId15"/>
+    <p:sldId id="270" r:id="rId16"/>
+    <p:sldId id="271" r:id="rId17"/>
+    <p:sldId id="272" r:id="rId18"/>
+    <p:sldId id="273" r:id="rId19"/>
+    <p:sldId id="274" r:id="rId20"/>
+    <p:sldId id="275" r:id="rId21"/>
   </p:sldIdLst>
-  <p:sldSz cx="12188952" cy="6858000" type="screen4x3"/>
+  <p:sldSz cx="12188825" cy="6858000"/>
   <p:notesSz cx="6858000" cy="9144000"/>
   <p:defaultTextStyle>
     <a:defPPr>
@@ -123,11 +126,27 @@
       </a:defRPr>
     </a:lvl9pPr>
   </p:defaultTextStyle>
+  <p:extLst>
+    <p:ext uri="{EFAFB233-063F-42B5-8137-9DF3F51BA10A}">
+      <p15:sldGuideLst xmlns:p15="http://schemas.microsoft.com/office/powerpoint/2012/main">
+        <p15:guide id="1" orient="horz" pos="2160">
+          <p15:clr>
+            <a:srgbClr val="A4A3A4"/>
+          </p15:clr>
+        </p15:guide>
+        <p15:guide id="2" pos="2880">
+          <p15:clr>
+            <a:srgbClr val="A4A3A4"/>
+          </p15:clr>
+        </p15:guide>
+      </p15:sldGuideLst>
+    </p:ext>
+  </p:extLst>
 </p:presentation>
 </file>
 
 <file path=ppt/notesMasters/notesMaster1.xml><?xml version="1.0" encoding="utf-8"?>
-<p:notesMaster xmlns:a="http://schemas.openxmlformats.org/drawingml/2006/main" xmlns:p="http://schemas.openxmlformats.org/presentationml/2006/main" xmlns:r="http://schemas.openxmlformats.org/officeDocument/2006/relationships">
+<p:notesMaster xmlns:a="http://schemas.openxmlformats.org/drawingml/2006/main" xmlns:r="http://schemas.openxmlformats.org/officeDocument/2006/relationships" xmlns:p="http://schemas.openxmlformats.org/presentationml/2006/main">
   <p:cSld>
     <p:bg>
       <p:bgRef idx="1001">
@@ -148,241 +167,16 @@
           <a:chExt cx="0" cy="0"/>
         </a:xfrm>
       </p:grpSpPr>
-      <p:sp>
-        <p:nvSpPr>
-          <p:cNvPr id="2" name="Header Placeholder 1"/>
-          <p:cNvSpPr>
-            <a:spLocks noGrp="1"/>
-          </p:cNvSpPr>
-          <p:nvPr>
-            <p:ph type="hdr" sz="quarter"/>
-          </p:nvPr>
-        </p:nvSpPr>
-        <p:spPr>
-          <a:xfrm>
-            <a:off x="0" y="0"/>
-            <a:ext cx="2971800" cy="457200"/>
-          </a:xfrm>
-          <a:prstGeom prst="rect">
-            <a:avLst/>
-          </a:prstGeom>
-        </p:spPr>
-        <p:txBody>
-          <a:bodyPr vert="horz" lIns="91440" tIns="45720" rIns="91440" bIns="45720" rtlCol="0"/>
-          <a:lstStyle>
-            <a:lvl1pPr algn="l">
-              <a:defRPr sz="1200"/>
-            </a:lvl1pPr>
-          </a:lstStyle>
-          <a:p>
-            <a:endParaRPr lang="en-US"/>
-          </a:p>
-        </p:txBody>
-      </p:sp>
-      <p:sp>
-        <p:nvSpPr>
-          <p:cNvPr id="3" name="Date Placeholder 2"/>
-          <p:cNvSpPr>
-            <a:spLocks noGrp="1"/>
-          </p:cNvSpPr>
-          <p:nvPr>
-            <p:ph type="dt" idx="1"/>
-          </p:nvPr>
-        </p:nvSpPr>
-        <p:spPr>
-          <a:xfrm>
-            <a:off x="3884613" y="0"/>
-            <a:ext cx="2971800" cy="457200"/>
-          </a:xfrm>
-          <a:prstGeom prst="rect">
-            <a:avLst/>
-          </a:prstGeom>
-        </p:spPr>
-        <p:txBody>
-          <a:bodyPr vert="horz" lIns="91440" tIns="45720" rIns="91440" bIns="45720" rtlCol="0"/>
-          <a:lstStyle>
-            <a:lvl1pPr algn="r">
-              <a:defRPr sz="1200"/>
-            </a:lvl1pPr>
-          </a:lstStyle>
-          <a:p>
-            <a:fld id="{0F89C1C7-3DCD-1040-A9CF-14679D8B5DDD}" type="datetimeFigureOut">
-              <a:rPr lang="en-US" smtClean="0"/>
-              <a:t>10/17/16</a:t>
-            </a:fld>
-            <a:endParaRPr lang="en-US"/>
-          </a:p>
-        </p:txBody>
-      </p:sp>
-      <p:sp>
-        <p:nvSpPr>
-          <p:cNvPr id="4" name="Slide Image Placeholder 3"/>
-          <p:cNvSpPr>
-            <a:spLocks noGrp="1" noRot="1" noChangeAspect="1"/>
-          </p:cNvSpPr>
-          <p:nvPr>
-            <p:ph type="sldImg" idx="2"/>
-          </p:nvPr>
-        </p:nvSpPr>
-        <p:spPr>
-          <a:xfrm>
-            <a:off x="1143000" y="685800"/>
-            <a:ext cx="4572000" cy="3429000"/>
-          </a:xfrm>
-          <a:prstGeom prst="rect">
-            <a:avLst/>
-          </a:prstGeom>
-          <a:noFill/>
-          <a:ln w="12700">
-            <a:solidFill>
-              <a:prstClr val="black"/>
-            </a:solidFill>
-          </a:ln>
-        </p:spPr>
-        <p:txBody>
-          <a:bodyPr vert="horz" lIns="91440" tIns="45720" rIns="91440" bIns="45720" rtlCol="0" anchor="ctr"/>
-          <a:lstStyle/>
-          <a:p>
-            <a:endParaRPr lang="en-US"/>
-          </a:p>
-        </p:txBody>
-      </p:sp>
-      <p:sp>
-        <p:nvSpPr>
-          <p:cNvPr id="5" name="Notes Placeholder 4"/>
-          <p:cNvSpPr>
-            <a:spLocks noGrp="1"/>
-          </p:cNvSpPr>
-          <p:nvPr>
-            <p:ph type="body" sz="quarter" idx="3"/>
-          </p:nvPr>
-        </p:nvSpPr>
-        <p:spPr>
-          <a:xfrm>
-            <a:off x="685800" y="4343400"/>
-            <a:ext cx="5486400" cy="4114800"/>
-          </a:xfrm>
-          <a:prstGeom prst="rect">
-            <a:avLst/>
-          </a:prstGeom>
-        </p:spPr>
-        <p:txBody>
-          <a:bodyPr vert="horz" lIns="91440" tIns="45720" rIns="91440" bIns="45720" rtlCol="0"/>
-          <a:lstStyle/>
-          <a:p>
-            <a:pPr lvl="0"/>
-            <a:r>
-              <a:rPr lang="en-US" smtClean="0"/>
-              <a:t>Click to edit Master text styles</a:t>
-            </a:r>
-          </a:p>
-          <a:p>
-            <a:pPr lvl="1"/>
-            <a:r>
-              <a:rPr lang="en-US" smtClean="0"/>
-              <a:t>Second level</a:t>
-            </a:r>
-          </a:p>
-          <a:p>
-            <a:pPr lvl="2"/>
-            <a:r>
-              <a:rPr lang="en-US" smtClean="0"/>
-              <a:t>Third level</a:t>
-            </a:r>
-          </a:p>
-          <a:p>
-            <a:pPr lvl="3"/>
-            <a:r>
-              <a:rPr lang="en-US" smtClean="0"/>
-              <a:t>Fourth level</a:t>
-            </a:r>
-          </a:p>
-          <a:p>
-            <a:pPr lvl="4"/>
-            <a:r>
-              <a:rPr lang="en-US" smtClean="0"/>
-              <a:t>Fifth level</a:t>
-            </a:r>
-            <a:endParaRPr lang="en-US"/>
-          </a:p>
-        </p:txBody>
-      </p:sp>
-      <p:sp>
-        <p:nvSpPr>
-          <p:cNvPr id="6" name="Footer Placeholder 5"/>
-          <p:cNvSpPr>
-            <a:spLocks noGrp="1"/>
-          </p:cNvSpPr>
-          <p:nvPr>
-            <p:ph type="ftr" sz="quarter" idx="4"/>
-          </p:nvPr>
-        </p:nvSpPr>
-        <p:spPr>
-          <a:xfrm>
-            <a:off x="0" y="8685213"/>
-            <a:ext cx="2971800" cy="457200"/>
-          </a:xfrm>
-          <a:prstGeom prst="rect">
-            <a:avLst/>
-          </a:prstGeom>
-        </p:spPr>
-        <p:txBody>
-          <a:bodyPr vert="horz" lIns="91440" tIns="45720" rIns="91440" bIns="45720" rtlCol="0" anchor="b"/>
-          <a:lstStyle>
-            <a:lvl1pPr algn="l">
-              <a:defRPr sz="1200"/>
-            </a:lvl1pPr>
-          </a:lstStyle>
-          <a:p>
-            <a:endParaRPr lang="en-US"/>
-          </a:p>
-        </p:txBody>
-      </p:sp>
-      <p:sp>
-        <p:nvSpPr>
-          <p:cNvPr id="7" name="Slide Number Placeholder 6"/>
-          <p:cNvSpPr>
-            <a:spLocks noGrp="1"/>
-          </p:cNvSpPr>
-          <p:nvPr>
-            <p:ph type="sldNum" sz="quarter" idx="5"/>
-          </p:nvPr>
-        </p:nvSpPr>
-        <p:spPr>
-          <a:xfrm>
-            <a:off x="3884613" y="8685213"/>
-            <a:ext cx="2971800" cy="457200"/>
-          </a:xfrm>
-          <a:prstGeom prst="rect">
-            <a:avLst/>
-          </a:prstGeom>
-        </p:spPr>
-        <p:txBody>
-          <a:bodyPr vert="horz" lIns="91440" tIns="45720" rIns="91440" bIns="45720" rtlCol="0" anchor="b"/>
-          <a:lstStyle>
-            <a:lvl1pPr algn="r">
-              <a:defRPr sz="1200"/>
-            </a:lvl1pPr>
-          </a:lstStyle>
-          <a:p>
-            <a:fld id="{BB5E49A5-4136-284D-997B-48E1D791AD67}" type="slidenum">
-              <a:rPr lang="en-US" smtClean="0"/>
-              <a:t>‹#›</a:t>
-            </a:fld>
-            <a:endParaRPr lang="en-US"/>
-          </a:p>
-        </p:txBody>
-      </p:sp>
     </p:spTree>
     <p:extLst>
       <p:ext uri="{BB962C8B-B14F-4D97-AF65-F5344CB8AC3E}">
-        <p14:creationId xmlns:p14="http://schemas.microsoft.com/office/powerpoint/2010/main" val="2623252185"/>
+        <p14:creationId xmlns:p14="http://schemas.microsoft.com/office/powerpoint/2010/main" val="2559347084"/>
       </p:ext>
     </p:extLst>
   </p:cSld>
   <p:clrMap bg1="lt1" tx1="dk1" bg2="lt2" tx2="dk2" accent1="accent1" accent2="accent2" accent3="accent3" accent4="accent4" accent5="accent5" accent6="accent6" hlink="hlink" folHlink="folHlink"/>
   <p:notesStyle>
-    <a:lvl1pPr marL="0" algn="l" defTabSz="457200" rtl="0" eaLnBrk="1" latinLnBrk="0" hangingPunct="1">
+    <a:lvl1pPr marL="0" algn="l" defTabSz="914400" rtl="0" eaLnBrk="1" latinLnBrk="0" hangingPunct="1">
       <a:defRPr sz="1200" kern="1200">
         <a:solidFill>
           <a:schemeClr val="tx1"/>
@@ -392,7 +186,7 @@
         <a:cs typeface="+mn-cs"/>
       </a:defRPr>
     </a:lvl1pPr>
-    <a:lvl2pPr marL="457200" algn="l" defTabSz="457200" rtl="0" eaLnBrk="1" latinLnBrk="0" hangingPunct="1">
+    <a:lvl2pPr marL="457200" algn="l" defTabSz="914400" rtl="0" eaLnBrk="1" latinLnBrk="0" hangingPunct="1">
       <a:defRPr sz="1200" kern="1200">
         <a:solidFill>
           <a:schemeClr val="tx1"/>
@@ -402,7 +196,7 @@
         <a:cs typeface="+mn-cs"/>
       </a:defRPr>
     </a:lvl2pPr>
-    <a:lvl3pPr marL="914400" algn="l" defTabSz="457200" rtl="0" eaLnBrk="1" latinLnBrk="0" hangingPunct="1">
+    <a:lvl3pPr marL="914400" algn="l" defTabSz="914400" rtl="0" eaLnBrk="1" latinLnBrk="0" hangingPunct="1">
       <a:defRPr sz="1200" kern="1200">
         <a:solidFill>
           <a:schemeClr val="tx1"/>
@@ -412,7 +206,7 @@
         <a:cs typeface="+mn-cs"/>
       </a:defRPr>
     </a:lvl3pPr>
-    <a:lvl4pPr marL="1371600" algn="l" defTabSz="457200" rtl="0" eaLnBrk="1" latinLnBrk="0" hangingPunct="1">
+    <a:lvl4pPr marL="1371600" algn="l" defTabSz="914400" rtl="0" eaLnBrk="1" latinLnBrk="0" hangingPunct="1">
       <a:defRPr sz="1200" kern="1200">
         <a:solidFill>
           <a:schemeClr val="tx1"/>
@@ -422,7 +216,7 @@
         <a:cs typeface="+mn-cs"/>
       </a:defRPr>
     </a:lvl4pPr>
-    <a:lvl5pPr marL="1828800" algn="l" defTabSz="457200" rtl="0" eaLnBrk="1" latinLnBrk="0" hangingPunct="1">
+    <a:lvl5pPr marL="1828800" algn="l" defTabSz="914400" rtl="0" eaLnBrk="1" latinLnBrk="0" hangingPunct="1">
       <a:defRPr sz="1200" kern="1200">
         <a:solidFill>
           <a:schemeClr val="tx1"/>
@@ -432,7 +226,7 @@
         <a:cs typeface="+mn-cs"/>
       </a:defRPr>
     </a:lvl5pPr>
-    <a:lvl6pPr marL="2286000" algn="l" defTabSz="457200" rtl="0" eaLnBrk="1" latinLnBrk="0" hangingPunct="1">
+    <a:lvl6pPr marL="2286000" algn="l" defTabSz="914400" rtl="0" eaLnBrk="1" latinLnBrk="0" hangingPunct="1">
       <a:defRPr sz="1200" kern="1200">
         <a:solidFill>
           <a:schemeClr val="tx1"/>
@@ -442,7 +236,7 @@
         <a:cs typeface="+mn-cs"/>
       </a:defRPr>
     </a:lvl6pPr>
-    <a:lvl7pPr marL="2743200" algn="l" defTabSz="457200" rtl="0" eaLnBrk="1" latinLnBrk="0" hangingPunct="1">
+    <a:lvl7pPr marL="2743200" algn="l" defTabSz="914400" rtl="0" eaLnBrk="1" latinLnBrk="0" hangingPunct="1">
       <a:defRPr sz="1200" kern="1200">
         <a:solidFill>
           <a:schemeClr val="tx1"/>
@@ -452,7 +246,7 @@
         <a:cs typeface="+mn-cs"/>
       </a:defRPr>
     </a:lvl7pPr>
-    <a:lvl8pPr marL="3200400" algn="l" defTabSz="457200" rtl="0" eaLnBrk="1" latinLnBrk="0" hangingPunct="1">
+    <a:lvl8pPr marL="3200400" algn="l" defTabSz="914400" rtl="0" eaLnBrk="1" latinLnBrk="0" hangingPunct="1">
       <a:defRPr sz="1200" kern="1200">
         <a:solidFill>
           <a:schemeClr val="tx1"/>
@@ -462,7 +256,7 @@
         <a:cs typeface="+mn-cs"/>
       </a:defRPr>
     </a:lvl8pPr>
-    <a:lvl9pPr marL="3657600" algn="l" defTabSz="457200" rtl="0" eaLnBrk="1" latinLnBrk="0" hangingPunct="1">
+    <a:lvl9pPr marL="3657600" algn="l" defTabSz="914400" rtl="0" eaLnBrk="1" latinLnBrk="0" hangingPunct="1">
       <a:defRPr sz="1200" kern="1200">
         <a:solidFill>
           <a:schemeClr val="tx1"/>
@@ -477,7 +271,7 @@
 </file>
 
 <file path=ppt/notesSlides/notesSlide1.xml><?xml version="1.0" encoding="utf-8"?>
-<p:notes xmlns:a="http://schemas.openxmlformats.org/drawingml/2006/main" xmlns:p="http://schemas.openxmlformats.org/presentationml/2006/main" xmlns:r="http://schemas.openxmlformats.org/officeDocument/2006/relationships">
+<p:notes xmlns:a="http://schemas.openxmlformats.org/drawingml/2006/main" xmlns:r="http://schemas.openxmlformats.org/officeDocument/2006/relationships" xmlns:p="http://schemas.openxmlformats.org/presentationml/2006/main">
   <p:cSld>
     <p:spTree>
       <p:nvGrpSpPr>
@@ -497,7 +291,7 @@
         <p:nvSpPr>
           <p:cNvPr id="2" name="Slide Image Placeholder 1"/>
           <p:cNvSpPr>
-            <a:spLocks noGrp="1"/>
+            <a:spLocks noGrp="1" noRot="1" noChangeAspect="1"/>
           </p:cNvSpPr>
           <p:nvPr>
             <p:ph type="sldImg" idx="2"/>
@@ -512,7 +306,7 @@
             <a:spLocks noGrp="1"/>
           </p:cNvSpPr>
           <p:nvPr>
-            <p:ph type="body" idx="3" sz="quarter"/>
+            <p:ph type="body" sz="quarter" idx="3"/>
           </p:nvPr>
         </p:nvSpPr>
         <p:spPr/>
@@ -533,7 +327,7 @@
             <a:spLocks noGrp="1"/>
           </p:cNvSpPr>
           <p:nvPr>
-            <p:ph type="sldNum" idx="5" sz="quarter"/>
+            <p:ph type="sldNum" sz="quarter" idx="5"/>
           </p:nvPr>
         </p:nvSpPr>
         <p:spPr/>
@@ -547,7 +341,7 @@
 </file>
 
 <file path=ppt/notesSlides/notesSlide10.xml><?xml version="1.0" encoding="utf-8"?>
-<p:notes xmlns:a="http://schemas.openxmlformats.org/drawingml/2006/main" xmlns:p="http://schemas.openxmlformats.org/presentationml/2006/main" xmlns:r="http://schemas.openxmlformats.org/officeDocument/2006/relationships">
+<p:notes xmlns:a="http://schemas.openxmlformats.org/drawingml/2006/main" xmlns:r="http://schemas.openxmlformats.org/officeDocument/2006/relationships" xmlns:p="http://schemas.openxmlformats.org/presentationml/2006/main">
   <p:cSld>
     <p:spTree>
       <p:nvGrpSpPr>
@@ -567,7 +361,7 @@
         <p:nvSpPr>
           <p:cNvPr id="2" name="Slide Image Placeholder 1"/>
           <p:cNvSpPr>
-            <a:spLocks noGrp="1"/>
+            <a:spLocks noGrp="1" noRot="1" noChangeAspect="1"/>
           </p:cNvSpPr>
           <p:nvPr>
             <p:ph type="sldImg" idx="2"/>
@@ -582,7 +376,7 @@
             <a:spLocks noGrp="1"/>
           </p:cNvSpPr>
           <p:nvPr>
-            <p:ph type="body" idx="3" sz="quarter"/>
+            <p:ph type="body" sz="quarter" idx="3"/>
           </p:nvPr>
         </p:nvSpPr>
         <p:spPr/>
@@ -603,7 +397,7 @@
             <a:spLocks noGrp="1"/>
           </p:cNvSpPr>
           <p:nvPr>
-            <p:ph type="sldNum" idx="5" sz="quarter"/>
+            <p:ph type="sldNum" sz="quarter" idx="5"/>
           </p:nvPr>
         </p:nvSpPr>
         <p:spPr/>
@@ -617,7 +411,7 @@
 </file>
 
 <file path=ppt/notesSlides/notesSlide11.xml><?xml version="1.0" encoding="utf-8"?>
-<p:notes xmlns:a="http://schemas.openxmlformats.org/drawingml/2006/main" xmlns:p="http://schemas.openxmlformats.org/presentationml/2006/main" xmlns:r="http://schemas.openxmlformats.org/officeDocument/2006/relationships">
+<p:notes xmlns:a="http://schemas.openxmlformats.org/drawingml/2006/main" xmlns:r="http://schemas.openxmlformats.org/officeDocument/2006/relationships" xmlns:p="http://schemas.openxmlformats.org/presentationml/2006/main">
   <p:cSld>
     <p:spTree>
       <p:nvGrpSpPr>
@@ -637,7 +431,7 @@
         <p:nvSpPr>
           <p:cNvPr id="2" name="Slide Image Placeholder 1"/>
           <p:cNvSpPr>
-            <a:spLocks noGrp="1"/>
+            <a:spLocks noGrp="1" noRot="1" noChangeAspect="1"/>
           </p:cNvSpPr>
           <p:nvPr>
             <p:ph type="sldImg" idx="2"/>
@@ -652,7 +446,7 @@
             <a:spLocks noGrp="1"/>
           </p:cNvSpPr>
           <p:nvPr>
-            <p:ph type="body" idx="3" sz="quarter"/>
+            <p:ph type="body" sz="quarter" idx="3"/>
           </p:nvPr>
         </p:nvSpPr>
         <p:spPr/>
@@ -673,7 +467,7 @@
             <a:spLocks noGrp="1"/>
           </p:cNvSpPr>
           <p:nvPr>
-            <p:ph type="sldNum" idx="5" sz="quarter"/>
+            <p:ph type="sldNum" sz="quarter" idx="5"/>
           </p:nvPr>
         </p:nvSpPr>
         <p:spPr/>
@@ -687,7 +481,7 @@
 </file>
 
 <file path=ppt/notesSlides/notesSlide12.xml><?xml version="1.0" encoding="utf-8"?>
-<p:notes xmlns:a="http://schemas.openxmlformats.org/drawingml/2006/main" xmlns:p="http://schemas.openxmlformats.org/presentationml/2006/main" xmlns:r="http://schemas.openxmlformats.org/officeDocument/2006/relationships">
+<p:notes xmlns:a="http://schemas.openxmlformats.org/drawingml/2006/main" xmlns:r="http://schemas.openxmlformats.org/officeDocument/2006/relationships" xmlns:p="http://schemas.openxmlformats.org/presentationml/2006/main">
   <p:cSld>
     <p:spTree>
       <p:nvGrpSpPr>
@@ -707,7 +501,7 @@
         <p:nvSpPr>
           <p:cNvPr id="2" name="Slide Image Placeholder 1"/>
           <p:cNvSpPr>
-            <a:spLocks noGrp="1"/>
+            <a:spLocks noGrp="1" noRot="1" noChangeAspect="1"/>
           </p:cNvSpPr>
           <p:nvPr>
             <p:ph type="sldImg" idx="2"/>
@@ -722,7 +516,7 @@
             <a:spLocks noGrp="1"/>
           </p:cNvSpPr>
           <p:nvPr>
-            <p:ph type="body" idx="3" sz="quarter"/>
+            <p:ph type="body" sz="quarter" idx="3"/>
           </p:nvPr>
         </p:nvSpPr>
         <p:spPr/>
@@ -743,7 +537,7 @@
             <a:spLocks noGrp="1"/>
           </p:cNvSpPr>
           <p:nvPr>
-            <p:ph type="sldNum" idx="5" sz="quarter"/>
+            <p:ph type="sldNum" sz="quarter" idx="5"/>
           </p:nvPr>
         </p:nvSpPr>
         <p:spPr/>
@@ -757,7 +551,7 @@
 </file>
 
 <file path=ppt/notesSlides/notesSlide13.xml><?xml version="1.0" encoding="utf-8"?>
-<p:notes xmlns:a="http://schemas.openxmlformats.org/drawingml/2006/main" xmlns:p="http://schemas.openxmlformats.org/presentationml/2006/main" xmlns:r="http://schemas.openxmlformats.org/officeDocument/2006/relationships">
+<p:notes xmlns:a="http://schemas.openxmlformats.org/drawingml/2006/main" xmlns:r="http://schemas.openxmlformats.org/officeDocument/2006/relationships" xmlns:p="http://schemas.openxmlformats.org/presentationml/2006/main">
   <p:cSld>
     <p:spTree>
       <p:nvGrpSpPr>
@@ -777,7 +571,7 @@
         <p:nvSpPr>
           <p:cNvPr id="2" name="Slide Image Placeholder 1"/>
           <p:cNvSpPr>
-            <a:spLocks noGrp="1"/>
+            <a:spLocks noGrp="1" noRot="1" noChangeAspect="1"/>
           </p:cNvSpPr>
           <p:nvPr>
             <p:ph type="sldImg" idx="2"/>
@@ -792,7 +586,7 @@
             <a:spLocks noGrp="1"/>
           </p:cNvSpPr>
           <p:nvPr>
-            <p:ph type="body" idx="3" sz="quarter"/>
+            <p:ph type="body" sz="quarter" idx="3"/>
           </p:nvPr>
         </p:nvSpPr>
         <p:spPr/>
@@ -813,7 +607,7 @@
             <a:spLocks noGrp="1"/>
           </p:cNvSpPr>
           <p:nvPr>
-            <p:ph type="sldNum" idx="5" sz="quarter"/>
+            <p:ph type="sldNum" sz="quarter" idx="5"/>
           </p:nvPr>
         </p:nvSpPr>
         <p:spPr/>
@@ -827,7 +621,7 @@
 </file>
 
 <file path=ppt/notesSlides/notesSlide14.xml><?xml version="1.0" encoding="utf-8"?>
-<p:notes xmlns:a="http://schemas.openxmlformats.org/drawingml/2006/main" xmlns:p="http://schemas.openxmlformats.org/presentationml/2006/main" xmlns:r="http://schemas.openxmlformats.org/officeDocument/2006/relationships">
+<p:notes xmlns:a="http://schemas.openxmlformats.org/drawingml/2006/main" xmlns:r="http://schemas.openxmlformats.org/officeDocument/2006/relationships" xmlns:p="http://schemas.openxmlformats.org/presentationml/2006/main">
   <p:cSld>
     <p:spTree>
       <p:nvGrpSpPr>
@@ -847,7 +641,7 @@
         <p:nvSpPr>
           <p:cNvPr id="2" name="Slide Image Placeholder 1"/>
           <p:cNvSpPr>
-            <a:spLocks noGrp="1"/>
+            <a:spLocks noGrp="1" noRot="1" noChangeAspect="1"/>
           </p:cNvSpPr>
           <p:nvPr>
             <p:ph type="sldImg" idx="2"/>
@@ -862,7 +656,7 @@
             <a:spLocks noGrp="1"/>
           </p:cNvSpPr>
           <p:nvPr>
-            <p:ph type="body" idx="3" sz="quarter"/>
+            <p:ph type="body" sz="quarter" idx="3"/>
           </p:nvPr>
         </p:nvSpPr>
         <p:spPr/>
@@ -883,7 +677,7 @@
             <a:spLocks noGrp="1"/>
           </p:cNvSpPr>
           <p:nvPr>
-            <p:ph type="sldNum" idx="5" sz="quarter"/>
+            <p:ph type="sldNum" sz="quarter" idx="5"/>
           </p:nvPr>
         </p:nvSpPr>
         <p:spPr/>
@@ -897,7 +691,7 @@
 </file>
 
 <file path=ppt/notesSlides/notesSlide15.xml><?xml version="1.0" encoding="utf-8"?>
-<p:notes xmlns:a="http://schemas.openxmlformats.org/drawingml/2006/main" xmlns:p="http://schemas.openxmlformats.org/presentationml/2006/main" xmlns:r="http://schemas.openxmlformats.org/officeDocument/2006/relationships">
+<p:notes xmlns:a="http://schemas.openxmlformats.org/drawingml/2006/main" xmlns:r="http://schemas.openxmlformats.org/officeDocument/2006/relationships" xmlns:p="http://schemas.openxmlformats.org/presentationml/2006/main">
   <p:cSld>
     <p:spTree>
       <p:nvGrpSpPr>
@@ -917,7 +711,7 @@
         <p:nvSpPr>
           <p:cNvPr id="2" name="Slide Image Placeholder 1"/>
           <p:cNvSpPr>
-            <a:spLocks noGrp="1"/>
+            <a:spLocks noGrp="1" noRot="1" noChangeAspect="1"/>
           </p:cNvSpPr>
           <p:nvPr>
             <p:ph type="sldImg" idx="2"/>
@@ -932,7 +726,7 @@
             <a:spLocks noGrp="1"/>
           </p:cNvSpPr>
           <p:nvPr>
-            <p:ph type="body" idx="3" sz="quarter"/>
+            <p:ph type="body" sz="quarter" idx="3"/>
           </p:nvPr>
         </p:nvSpPr>
         <p:spPr/>
@@ -953,7 +747,7 @@
             <a:spLocks noGrp="1"/>
           </p:cNvSpPr>
           <p:nvPr>
-            <p:ph type="sldNum" idx="5" sz="quarter"/>
+            <p:ph type="sldNum" sz="quarter" idx="5"/>
           </p:nvPr>
         </p:nvSpPr>
         <p:spPr/>
@@ -967,7 +761,7 @@
 </file>
 
 <file path=ppt/notesSlides/notesSlide16.xml><?xml version="1.0" encoding="utf-8"?>
-<p:notes xmlns:a="http://schemas.openxmlformats.org/drawingml/2006/main" xmlns:p="http://schemas.openxmlformats.org/presentationml/2006/main" xmlns:r="http://schemas.openxmlformats.org/officeDocument/2006/relationships">
+<p:notes xmlns:a="http://schemas.openxmlformats.org/drawingml/2006/main" xmlns:r="http://schemas.openxmlformats.org/officeDocument/2006/relationships" xmlns:p="http://schemas.openxmlformats.org/presentationml/2006/main">
   <p:cSld>
     <p:spTree>
       <p:nvGrpSpPr>
@@ -987,7 +781,7 @@
         <p:nvSpPr>
           <p:cNvPr id="2" name="Slide Image Placeholder 1"/>
           <p:cNvSpPr>
-            <a:spLocks noGrp="1"/>
+            <a:spLocks noGrp="1" noRot="1" noChangeAspect="1"/>
           </p:cNvSpPr>
           <p:nvPr>
             <p:ph type="sldImg" idx="2"/>
@@ -1002,7 +796,7 @@
             <a:spLocks noGrp="1"/>
           </p:cNvSpPr>
           <p:nvPr>
-            <p:ph type="body" idx="3" sz="quarter"/>
+            <p:ph type="body" sz="quarter" idx="3"/>
           </p:nvPr>
         </p:nvSpPr>
         <p:spPr/>
@@ -1023,7 +817,7 @@
             <a:spLocks noGrp="1"/>
           </p:cNvSpPr>
           <p:nvPr>
-            <p:ph type="sldNum" idx="5" sz="quarter"/>
+            <p:ph type="sldNum" sz="quarter" idx="5"/>
           </p:nvPr>
         </p:nvSpPr>
         <p:spPr/>
@@ -1037,7 +831,7 @@
 </file>
 
 <file path=ppt/notesSlides/notesSlide17.xml><?xml version="1.0" encoding="utf-8"?>
-<p:notes xmlns:a="http://schemas.openxmlformats.org/drawingml/2006/main" xmlns:p="http://schemas.openxmlformats.org/presentationml/2006/main" xmlns:r="http://schemas.openxmlformats.org/officeDocument/2006/relationships">
+<p:notes xmlns:a="http://schemas.openxmlformats.org/drawingml/2006/main" xmlns:r="http://schemas.openxmlformats.org/officeDocument/2006/relationships" xmlns:p="http://schemas.openxmlformats.org/presentationml/2006/main">
   <p:cSld>
     <p:spTree>
       <p:nvGrpSpPr>
@@ -1057,7 +851,7 @@
         <p:nvSpPr>
           <p:cNvPr id="2" name="Slide Image Placeholder 1"/>
           <p:cNvSpPr>
-            <a:spLocks noGrp="1"/>
+            <a:spLocks noGrp="1" noRot="1" noChangeAspect="1"/>
           </p:cNvSpPr>
           <p:nvPr>
             <p:ph type="sldImg" idx="2"/>
@@ -1072,7 +866,7 @@
             <a:spLocks noGrp="1"/>
           </p:cNvSpPr>
           <p:nvPr>
-            <p:ph type="body" idx="3" sz="quarter"/>
+            <p:ph type="body" sz="quarter" idx="3"/>
           </p:nvPr>
         </p:nvSpPr>
         <p:spPr/>
@@ -1093,7 +887,7 @@
             <a:spLocks noGrp="1"/>
           </p:cNvSpPr>
           <p:nvPr>
-            <p:ph type="sldNum" idx="5" sz="quarter"/>
+            <p:ph type="sldNum" sz="quarter" idx="5"/>
           </p:nvPr>
         </p:nvSpPr>
         <p:spPr/>
@@ -1107,7 +901,7 @@
 </file>
 
 <file path=ppt/notesSlides/notesSlide18.xml><?xml version="1.0" encoding="utf-8"?>
-<p:notes xmlns:a="http://schemas.openxmlformats.org/drawingml/2006/main" xmlns:p="http://schemas.openxmlformats.org/presentationml/2006/main" xmlns:r="http://schemas.openxmlformats.org/officeDocument/2006/relationships">
+<p:notes xmlns:a="http://schemas.openxmlformats.org/drawingml/2006/main" xmlns:r="http://schemas.openxmlformats.org/officeDocument/2006/relationships" xmlns:p="http://schemas.openxmlformats.org/presentationml/2006/main">
   <p:cSld>
     <p:spTree>
       <p:nvGrpSpPr>
@@ -1127,7 +921,7 @@
         <p:nvSpPr>
           <p:cNvPr id="2" name="Slide Image Placeholder 1"/>
           <p:cNvSpPr>
-            <a:spLocks noGrp="1"/>
+            <a:spLocks noGrp="1" noRot="1" noChangeAspect="1"/>
           </p:cNvSpPr>
           <p:nvPr>
             <p:ph type="sldImg" idx="2"/>
@@ -1142,7 +936,7 @@
             <a:spLocks noGrp="1"/>
           </p:cNvSpPr>
           <p:nvPr>
-            <p:ph type="body" idx="3" sz="quarter"/>
+            <p:ph type="body" sz="quarter" idx="3"/>
           </p:nvPr>
         </p:nvSpPr>
         <p:spPr/>
@@ -1163,7 +957,7 @@
             <a:spLocks noGrp="1"/>
           </p:cNvSpPr>
           <p:nvPr>
-            <p:ph type="sldNum" idx="5" sz="quarter"/>
+            <p:ph type="sldNum" sz="quarter" idx="5"/>
           </p:nvPr>
         </p:nvSpPr>
         <p:spPr/>
@@ -1177,7 +971,7 @@
 </file>
 
 <file path=ppt/notesSlides/notesSlide19.xml><?xml version="1.0" encoding="utf-8"?>
-<p:notes xmlns:a="http://schemas.openxmlformats.org/drawingml/2006/main" xmlns:p="http://schemas.openxmlformats.org/presentationml/2006/main" xmlns:r="http://schemas.openxmlformats.org/officeDocument/2006/relationships">
+<p:notes xmlns:a="http://schemas.openxmlformats.org/drawingml/2006/main" xmlns:r="http://schemas.openxmlformats.org/officeDocument/2006/relationships" xmlns:p="http://schemas.openxmlformats.org/presentationml/2006/main">
   <p:cSld>
     <p:spTree>
       <p:nvGrpSpPr>
@@ -1197,7 +991,7 @@
         <p:nvSpPr>
           <p:cNvPr id="2" name="Slide Image Placeholder 1"/>
           <p:cNvSpPr>
-            <a:spLocks noGrp="1"/>
+            <a:spLocks noGrp="1" noRot="1" noChangeAspect="1"/>
           </p:cNvSpPr>
           <p:nvPr>
             <p:ph type="sldImg" idx="2"/>
@@ -1212,7 +1006,7 @@
             <a:spLocks noGrp="1"/>
           </p:cNvSpPr>
           <p:nvPr>
-            <p:ph type="body" idx="3" sz="quarter"/>
+            <p:ph type="body" sz="quarter" idx="3"/>
           </p:nvPr>
         </p:nvSpPr>
         <p:spPr/>
@@ -1233,7 +1027,7 @@
             <a:spLocks noGrp="1"/>
           </p:cNvSpPr>
           <p:nvPr>
-            <p:ph type="sldNum" idx="5" sz="quarter"/>
+            <p:ph type="sldNum" sz="quarter" idx="5"/>
           </p:nvPr>
         </p:nvSpPr>
         <p:spPr/>
@@ -1247,7 +1041,7 @@
 </file>
 
 <file path=ppt/notesSlides/notesSlide2.xml><?xml version="1.0" encoding="utf-8"?>
-<p:notes xmlns:a="http://schemas.openxmlformats.org/drawingml/2006/main" xmlns:p="http://schemas.openxmlformats.org/presentationml/2006/main" xmlns:r="http://schemas.openxmlformats.org/officeDocument/2006/relationships">
+<p:notes xmlns:a="http://schemas.openxmlformats.org/drawingml/2006/main" xmlns:r="http://schemas.openxmlformats.org/officeDocument/2006/relationships" xmlns:p="http://schemas.openxmlformats.org/presentationml/2006/main">
   <p:cSld>
     <p:spTree>
       <p:nvGrpSpPr>
@@ -1267,7 +1061,7 @@
         <p:nvSpPr>
           <p:cNvPr id="2" name="Slide Image Placeholder 1"/>
           <p:cNvSpPr>
-            <a:spLocks noGrp="1"/>
+            <a:spLocks noGrp="1" noRot="1" noChangeAspect="1"/>
           </p:cNvSpPr>
           <p:nvPr>
             <p:ph type="sldImg" idx="2"/>
@@ -1282,7 +1076,7 @@
             <a:spLocks noGrp="1"/>
           </p:cNvSpPr>
           <p:nvPr>
-            <p:ph type="body" idx="3" sz="quarter"/>
+            <p:ph type="body" sz="quarter" idx="3"/>
           </p:nvPr>
         </p:nvSpPr>
         <p:spPr/>
@@ -1303,7 +1097,7 @@
             <a:spLocks noGrp="1"/>
           </p:cNvSpPr>
           <p:nvPr>
-            <p:ph type="sldNum" idx="5" sz="quarter"/>
+            <p:ph type="sldNum" sz="quarter" idx="5"/>
           </p:nvPr>
         </p:nvSpPr>
         <p:spPr/>
@@ -1317,7 +1111,7 @@
 </file>
 
 <file path=ppt/notesSlides/notesSlide20.xml><?xml version="1.0" encoding="utf-8"?>
-<p:notes xmlns:a="http://schemas.openxmlformats.org/drawingml/2006/main" xmlns:p="http://schemas.openxmlformats.org/presentationml/2006/main" xmlns:r="http://schemas.openxmlformats.org/officeDocument/2006/relationships">
+<p:notes xmlns:a="http://schemas.openxmlformats.org/drawingml/2006/main" xmlns:r="http://schemas.openxmlformats.org/officeDocument/2006/relationships" xmlns:p="http://schemas.openxmlformats.org/presentationml/2006/main">
   <p:cSld>
     <p:spTree>
       <p:nvGrpSpPr>
@@ -1337,7 +1131,7 @@
         <p:nvSpPr>
           <p:cNvPr id="2" name="Slide Image Placeholder 1"/>
           <p:cNvSpPr>
-            <a:spLocks noGrp="1"/>
+            <a:spLocks noGrp="1" noRot="1" noChangeAspect="1"/>
           </p:cNvSpPr>
           <p:nvPr>
             <p:ph type="sldImg" idx="2"/>
@@ -1352,7 +1146,7 @@
             <a:spLocks noGrp="1"/>
           </p:cNvSpPr>
           <p:nvPr>
-            <p:ph type="body" idx="3" sz="quarter"/>
+            <p:ph type="body" sz="quarter" idx="3"/>
           </p:nvPr>
         </p:nvSpPr>
         <p:spPr/>
@@ -1373,7 +1167,7 @@
             <a:spLocks noGrp="1"/>
           </p:cNvSpPr>
           <p:nvPr>
-            <p:ph type="sldNum" idx="5" sz="quarter"/>
+            <p:ph type="sldNum" sz="quarter" idx="5"/>
           </p:nvPr>
         </p:nvSpPr>
         <p:spPr/>
@@ -1387,7 +1181,7 @@
 </file>
 
 <file path=ppt/notesSlides/notesSlide3.xml><?xml version="1.0" encoding="utf-8"?>
-<p:notes xmlns:a="http://schemas.openxmlformats.org/drawingml/2006/main" xmlns:p="http://schemas.openxmlformats.org/presentationml/2006/main" xmlns:r="http://schemas.openxmlformats.org/officeDocument/2006/relationships">
+<p:notes xmlns:a="http://schemas.openxmlformats.org/drawingml/2006/main" xmlns:r="http://schemas.openxmlformats.org/officeDocument/2006/relationships" xmlns:p="http://schemas.openxmlformats.org/presentationml/2006/main">
   <p:cSld>
     <p:spTree>
       <p:nvGrpSpPr>
@@ -1407,7 +1201,7 @@
         <p:nvSpPr>
           <p:cNvPr id="2" name="Slide Image Placeholder 1"/>
           <p:cNvSpPr>
-            <a:spLocks noGrp="1"/>
+            <a:spLocks noGrp="1" noRot="1" noChangeAspect="1"/>
           </p:cNvSpPr>
           <p:nvPr>
             <p:ph type="sldImg" idx="2"/>
@@ -1422,7 +1216,7 @@
             <a:spLocks noGrp="1"/>
           </p:cNvSpPr>
           <p:nvPr>
-            <p:ph type="body" idx="3" sz="quarter"/>
+            <p:ph type="body" sz="quarter" idx="3"/>
           </p:nvPr>
         </p:nvSpPr>
         <p:spPr/>
@@ -1443,7 +1237,7 @@
             <a:spLocks noGrp="1"/>
           </p:cNvSpPr>
           <p:nvPr>
-            <p:ph type="sldNum" idx="5" sz="quarter"/>
+            <p:ph type="sldNum" sz="quarter" idx="5"/>
           </p:nvPr>
         </p:nvSpPr>
         <p:spPr/>
@@ -1457,7 +1251,7 @@
 </file>
 
 <file path=ppt/notesSlides/notesSlide4.xml><?xml version="1.0" encoding="utf-8"?>
-<p:notes xmlns:a="http://schemas.openxmlformats.org/drawingml/2006/main" xmlns:p="http://schemas.openxmlformats.org/presentationml/2006/main" xmlns:r="http://schemas.openxmlformats.org/officeDocument/2006/relationships">
+<p:notes xmlns:a="http://schemas.openxmlformats.org/drawingml/2006/main" xmlns:r="http://schemas.openxmlformats.org/officeDocument/2006/relationships" xmlns:p="http://schemas.openxmlformats.org/presentationml/2006/main">
   <p:cSld>
     <p:spTree>
       <p:nvGrpSpPr>
@@ -1477,7 +1271,7 @@
         <p:nvSpPr>
           <p:cNvPr id="2" name="Slide Image Placeholder 1"/>
           <p:cNvSpPr>
-            <a:spLocks noGrp="1"/>
+            <a:spLocks noGrp="1" noRot="1" noChangeAspect="1"/>
           </p:cNvSpPr>
           <p:nvPr>
             <p:ph type="sldImg" idx="2"/>
@@ -1492,7 +1286,7 @@
             <a:spLocks noGrp="1"/>
           </p:cNvSpPr>
           <p:nvPr>
-            <p:ph type="body" idx="3" sz="quarter"/>
+            <p:ph type="body" sz="quarter" idx="3"/>
           </p:nvPr>
         </p:nvSpPr>
         <p:spPr/>
@@ -1513,7 +1307,7 @@
             <a:spLocks noGrp="1"/>
           </p:cNvSpPr>
           <p:nvPr>
-            <p:ph type="sldNum" idx="5" sz="quarter"/>
+            <p:ph type="sldNum" sz="quarter" idx="5"/>
           </p:nvPr>
         </p:nvSpPr>
         <p:spPr/>
@@ -1527,7 +1321,7 @@
 </file>
 
 <file path=ppt/notesSlides/notesSlide5.xml><?xml version="1.0" encoding="utf-8"?>
-<p:notes xmlns:a="http://schemas.openxmlformats.org/drawingml/2006/main" xmlns:p="http://schemas.openxmlformats.org/presentationml/2006/main" xmlns:r="http://schemas.openxmlformats.org/officeDocument/2006/relationships">
+<p:notes xmlns:a="http://schemas.openxmlformats.org/drawingml/2006/main" xmlns:r="http://schemas.openxmlformats.org/officeDocument/2006/relationships" xmlns:p="http://schemas.openxmlformats.org/presentationml/2006/main">
   <p:cSld>
     <p:spTree>
       <p:nvGrpSpPr>
@@ -1547,7 +1341,7 @@
         <p:nvSpPr>
           <p:cNvPr id="2" name="Slide Image Placeholder 1"/>
           <p:cNvSpPr>
-            <a:spLocks noGrp="1"/>
+            <a:spLocks noGrp="1" noRot="1" noChangeAspect="1"/>
           </p:cNvSpPr>
           <p:nvPr>
             <p:ph type="sldImg" idx="2"/>
@@ -1562,7 +1356,7 @@
             <a:spLocks noGrp="1"/>
           </p:cNvSpPr>
           <p:nvPr>
-            <p:ph type="body" idx="3" sz="quarter"/>
+            <p:ph type="body" sz="quarter" idx="3"/>
           </p:nvPr>
         </p:nvSpPr>
         <p:spPr/>
@@ -1583,7 +1377,7 @@
             <a:spLocks noGrp="1"/>
           </p:cNvSpPr>
           <p:nvPr>
-            <p:ph type="sldNum" idx="5" sz="quarter"/>
+            <p:ph type="sldNum" sz="quarter" idx="5"/>
           </p:nvPr>
         </p:nvSpPr>
         <p:spPr/>
@@ -1597,7 +1391,7 @@
 </file>
 
 <file path=ppt/notesSlides/notesSlide6.xml><?xml version="1.0" encoding="utf-8"?>
-<p:notes xmlns:a="http://schemas.openxmlformats.org/drawingml/2006/main" xmlns:p="http://schemas.openxmlformats.org/presentationml/2006/main" xmlns:r="http://schemas.openxmlformats.org/officeDocument/2006/relationships">
+<p:notes xmlns:a="http://schemas.openxmlformats.org/drawingml/2006/main" xmlns:r="http://schemas.openxmlformats.org/officeDocument/2006/relationships" xmlns:p="http://schemas.openxmlformats.org/presentationml/2006/main">
   <p:cSld>
     <p:spTree>
       <p:nvGrpSpPr>
@@ -1617,7 +1411,7 @@
         <p:nvSpPr>
           <p:cNvPr id="2" name="Slide Image Placeholder 1"/>
           <p:cNvSpPr>
-            <a:spLocks noGrp="1"/>
+            <a:spLocks noGrp="1" noRot="1" noChangeAspect="1"/>
           </p:cNvSpPr>
           <p:nvPr>
             <p:ph type="sldImg" idx="2"/>
@@ -1632,7 +1426,7 @@
             <a:spLocks noGrp="1"/>
           </p:cNvSpPr>
           <p:nvPr>
-            <p:ph type="body" idx="3" sz="quarter"/>
+            <p:ph type="body" sz="quarter" idx="3"/>
           </p:nvPr>
         </p:nvSpPr>
         <p:spPr/>
@@ -1653,7 +1447,7 @@
             <a:spLocks noGrp="1"/>
           </p:cNvSpPr>
           <p:nvPr>
-            <p:ph type="sldNum" idx="5" sz="quarter"/>
+            <p:ph type="sldNum" sz="quarter" idx="5"/>
           </p:nvPr>
         </p:nvSpPr>
         <p:spPr/>
@@ -1667,7 +1461,7 @@
 </file>
 
 <file path=ppt/notesSlides/notesSlide7.xml><?xml version="1.0" encoding="utf-8"?>
-<p:notes xmlns:a="http://schemas.openxmlformats.org/drawingml/2006/main" xmlns:p="http://schemas.openxmlformats.org/presentationml/2006/main" xmlns:r="http://schemas.openxmlformats.org/officeDocument/2006/relationships">
+<p:notes xmlns:a="http://schemas.openxmlformats.org/drawingml/2006/main" xmlns:r="http://schemas.openxmlformats.org/officeDocument/2006/relationships" xmlns:p="http://schemas.openxmlformats.org/presentationml/2006/main">
   <p:cSld>
     <p:spTree>
       <p:nvGrpSpPr>
@@ -1687,7 +1481,7 @@
         <p:nvSpPr>
           <p:cNvPr id="2" name="Slide Image Placeholder 1"/>
           <p:cNvSpPr>
-            <a:spLocks noGrp="1"/>
+            <a:spLocks noGrp="1" noRot="1" noChangeAspect="1"/>
           </p:cNvSpPr>
           <p:nvPr>
             <p:ph type="sldImg" idx="2"/>
@@ -1702,7 +1496,7 @@
             <a:spLocks noGrp="1"/>
           </p:cNvSpPr>
           <p:nvPr>
-            <p:ph type="body" idx="3" sz="quarter"/>
+            <p:ph type="body" sz="quarter" idx="3"/>
           </p:nvPr>
         </p:nvSpPr>
         <p:spPr/>
@@ -1723,7 +1517,7 @@
             <a:spLocks noGrp="1"/>
           </p:cNvSpPr>
           <p:nvPr>
-            <p:ph type="sldNum" idx="5" sz="quarter"/>
+            <p:ph type="sldNum" sz="quarter" idx="5"/>
           </p:nvPr>
         </p:nvSpPr>
         <p:spPr/>
@@ -1737,7 +1531,7 @@
 </file>
 
 <file path=ppt/notesSlides/notesSlide8.xml><?xml version="1.0" encoding="utf-8"?>
-<p:notes xmlns:a="http://schemas.openxmlformats.org/drawingml/2006/main" xmlns:p="http://schemas.openxmlformats.org/presentationml/2006/main" xmlns:r="http://schemas.openxmlformats.org/officeDocument/2006/relationships">
+<p:notes xmlns:a="http://schemas.openxmlformats.org/drawingml/2006/main" xmlns:r="http://schemas.openxmlformats.org/officeDocument/2006/relationships" xmlns:p="http://schemas.openxmlformats.org/presentationml/2006/main">
   <p:cSld>
     <p:spTree>
       <p:nvGrpSpPr>
@@ -1757,7 +1551,7 @@
         <p:nvSpPr>
           <p:cNvPr id="2" name="Slide Image Placeholder 1"/>
           <p:cNvSpPr>
-            <a:spLocks noGrp="1"/>
+            <a:spLocks noGrp="1" noRot="1" noChangeAspect="1"/>
           </p:cNvSpPr>
           <p:nvPr>
             <p:ph type="sldImg" idx="2"/>
@@ -1772,7 +1566,7 @@
             <a:spLocks noGrp="1"/>
           </p:cNvSpPr>
           <p:nvPr>
-            <p:ph type="body" idx="3" sz="quarter"/>
+            <p:ph type="body" sz="quarter" idx="3"/>
           </p:nvPr>
         </p:nvSpPr>
         <p:spPr/>
@@ -1793,7 +1587,7 @@
             <a:spLocks noGrp="1"/>
           </p:cNvSpPr>
           <p:nvPr>
-            <p:ph type="sldNum" idx="5" sz="quarter"/>
+            <p:ph type="sldNum" sz="quarter" idx="5"/>
           </p:nvPr>
         </p:nvSpPr>
         <p:spPr/>
@@ -1807,7 +1601,7 @@
 </file>
 
 <file path=ppt/notesSlides/notesSlide9.xml><?xml version="1.0" encoding="utf-8"?>
-<p:notes xmlns:a="http://schemas.openxmlformats.org/drawingml/2006/main" xmlns:p="http://schemas.openxmlformats.org/presentationml/2006/main" xmlns:r="http://schemas.openxmlformats.org/officeDocument/2006/relationships">
+<p:notes xmlns:a="http://schemas.openxmlformats.org/drawingml/2006/main" xmlns:r="http://schemas.openxmlformats.org/officeDocument/2006/relationships" xmlns:p="http://schemas.openxmlformats.org/presentationml/2006/main">
   <p:cSld>
     <p:spTree>
       <p:nvGrpSpPr>
@@ -1827,7 +1621,7 @@
         <p:nvSpPr>
           <p:cNvPr id="2" name="Slide Image Placeholder 1"/>
           <p:cNvSpPr>
-            <a:spLocks noGrp="1"/>
+            <a:spLocks noGrp="1" noRot="1" noChangeAspect="1"/>
           </p:cNvSpPr>
           <p:nvPr>
             <p:ph type="sldImg" idx="2"/>
@@ -1842,7 +1636,7 @@
             <a:spLocks noGrp="1"/>
           </p:cNvSpPr>
           <p:nvPr>
-            <p:ph type="body" idx="3" sz="quarter"/>
+            <p:ph type="body" sz="quarter" idx="3"/>
           </p:nvPr>
         </p:nvSpPr>
         <p:spPr/>
@@ -1863,7 +1657,7 @@
             <a:spLocks noGrp="1"/>
           </p:cNvSpPr>
           <p:nvPr>
-            <p:ph type="sldNum" idx="5" sz="quarter"/>
+            <p:ph type="sldNum" sz="quarter" idx="5"/>
           </p:nvPr>
         </p:nvSpPr>
         <p:spPr/>
@@ -1914,10 +1708,9 @@
           <a:lstStyle/>
           <a:p>
             <a:r>
-              <a:rPr lang="en-US" smtClean="0"/>
+              <a:rPr lang="en-US"/>
               <a:t>Click to edit Master title style</a:t>
             </a:r>
-            <a:endParaRPr lang="en-US"/>
           </a:p>
         </p:txBody>
       </p:sp>
@@ -2033,10 +1826,9 @@
           </a:lstStyle>
           <a:p>
             <a:r>
-              <a:rPr lang="en-US" smtClean="0"/>
+              <a:rPr lang="en-US"/>
               <a:t>Click to edit Master subtitle style</a:t>
             </a:r>
-            <a:endParaRPr lang="en-US"/>
           </a:p>
         </p:txBody>
       </p:sp>
@@ -2057,7 +1849,7 @@
           <a:p>
             <a:fld id="{5BCAD085-E8A6-8845-BD4E-CB4CCA059FC4}" type="datetimeFigureOut">
               <a:rPr lang="en-US" smtClean="0"/>
-              <a:t>1/27/13</a:t>
+              <a:t>6/4/2026</a:t>
             </a:fld>
             <a:endParaRPr lang="en-US"/>
           </a:p>
@@ -2099,7 +1891,7 @@
           <a:p>
             <a:fld id="{C1FF6DA9-008F-8B48-92A6-B652298478BF}" type="slidenum">
               <a:rPr lang="en-US" smtClean="0"/>
-              <a:t>‹#›</a:t>
+              <a:t>‹Nº›</a:t>
             </a:fld>
             <a:endParaRPr lang="en-US"/>
           </a:p>
@@ -2151,10 +1943,9 @@
           <a:lstStyle/>
           <a:p>
             <a:r>
-              <a:rPr lang="en-US" smtClean="0"/>
+              <a:rPr lang="en-US"/>
               <a:t>Click to edit Master title style</a:t>
             </a:r>
-            <a:endParaRPr lang="en-US"/>
           </a:p>
         </p:txBody>
       </p:sp>
@@ -2175,38 +1966,37 @@
           <a:p>
             <a:pPr lvl="0"/>
             <a:r>
-              <a:rPr lang="en-US" smtClean="0"/>
+              <a:rPr lang="en-US"/>
               <a:t>Click to edit Master text styles</a:t>
             </a:r>
           </a:p>
           <a:p>
             <a:pPr lvl="1"/>
             <a:r>
-              <a:rPr lang="en-US" smtClean="0"/>
+              <a:rPr lang="en-US"/>
               <a:t>Second level</a:t>
             </a:r>
           </a:p>
           <a:p>
             <a:pPr lvl="2"/>
             <a:r>
-              <a:rPr lang="en-US" smtClean="0"/>
+              <a:rPr lang="en-US"/>
               <a:t>Third level</a:t>
             </a:r>
           </a:p>
           <a:p>
             <a:pPr lvl="3"/>
             <a:r>
-              <a:rPr lang="en-US" smtClean="0"/>
+              <a:rPr lang="en-US"/>
               <a:t>Fourth level</a:t>
             </a:r>
           </a:p>
           <a:p>
             <a:pPr lvl="4"/>
             <a:r>
-              <a:rPr lang="en-US" smtClean="0"/>
+              <a:rPr lang="en-US"/>
               <a:t>Fifth level</a:t>
             </a:r>
-            <a:endParaRPr lang="en-US"/>
           </a:p>
         </p:txBody>
       </p:sp>
@@ -2227,7 +2017,7 @@
           <a:p>
             <a:fld id="{5BCAD085-E8A6-8845-BD4E-CB4CCA059FC4}" type="datetimeFigureOut">
               <a:rPr lang="en-US" smtClean="0"/>
-              <a:t>1/27/13</a:t>
+              <a:t>6/4/2026</a:t>
             </a:fld>
             <a:endParaRPr lang="en-US"/>
           </a:p>
@@ -2269,7 +2059,7 @@
           <a:p>
             <a:fld id="{C1FF6DA9-008F-8B48-92A6-B652298478BF}" type="slidenum">
               <a:rPr lang="en-US" smtClean="0"/>
-              <a:t>‹#›</a:t>
+              <a:t>‹Nº›</a:t>
             </a:fld>
             <a:endParaRPr lang="en-US"/>
           </a:p>
@@ -2326,10 +2116,9 @@
           <a:lstStyle/>
           <a:p>
             <a:r>
-              <a:rPr lang="en-US" smtClean="0"/>
+              <a:rPr lang="en-US"/>
               <a:t>Click to edit Master title style</a:t>
             </a:r>
-            <a:endParaRPr lang="en-US"/>
           </a:p>
         </p:txBody>
       </p:sp>
@@ -2355,38 +2144,37 @@
           <a:p>
             <a:pPr lvl="0"/>
             <a:r>
-              <a:rPr lang="en-US" smtClean="0"/>
+              <a:rPr lang="en-US"/>
               <a:t>Click to edit Master text styles</a:t>
             </a:r>
           </a:p>
           <a:p>
             <a:pPr lvl="1"/>
             <a:r>
-              <a:rPr lang="en-US" smtClean="0"/>
+              <a:rPr lang="en-US"/>
               <a:t>Second level</a:t>
             </a:r>
           </a:p>
           <a:p>
             <a:pPr lvl="2"/>
             <a:r>
-              <a:rPr lang="en-US" smtClean="0"/>
+              <a:rPr lang="en-US"/>
               <a:t>Third level</a:t>
             </a:r>
           </a:p>
           <a:p>
             <a:pPr lvl="3"/>
             <a:r>
-              <a:rPr lang="en-US" smtClean="0"/>
+              <a:rPr lang="en-US"/>
               <a:t>Fourth level</a:t>
             </a:r>
           </a:p>
           <a:p>
             <a:pPr lvl="4"/>
             <a:r>
-              <a:rPr lang="en-US" smtClean="0"/>
+              <a:rPr lang="en-US"/>
               <a:t>Fifth level</a:t>
             </a:r>
-            <a:endParaRPr lang="en-US"/>
           </a:p>
         </p:txBody>
       </p:sp>
@@ -2407,7 +2195,7 @@
           <a:p>
             <a:fld id="{5BCAD085-E8A6-8845-BD4E-CB4CCA059FC4}" type="datetimeFigureOut">
               <a:rPr lang="en-US" smtClean="0"/>
-              <a:t>1/27/13</a:t>
+              <a:t>6/4/2026</a:t>
             </a:fld>
             <a:endParaRPr lang="en-US"/>
           </a:p>
@@ -2449,7 +2237,7 @@
           <a:p>
             <a:fld id="{C1FF6DA9-008F-8B48-92A6-B652298478BF}" type="slidenum">
               <a:rPr lang="en-US" smtClean="0"/>
-              <a:t>‹#›</a:t>
+              <a:t>‹Nº›</a:t>
             </a:fld>
             <a:endParaRPr lang="en-US"/>
           </a:p>
@@ -2501,10 +2289,9 @@
           <a:lstStyle/>
           <a:p>
             <a:r>
-              <a:rPr lang="en-US" smtClean="0"/>
+              <a:rPr lang="en-US"/>
               <a:t>Click to edit Master title style</a:t>
             </a:r>
-            <a:endParaRPr lang="en-US"/>
           </a:p>
         </p:txBody>
       </p:sp>
@@ -2525,38 +2312,37 @@
           <a:p>
             <a:pPr lvl="0"/>
             <a:r>
-              <a:rPr lang="en-US" smtClean="0"/>
+              <a:rPr lang="en-US"/>
               <a:t>Click to edit Master text styles</a:t>
             </a:r>
           </a:p>
           <a:p>
             <a:pPr lvl="1"/>
             <a:r>
-              <a:rPr lang="en-US" smtClean="0"/>
+              <a:rPr lang="en-US"/>
               <a:t>Second level</a:t>
             </a:r>
           </a:p>
           <a:p>
             <a:pPr lvl="2"/>
             <a:r>
-              <a:rPr lang="en-US" smtClean="0"/>
+              <a:rPr lang="en-US"/>
               <a:t>Third level</a:t>
             </a:r>
           </a:p>
           <a:p>
             <a:pPr lvl="3"/>
             <a:r>
-              <a:rPr lang="en-US" smtClean="0"/>
+              <a:rPr lang="en-US"/>
               <a:t>Fourth level</a:t>
             </a:r>
           </a:p>
           <a:p>
             <a:pPr lvl="4"/>
             <a:r>
-              <a:rPr lang="en-US" smtClean="0"/>
+              <a:rPr lang="en-US"/>
               <a:t>Fifth level</a:t>
             </a:r>
-            <a:endParaRPr lang="en-US"/>
           </a:p>
         </p:txBody>
       </p:sp>
@@ -2577,7 +2363,7 @@
           <a:p>
             <a:fld id="{5BCAD085-E8A6-8845-BD4E-CB4CCA059FC4}" type="datetimeFigureOut">
               <a:rPr lang="en-US" smtClean="0"/>
-              <a:t>1/27/13</a:t>
+              <a:t>6/4/2026</a:t>
             </a:fld>
             <a:endParaRPr lang="en-US"/>
           </a:p>
@@ -2619,7 +2405,7 @@
           <a:p>
             <a:fld id="{C1FF6DA9-008F-8B48-92A6-B652298478BF}" type="slidenum">
               <a:rPr lang="en-US" smtClean="0"/>
-              <a:t>‹#›</a:t>
+              <a:t>‹Nº›</a:t>
             </a:fld>
             <a:endParaRPr lang="en-US"/>
           </a:p>
@@ -2680,10 +2466,9 @@
           </a:lstStyle>
           <a:p>
             <a:r>
-              <a:rPr lang="en-US" smtClean="0"/>
+              <a:rPr lang="en-US"/>
               <a:t>Click to edit Master title style</a:t>
             </a:r>
-            <a:endParaRPr lang="en-US"/>
           </a:p>
         </p:txBody>
       </p:sp>
@@ -2800,7 +2585,7 @@
           <a:p>
             <a:pPr lvl="0"/>
             <a:r>
-              <a:rPr lang="en-US" smtClean="0"/>
+              <a:rPr lang="en-US"/>
               <a:t>Click to edit Master text styles</a:t>
             </a:r>
           </a:p>
@@ -2823,7 +2608,7 @@
           <a:p>
             <a:fld id="{5BCAD085-E8A6-8845-BD4E-CB4CCA059FC4}" type="datetimeFigureOut">
               <a:rPr lang="en-US" smtClean="0"/>
-              <a:t>1/27/13</a:t>
+              <a:t>6/4/2026</a:t>
             </a:fld>
             <a:endParaRPr lang="en-US"/>
           </a:p>
@@ -2865,7 +2650,7 @@
           <a:p>
             <a:fld id="{C1FF6DA9-008F-8B48-92A6-B652298478BF}" type="slidenum">
               <a:rPr lang="en-US" smtClean="0"/>
-              <a:t>‹#›</a:t>
+              <a:t>‹Nº›</a:t>
             </a:fld>
             <a:endParaRPr lang="en-US"/>
           </a:p>
@@ -2917,10 +2702,9 @@
           <a:lstStyle/>
           <a:p>
             <a:r>
-              <a:rPr lang="en-US" smtClean="0"/>
+              <a:rPr lang="en-US"/>
               <a:t>Click to edit Master title style</a:t>
             </a:r>
-            <a:endParaRPr lang="en-US"/>
           </a:p>
         </p:txBody>
       </p:sp>
@@ -2974,38 +2758,37 @@
           <a:p>
             <a:pPr lvl="0"/>
             <a:r>
-              <a:rPr lang="en-US" smtClean="0"/>
+              <a:rPr lang="en-US"/>
               <a:t>Click to edit Master text styles</a:t>
             </a:r>
           </a:p>
           <a:p>
             <a:pPr lvl="1"/>
             <a:r>
-              <a:rPr lang="en-US" smtClean="0"/>
+              <a:rPr lang="en-US"/>
               <a:t>Second level</a:t>
             </a:r>
           </a:p>
           <a:p>
             <a:pPr lvl="2"/>
             <a:r>
-              <a:rPr lang="en-US" smtClean="0"/>
+              <a:rPr lang="en-US"/>
               <a:t>Third level</a:t>
             </a:r>
           </a:p>
           <a:p>
             <a:pPr lvl="3"/>
             <a:r>
-              <a:rPr lang="en-US" smtClean="0"/>
+              <a:rPr lang="en-US"/>
               <a:t>Fourth level</a:t>
             </a:r>
           </a:p>
           <a:p>
             <a:pPr lvl="4"/>
             <a:r>
-              <a:rPr lang="en-US" smtClean="0"/>
+              <a:rPr lang="en-US"/>
               <a:t>Fifth level</a:t>
             </a:r>
-            <a:endParaRPr lang="en-US"/>
           </a:p>
         </p:txBody>
       </p:sp>
@@ -3059,38 +2842,37 @@
           <a:p>
             <a:pPr lvl="0"/>
             <a:r>
-              <a:rPr lang="en-US" smtClean="0"/>
+              <a:rPr lang="en-US"/>
               <a:t>Click to edit Master text styles</a:t>
             </a:r>
           </a:p>
           <a:p>
             <a:pPr lvl="1"/>
             <a:r>
-              <a:rPr lang="en-US" smtClean="0"/>
+              <a:rPr lang="en-US"/>
               <a:t>Second level</a:t>
             </a:r>
           </a:p>
           <a:p>
             <a:pPr lvl="2"/>
             <a:r>
-              <a:rPr lang="en-US" smtClean="0"/>
+              <a:rPr lang="en-US"/>
               <a:t>Third level</a:t>
             </a:r>
           </a:p>
           <a:p>
             <a:pPr lvl="3"/>
             <a:r>
-              <a:rPr lang="en-US" smtClean="0"/>
+              <a:rPr lang="en-US"/>
               <a:t>Fourth level</a:t>
             </a:r>
           </a:p>
           <a:p>
             <a:pPr lvl="4"/>
             <a:r>
-              <a:rPr lang="en-US" smtClean="0"/>
+              <a:rPr lang="en-US"/>
               <a:t>Fifth level</a:t>
             </a:r>
-            <a:endParaRPr lang="en-US"/>
           </a:p>
         </p:txBody>
       </p:sp>
@@ -3111,7 +2893,7 @@
           <a:p>
             <a:fld id="{5BCAD085-E8A6-8845-BD4E-CB4CCA059FC4}" type="datetimeFigureOut">
               <a:rPr lang="en-US" smtClean="0"/>
-              <a:t>1/27/13</a:t>
+              <a:t>6/4/2026</a:t>
             </a:fld>
             <a:endParaRPr lang="en-US"/>
           </a:p>
@@ -3153,7 +2935,7 @@
           <a:p>
             <a:fld id="{C1FF6DA9-008F-8B48-92A6-B652298478BF}" type="slidenum">
               <a:rPr lang="en-US" smtClean="0"/>
-              <a:t>‹#›</a:t>
+              <a:t>‹Nº›</a:t>
             </a:fld>
             <a:endParaRPr lang="en-US"/>
           </a:p>
@@ -3209,10 +2991,9 @@
           </a:lstStyle>
           <a:p>
             <a:r>
-              <a:rPr lang="en-US" smtClean="0"/>
+              <a:rPr lang="en-US"/>
               <a:t>Click to edit Master title style</a:t>
             </a:r>
-            <a:endParaRPr lang="en-US"/>
           </a:p>
         </p:txBody>
       </p:sp>
@@ -3275,7 +3056,7 @@
           <a:p>
             <a:pPr lvl="0"/>
             <a:r>
-              <a:rPr lang="en-US" smtClean="0"/>
+              <a:rPr lang="en-US"/>
               <a:t>Click to edit Master text styles</a:t>
             </a:r>
           </a:p>
@@ -3331,38 +3112,37 @@
           <a:p>
             <a:pPr lvl="0"/>
             <a:r>
-              <a:rPr lang="en-US" smtClean="0"/>
+              <a:rPr lang="en-US"/>
               <a:t>Click to edit Master text styles</a:t>
             </a:r>
           </a:p>
           <a:p>
             <a:pPr lvl="1"/>
             <a:r>
-              <a:rPr lang="en-US" smtClean="0"/>
+              <a:rPr lang="en-US"/>
               <a:t>Second level</a:t>
             </a:r>
           </a:p>
           <a:p>
             <a:pPr lvl="2"/>
             <a:r>
-              <a:rPr lang="en-US" smtClean="0"/>
+              <a:rPr lang="en-US"/>
               <a:t>Third level</a:t>
             </a:r>
           </a:p>
           <a:p>
             <a:pPr lvl="3"/>
             <a:r>
-              <a:rPr lang="en-US" smtClean="0"/>
+              <a:rPr lang="en-US"/>
               <a:t>Fourth level</a:t>
             </a:r>
           </a:p>
           <a:p>
             <a:pPr lvl="4"/>
             <a:r>
-              <a:rPr lang="en-US" smtClean="0"/>
+              <a:rPr lang="en-US"/>
               <a:t>Fifth level</a:t>
             </a:r>
-            <a:endParaRPr lang="en-US"/>
           </a:p>
         </p:txBody>
       </p:sp>
@@ -3425,7 +3205,7 @@
           <a:p>
             <a:pPr lvl="0"/>
             <a:r>
-              <a:rPr lang="en-US" smtClean="0"/>
+              <a:rPr lang="en-US"/>
               <a:t>Click to edit Master text styles</a:t>
             </a:r>
           </a:p>
@@ -3481,38 +3261,37 @@
           <a:p>
             <a:pPr lvl="0"/>
             <a:r>
-              <a:rPr lang="en-US" smtClean="0"/>
+              <a:rPr lang="en-US"/>
               <a:t>Click to edit Master text styles</a:t>
             </a:r>
           </a:p>
           <a:p>
             <a:pPr lvl="1"/>
             <a:r>
-              <a:rPr lang="en-US" smtClean="0"/>
+              <a:rPr lang="en-US"/>
               <a:t>Second level</a:t>
             </a:r>
           </a:p>
           <a:p>
             <a:pPr lvl="2"/>
             <a:r>
-              <a:rPr lang="en-US" smtClean="0"/>
+              <a:rPr lang="en-US"/>
               <a:t>Third level</a:t>
             </a:r>
           </a:p>
           <a:p>
             <a:pPr lvl="3"/>
             <a:r>
-              <a:rPr lang="en-US" smtClean="0"/>
+              <a:rPr lang="en-US"/>
               <a:t>Fourth level</a:t>
             </a:r>
           </a:p>
           <a:p>
             <a:pPr lvl="4"/>
             <a:r>
-              <a:rPr lang="en-US" smtClean="0"/>
+              <a:rPr lang="en-US"/>
               <a:t>Fifth level</a:t>
             </a:r>
-            <a:endParaRPr lang="en-US"/>
           </a:p>
         </p:txBody>
       </p:sp>
@@ -3533,7 +3312,7 @@
           <a:p>
             <a:fld id="{5BCAD085-E8A6-8845-BD4E-CB4CCA059FC4}" type="datetimeFigureOut">
               <a:rPr lang="en-US" smtClean="0"/>
-              <a:t>1/27/13</a:t>
+              <a:t>6/4/2026</a:t>
             </a:fld>
             <a:endParaRPr lang="en-US"/>
           </a:p>
@@ -3575,7 +3354,7 @@
           <a:p>
             <a:fld id="{C1FF6DA9-008F-8B48-92A6-B652298478BF}" type="slidenum">
               <a:rPr lang="en-US" smtClean="0"/>
-              <a:t>‹#›</a:t>
+              <a:t>‹Nº›</a:t>
             </a:fld>
             <a:endParaRPr lang="en-US"/>
           </a:p>
@@ -3627,10 +3406,9 @@
           <a:lstStyle/>
           <a:p>
             <a:r>
-              <a:rPr lang="en-US" smtClean="0"/>
+              <a:rPr lang="en-US"/>
               <a:t>Click to edit Master title style</a:t>
             </a:r>
-            <a:endParaRPr lang="en-US"/>
           </a:p>
         </p:txBody>
       </p:sp>
@@ -3651,7 +3429,7 @@
           <a:p>
             <a:fld id="{5BCAD085-E8A6-8845-BD4E-CB4CCA059FC4}" type="datetimeFigureOut">
               <a:rPr lang="en-US" smtClean="0"/>
-              <a:t>1/27/13</a:t>
+              <a:t>6/4/2026</a:t>
             </a:fld>
             <a:endParaRPr lang="en-US"/>
           </a:p>
@@ -3693,7 +3471,7 @@
           <a:p>
             <a:fld id="{C1FF6DA9-008F-8B48-92A6-B652298478BF}" type="slidenum">
               <a:rPr lang="en-US" smtClean="0"/>
-              <a:t>‹#›</a:t>
+              <a:t>‹Nº›</a:t>
             </a:fld>
             <a:endParaRPr lang="en-US"/>
           </a:p>
@@ -3746,7 +3524,7 @@
           <a:p>
             <a:fld id="{5BCAD085-E8A6-8845-BD4E-CB4CCA059FC4}" type="datetimeFigureOut">
               <a:rPr lang="en-US" smtClean="0"/>
-              <a:t>1/27/13</a:t>
+              <a:t>6/4/2026</a:t>
             </a:fld>
             <a:endParaRPr lang="en-US"/>
           </a:p>
@@ -3788,7 +3566,7 @@
           <a:p>
             <a:fld id="{C1FF6DA9-008F-8B48-92A6-B652298478BF}" type="slidenum">
               <a:rPr lang="en-US" smtClean="0"/>
-              <a:t>‹#›</a:t>
+              <a:t>‹Nº›</a:t>
             </a:fld>
             <a:endParaRPr lang="en-US"/>
           </a:p>
@@ -3849,10 +3627,9 @@
           </a:lstStyle>
           <a:p>
             <a:r>
-              <a:rPr lang="en-US" smtClean="0"/>
+              <a:rPr lang="en-US"/>
               <a:t>Click to edit Master title style</a:t>
             </a:r>
-            <a:endParaRPr lang="en-US"/>
           </a:p>
         </p:txBody>
       </p:sp>
@@ -3906,38 +3683,37 @@
           <a:p>
             <a:pPr lvl="0"/>
             <a:r>
-              <a:rPr lang="en-US" smtClean="0"/>
+              <a:rPr lang="en-US"/>
               <a:t>Click to edit Master text styles</a:t>
             </a:r>
           </a:p>
           <a:p>
             <a:pPr lvl="1"/>
             <a:r>
-              <a:rPr lang="en-US" smtClean="0"/>
+              <a:rPr lang="en-US"/>
               <a:t>Second level</a:t>
             </a:r>
           </a:p>
           <a:p>
             <a:pPr lvl="2"/>
             <a:r>
-              <a:rPr lang="en-US" smtClean="0"/>
+              <a:rPr lang="en-US"/>
               <a:t>Third level</a:t>
             </a:r>
           </a:p>
           <a:p>
             <a:pPr lvl="3"/>
             <a:r>
-              <a:rPr lang="en-US" smtClean="0"/>
+              <a:rPr lang="en-US"/>
               <a:t>Fourth level</a:t>
             </a:r>
           </a:p>
           <a:p>
             <a:pPr lvl="4"/>
             <a:r>
-              <a:rPr lang="en-US" smtClean="0"/>
+              <a:rPr lang="en-US"/>
               <a:t>Fifth level</a:t>
             </a:r>
-            <a:endParaRPr lang="en-US"/>
           </a:p>
         </p:txBody>
       </p:sp>
@@ -4000,7 +3776,7 @@
           <a:p>
             <a:pPr lvl="0"/>
             <a:r>
-              <a:rPr lang="en-US" smtClean="0"/>
+              <a:rPr lang="en-US"/>
               <a:t>Click to edit Master text styles</a:t>
             </a:r>
           </a:p>
@@ -4023,7 +3799,7 @@
           <a:p>
             <a:fld id="{5BCAD085-E8A6-8845-BD4E-CB4CCA059FC4}" type="datetimeFigureOut">
               <a:rPr lang="en-US" smtClean="0"/>
-              <a:t>1/27/13</a:t>
+              <a:t>6/4/2026</a:t>
             </a:fld>
             <a:endParaRPr lang="en-US"/>
           </a:p>
@@ -4065,7 +3841,7 @@
           <a:p>
             <a:fld id="{C1FF6DA9-008F-8B48-92A6-B652298478BF}" type="slidenum">
               <a:rPr lang="en-US" smtClean="0"/>
-              <a:t>‹#›</a:t>
+              <a:t>‹Nº›</a:t>
             </a:fld>
             <a:endParaRPr lang="en-US"/>
           </a:p>
@@ -4126,10 +3902,9 @@
           </a:lstStyle>
           <a:p>
             <a:r>
-              <a:rPr lang="en-US" smtClean="0"/>
+              <a:rPr lang="en-US"/>
               <a:t>Click to edit Master title style</a:t>
             </a:r>
-            <a:endParaRPr lang="en-US"/>
           </a:p>
         </p:txBody>
       </p:sp>
@@ -4253,7 +4028,7 @@
           <a:p>
             <a:pPr lvl="0"/>
             <a:r>
-              <a:rPr lang="en-US" smtClean="0"/>
+              <a:rPr lang="en-US"/>
               <a:t>Click to edit Master text styles</a:t>
             </a:r>
           </a:p>
@@ -4276,7 +4051,7 @@
           <a:p>
             <a:fld id="{5BCAD085-E8A6-8845-BD4E-CB4CCA059FC4}" type="datetimeFigureOut">
               <a:rPr lang="en-US" smtClean="0"/>
-              <a:t>1/27/13</a:t>
+              <a:t>6/4/2026</a:t>
             </a:fld>
             <a:endParaRPr lang="en-US"/>
           </a:p>
@@ -4318,7 +4093,7 @@
           <a:p>
             <a:fld id="{C1FF6DA9-008F-8B48-92A6-B652298478BF}" type="slidenum">
               <a:rPr lang="en-US" smtClean="0"/>
-              <a:t>‹#›</a:t>
+              <a:t>‹Nº›</a:t>
             </a:fld>
             <a:endParaRPr lang="en-US"/>
           </a:p>
@@ -4385,10 +4160,9 @@
           <a:lstStyle/>
           <a:p>
             <a:r>
-              <a:rPr lang="en-US" smtClean="0"/>
+              <a:rPr lang="en-US"/>
               <a:t>Click to edit Master title style</a:t>
             </a:r>
-            <a:endParaRPr lang="en-US"/>
           </a:p>
         </p:txBody>
       </p:sp>
@@ -4419,38 +4193,37 @@
           <a:p>
             <a:pPr lvl="0"/>
             <a:r>
-              <a:rPr lang="en-US" smtClean="0"/>
+              <a:rPr lang="en-US"/>
               <a:t>Click to edit Master text styles</a:t>
             </a:r>
           </a:p>
           <a:p>
             <a:pPr lvl="1"/>
             <a:r>
-              <a:rPr lang="en-US" smtClean="0"/>
+              <a:rPr lang="en-US"/>
               <a:t>Second level</a:t>
             </a:r>
           </a:p>
           <a:p>
             <a:pPr lvl="2"/>
             <a:r>
-              <a:rPr lang="en-US" smtClean="0"/>
+              <a:rPr lang="en-US"/>
               <a:t>Third level</a:t>
             </a:r>
           </a:p>
           <a:p>
             <a:pPr lvl="3"/>
             <a:r>
-              <a:rPr lang="en-US" smtClean="0"/>
+              <a:rPr lang="en-US"/>
               <a:t>Fourth level</a:t>
             </a:r>
           </a:p>
           <a:p>
             <a:pPr lvl="4"/>
             <a:r>
-              <a:rPr lang="en-US" smtClean="0"/>
+              <a:rPr lang="en-US"/>
               <a:t>Fifth level</a:t>
             </a:r>
-            <a:endParaRPr lang="en-US"/>
           </a:p>
         </p:txBody>
       </p:sp>
@@ -4489,7 +4262,7 @@
           <a:p>
             <a:fld id="{5BCAD085-E8A6-8845-BD4E-CB4CCA059FC4}" type="datetimeFigureOut">
               <a:rPr lang="en-US" smtClean="0"/>
-              <a:t>1/27/13</a:t>
+              <a:t>6/4/2026</a:t>
             </a:fld>
             <a:endParaRPr lang="en-US"/>
           </a:p>
@@ -4567,7 +4340,7 @@
           <a:p>
             <a:fld id="{C1FF6DA9-008F-8B48-92A6-B652298478BF}" type="slidenum">
               <a:rPr lang="en-US" smtClean="0"/>
-              <a:t>‹#›</a:t>
+              <a:t>‹Nº›</a:t>
             </a:fld>
             <a:endParaRPr lang="en-US"/>
           </a:p>
@@ -4848,7 +4621,7 @@
 </file>
 
 <file path=ppt/slides/slide1.xml><?xml version="1.0" encoding="utf-8"?>
-<p:sld xmlns:a="http://schemas.openxmlformats.org/drawingml/2006/main" xmlns:p="http://schemas.openxmlformats.org/presentationml/2006/main" xmlns:r="http://schemas.openxmlformats.org/officeDocument/2006/relationships">
+<p:sld xmlns:a="http://schemas.openxmlformats.org/drawingml/2006/main" xmlns:r="http://schemas.openxmlformats.org/officeDocument/2006/relationships" xmlns:p="http://schemas.openxmlformats.org/presentationml/2006/main">
   <p:cSld>
     <p:spTree>
       <p:nvGrpSpPr>
@@ -4856,7 +4629,14 @@
         <p:cNvGrpSpPr/>
         <p:nvPr/>
       </p:nvGrpSpPr>
-      <p:grpSpPr/>
+      <p:grpSpPr>
+        <a:xfrm>
+          <a:off x="0" y="0"/>
+          <a:ext cx="0" cy="0"/>
+          <a:chOff x="0" y="0"/>
+          <a:chExt cx="0" cy="0"/>
+        </a:xfrm>
+      </p:grpSpPr>
       <p:sp>
         <p:nvSpPr>
           <p:cNvPr id="2" name="Rectangle 1"/>
@@ -4897,6 +4677,7 @@
           <a:lstStyle/>
           <a:p>
             <a:pPr algn="ctr"/>
+            <a:endParaRPr/>
           </a:p>
         </p:txBody>
       </p:sp>
@@ -4940,6 +4721,7 @@
           <a:lstStyle/>
           <a:p>
             <a:pPr algn="ctr"/>
+            <a:endParaRPr/>
           </a:p>
         </p:txBody>
       </p:sp>
@@ -4983,6 +4765,7 @@
           <a:lstStyle/>
           <a:p>
             <a:pPr algn="ctr"/>
+            <a:endParaRPr/>
           </a:p>
         </p:txBody>
       </p:sp>
@@ -5026,6 +4809,7 @@
           <a:lstStyle/>
           <a:p>
             <a:pPr algn="ctr"/>
+            <a:endParaRPr/>
           </a:p>
         </p:txBody>
       </p:sp>
@@ -5137,6 +4921,7 @@
           <a:lstStyle/>
           <a:p>
             <a:pPr algn="ctr"/>
+            <a:endParaRPr/>
           </a:p>
         </p:txBody>
       </p:sp>
@@ -5232,12 +5017,44 @@
           <a:p>
             <a:pPr algn="ctr"/>
             <a:r>
-              <a:rPr sz="1600" b="0" i="0">
+              <a:rPr sz="1600" b="0" i="0" dirty="0">
                 <a:solidFill>
                   <a:srgbClr val="7A8AA8"/>
                 </a:solidFill>
               </a:rPr>
-              <a:t>Grado en Ingeniería Informática  ·  Universidad de Murcia  ·  2026</a:t>
+              <a:t>Grado </a:t>
+            </a:r>
+            <a:r>
+              <a:rPr sz="1600" b="0" i="0" dirty="0" err="1">
+                <a:solidFill>
+                  <a:srgbClr val="7A8AA8"/>
+                </a:solidFill>
+              </a:rPr>
+              <a:t>en</a:t>
+            </a:r>
+            <a:r>
+              <a:rPr sz="1600" b="0" i="0" dirty="0">
+                <a:solidFill>
+                  <a:srgbClr val="7A8AA8"/>
+                </a:solidFill>
+              </a:rPr>
+              <a:t> Ingeniería </a:t>
+            </a:r>
+            <a:r>
+              <a:rPr sz="1600" b="0" i="0" dirty="0" err="1">
+                <a:solidFill>
+                  <a:srgbClr val="7A8AA8"/>
+                </a:solidFill>
+              </a:rPr>
+              <a:t>Informática</a:t>
+            </a:r>
+            <a:r>
+              <a:rPr sz="1600" b="0" i="0" dirty="0">
+                <a:solidFill>
+                  <a:srgbClr val="7A8AA8"/>
+                </a:solidFill>
+              </a:rPr>
+              <a:t>  ·  Universidad de Murcia  ·  2026</a:t>
             </a:r>
           </a:p>
         </p:txBody>
@@ -5251,7 +5068,7 @@
 </file>
 
 <file path=ppt/slides/slide10.xml><?xml version="1.0" encoding="utf-8"?>
-<p:sld xmlns:a="http://schemas.openxmlformats.org/drawingml/2006/main" xmlns:p="http://schemas.openxmlformats.org/presentationml/2006/main" xmlns:r="http://schemas.openxmlformats.org/officeDocument/2006/relationships">
+<p:sld xmlns:a="http://schemas.openxmlformats.org/drawingml/2006/main" xmlns:r="http://schemas.openxmlformats.org/officeDocument/2006/relationships" xmlns:p="http://schemas.openxmlformats.org/presentationml/2006/main">
   <p:cSld>
     <p:spTree>
       <p:nvGrpSpPr>
@@ -5259,7 +5076,14 @@
         <p:cNvGrpSpPr/>
         <p:nvPr/>
       </p:nvGrpSpPr>
-      <p:grpSpPr/>
+      <p:grpSpPr>
+        <a:xfrm>
+          <a:off x="0" y="0"/>
+          <a:ext cx="0" cy="0"/>
+          <a:chOff x="0" y="0"/>
+          <a:chExt cx="0" cy="0"/>
+        </a:xfrm>
+      </p:grpSpPr>
       <p:sp>
         <p:nvSpPr>
           <p:cNvPr id="2" name="Rectangle 1"/>
@@ -5300,6 +5124,7 @@
           <a:lstStyle/>
           <a:p>
             <a:pPr algn="ctr"/>
+            <a:endParaRPr/>
           </a:p>
         </p:txBody>
       </p:sp>
@@ -5343,6 +5168,7 @@
           <a:lstStyle/>
           <a:p>
             <a:pPr algn="ctr"/>
+            <a:endParaRPr/>
           </a:p>
         </p:txBody>
       </p:sp>
@@ -5454,6 +5280,7 @@
           <a:lstStyle/>
           <a:p>
             <a:pPr algn="ctr"/>
+            <a:endParaRPr/>
           </a:p>
         </p:txBody>
       </p:sp>
@@ -5531,6 +5358,7 @@
           <a:lstStyle/>
           <a:p>
             <a:pPr algn="ctr"/>
+            <a:endParaRPr/>
           </a:p>
         </p:txBody>
       </p:sp>
@@ -5609,6 +5437,7 @@
           <a:lstStyle/>
           <a:p>
             <a:pPr algn="ctr"/>
+            <a:endParaRPr/>
           </a:p>
         </p:txBody>
       </p:sp>
@@ -5652,6 +5481,7 @@
           <a:lstStyle/>
           <a:p>
             <a:pPr algn="ctr"/>
+            <a:endParaRPr/>
           </a:p>
         </p:txBody>
       </p:sp>
@@ -5729,6 +5559,7 @@
           <a:lstStyle/>
           <a:p>
             <a:pPr algn="ctr"/>
+            <a:endParaRPr/>
           </a:p>
         </p:txBody>
       </p:sp>
@@ -5772,6 +5603,7 @@
           <a:lstStyle/>
           <a:p>
             <a:pPr algn="ctr"/>
+            <a:endParaRPr/>
           </a:p>
         </p:txBody>
       </p:sp>
@@ -5849,6 +5681,7 @@
           <a:lstStyle/>
           <a:p>
             <a:pPr algn="ctr"/>
+            <a:endParaRPr/>
           </a:p>
         </p:txBody>
       </p:sp>
@@ -5892,6 +5725,7 @@
           <a:lstStyle/>
           <a:p>
             <a:pPr algn="ctr"/>
+            <a:endParaRPr/>
           </a:p>
         </p:txBody>
       </p:sp>
@@ -5969,6 +5803,7 @@
           <a:lstStyle/>
           <a:p>
             <a:pPr algn="ctr"/>
+            <a:endParaRPr/>
           </a:p>
         </p:txBody>
       </p:sp>
@@ -6012,6 +5847,7 @@
           <a:lstStyle/>
           <a:p>
             <a:pPr algn="ctr"/>
+            <a:endParaRPr/>
           </a:p>
         </p:txBody>
       </p:sp>
@@ -6089,6 +5925,7 @@
           <a:lstStyle/>
           <a:p>
             <a:pPr algn="ctr"/>
+            <a:endParaRPr/>
           </a:p>
         </p:txBody>
       </p:sp>
@@ -6132,6 +5969,7 @@
           <a:lstStyle/>
           <a:p>
             <a:pPr algn="ctr"/>
+            <a:endParaRPr/>
           </a:p>
         </p:txBody>
       </p:sp>
@@ -6243,6 +6081,7 @@
           <a:lstStyle/>
           <a:p>
             <a:pPr algn="ctr"/>
+            <a:endParaRPr/>
           </a:p>
         </p:txBody>
       </p:sp>
@@ -6286,6 +6125,7 @@
           <a:lstStyle/>
           <a:p>
             <a:pPr algn="ctr"/>
+            <a:endParaRPr/>
           </a:p>
         </p:txBody>
       </p:sp>
@@ -6397,6 +6237,7 @@
           <a:lstStyle/>
           <a:p>
             <a:pPr algn="ctr"/>
+            <a:endParaRPr/>
           </a:p>
         </p:txBody>
       </p:sp>
@@ -6440,6 +6281,7 @@
           <a:lstStyle/>
           <a:p>
             <a:pPr algn="ctr"/>
+            <a:endParaRPr/>
           </a:p>
         </p:txBody>
       </p:sp>
@@ -6551,6 +6393,7 @@
           <a:lstStyle/>
           <a:p>
             <a:pPr algn="ctr"/>
+            <a:endParaRPr/>
           </a:p>
         </p:txBody>
       </p:sp>
@@ -6594,6 +6437,7 @@
           <a:lstStyle/>
           <a:p>
             <a:pPr algn="ctr"/>
+            <a:endParaRPr/>
           </a:p>
         </p:txBody>
       </p:sp>
@@ -6705,6 +6549,7 @@
           <a:lstStyle/>
           <a:p>
             <a:pPr algn="ctr"/>
+            <a:endParaRPr/>
           </a:p>
         </p:txBody>
       </p:sp>
@@ -6748,6 +6593,7 @@
           <a:lstStyle/>
           <a:p>
             <a:pPr algn="ctr"/>
+            <a:endParaRPr/>
           </a:p>
         </p:txBody>
       </p:sp>
@@ -6859,6 +6705,7 @@
           <a:lstStyle/>
           <a:p>
             <a:pPr algn="ctr"/>
+            <a:endParaRPr/>
           </a:p>
         </p:txBody>
       </p:sp>
@@ -6902,6 +6749,7 @@
           <a:lstStyle/>
           <a:p>
             <a:pPr algn="ctr"/>
+            <a:endParaRPr/>
           </a:p>
         </p:txBody>
       </p:sp>
@@ -7016,7 +6864,7 @@
 </file>
 
 <file path=ppt/slides/slide11.xml><?xml version="1.0" encoding="utf-8"?>
-<p:sld xmlns:a="http://schemas.openxmlformats.org/drawingml/2006/main" xmlns:p="http://schemas.openxmlformats.org/presentationml/2006/main" xmlns:r="http://schemas.openxmlformats.org/officeDocument/2006/relationships">
+<p:sld xmlns:a="http://schemas.openxmlformats.org/drawingml/2006/main" xmlns:r="http://schemas.openxmlformats.org/officeDocument/2006/relationships" xmlns:p="http://schemas.openxmlformats.org/presentationml/2006/main">
   <p:cSld>
     <p:spTree>
       <p:nvGrpSpPr>
@@ -7024,7 +6872,14 @@
         <p:cNvGrpSpPr/>
         <p:nvPr/>
       </p:nvGrpSpPr>
-      <p:grpSpPr/>
+      <p:grpSpPr>
+        <a:xfrm>
+          <a:off x="0" y="0"/>
+          <a:ext cx="0" cy="0"/>
+          <a:chOff x="0" y="0"/>
+          <a:chExt cx="0" cy="0"/>
+        </a:xfrm>
+      </p:grpSpPr>
       <p:sp>
         <p:nvSpPr>
           <p:cNvPr id="2" name="Rectangle 1"/>
@@ -7065,6 +6920,7 @@
           <a:lstStyle/>
           <a:p>
             <a:pPr algn="ctr"/>
+            <a:endParaRPr/>
           </a:p>
         </p:txBody>
       </p:sp>
@@ -7108,6 +6964,7 @@
           <a:lstStyle/>
           <a:p>
             <a:pPr algn="ctr"/>
+            <a:endParaRPr/>
           </a:p>
         </p:txBody>
       </p:sp>
@@ -7219,6 +7076,7 @@
           <a:lstStyle/>
           <a:p>
             <a:pPr algn="ctr"/>
+            <a:endParaRPr/>
           </a:p>
         </p:txBody>
       </p:sp>
@@ -7299,7 +7157,7 @@
           <p:nvPr/>
         </p:nvPicPr>
         <p:blipFill>
-          <a:blip r:embed="rId2"/>
+          <a:blip r:embed="rId3"/>
           <a:stretch>
             <a:fillRect/>
           </a:stretch>
@@ -7354,6 +7212,7 @@
           <a:lstStyle/>
           <a:p>
             <a:pPr algn="ctr"/>
+            <a:endParaRPr/>
           </a:p>
         </p:txBody>
       </p:sp>
@@ -7431,6 +7290,7 @@
           <a:lstStyle/>
           <a:p>
             <a:pPr algn="ctr"/>
+            <a:endParaRPr/>
           </a:p>
         </p:txBody>
       </p:sp>
@@ -7474,6 +7334,7 @@
           <a:lstStyle/>
           <a:p>
             <a:pPr algn="ctr"/>
+            <a:endParaRPr/>
           </a:p>
         </p:txBody>
       </p:sp>
@@ -7587,6 +7448,7 @@
           <a:lstStyle/>
           <a:p>
             <a:pPr algn="ctr"/>
+            <a:endParaRPr/>
           </a:p>
         </p:txBody>
       </p:sp>
@@ -7630,6 +7492,7 @@
           <a:lstStyle/>
           <a:p>
             <a:pPr algn="ctr"/>
+            <a:endParaRPr/>
           </a:p>
         </p:txBody>
       </p:sp>
@@ -7747,7 +7610,7 @@
 </file>
 
 <file path=ppt/slides/slide12.xml><?xml version="1.0" encoding="utf-8"?>
-<p:sld xmlns:a="http://schemas.openxmlformats.org/drawingml/2006/main" xmlns:p="http://schemas.openxmlformats.org/presentationml/2006/main" xmlns:r="http://schemas.openxmlformats.org/officeDocument/2006/relationships">
+<p:sld xmlns:a="http://schemas.openxmlformats.org/drawingml/2006/main" xmlns:r="http://schemas.openxmlformats.org/officeDocument/2006/relationships" xmlns:p="http://schemas.openxmlformats.org/presentationml/2006/main">
   <p:cSld>
     <p:spTree>
       <p:nvGrpSpPr>
@@ -7755,7 +7618,14 @@
         <p:cNvGrpSpPr/>
         <p:nvPr/>
       </p:nvGrpSpPr>
-      <p:grpSpPr/>
+      <p:grpSpPr>
+        <a:xfrm>
+          <a:off x="0" y="0"/>
+          <a:ext cx="0" cy="0"/>
+          <a:chOff x="0" y="0"/>
+          <a:chExt cx="0" cy="0"/>
+        </a:xfrm>
+      </p:grpSpPr>
       <p:sp>
         <p:nvSpPr>
           <p:cNvPr id="2" name="Rectangle 1"/>
@@ -7796,6 +7666,7 @@
           <a:lstStyle/>
           <a:p>
             <a:pPr algn="ctr"/>
+            <a:endParaRPr/>
           </a:p>
         </p:txBody>
       </p:sp>
@@ -7839,6 +7710,7 @@
           <a:lstStyle/>
           <a:p>
             <a:pPr algn="ctr"/>
+            <a:endParaRPr/>
           </a:p>
         </p:txBody>
       </p:sp>
@@ -7950,6 +7822,7 @@
           <a:lstStyle/>
           <a:p>
             <a:pPr algn="ctr"/>
+            <a:endParaRPr/>
           </a:p>
         </p:txBody>
       </p:sp>
@@ -8030,7 +7903,7 @@
           <p:nvPr/>
         </p:nvPicPr>
         <p:blipFill>
-          <a:blip r:embed="rId2"/>
+          <a:blip r:embed="rId3"/>
           <a:stretch>
             <a:fillRect/>
           </a:stretch>
@@ -8085,6 +7958,7 @@
           <a:lstStyle/>
           <a:p>
             <a:pPr algn="ctr"/>
+            <a:endParaRPr/>
           </a:p>
         </p:txBody>
       </p:sp>
@@ -8162,6 +8036,7 @@
           <a:lstStyle/>
           <a:p>
             <a:pPr algn="ctr"/>
+            <a:endParaRPr/>
           </a:p>
         </p:txBody>
       </p:sp>
@@ -8205,6 +8080,7 @@
           <a:lstStyle/>
           <a:p>
             <a:pPr algn="ctr"/>
+            <a:endParaRPr/>
           </a:p>
         </p:txBody>
       </p:sp>
@@ -8282,6 +8158,7 @@
           <a:lstStyle/>
           <a:p>
             <a:pPr algn="ctr"/>
+            <a:endParaRPr/>
           </a:p>
         </p:txBody>
       </p:sp>
@@ -8325,6 +8202,7 @@
           <a:lstStyle/>
           <a:p>
             <a:pPr algn="ctr"/>
+            <a:endParaRPr/>
           </a:p>
         </p:txBody>
       </p:sp>
@@ -8402,6 +8280,7 @@
           <a:lstStyle/>
           <a:p>
             <a:pPr algn="ctr"/>
+            <a:endParaRPr/>
           </a:p>
         </p:txBody>
       </p:sp>
@@ -8445,6 +8324,7 @@
           <a:lstStyle/>
           <a:p>
             <a:pPr algn="ctr"/>
+            <a:endParaRPr/>
           </a:p>
         </p:txBody>
       </p:sp>
@@ -8522,6 +8402,7 @@
           <a:lstStyle/>
           <a:p>
             <a:pPr algn="ctr"/>
+            <a:endParaRPr/>
           </a:p>
         </p:txBody>
       </p:sp>
@@ -8565,6 +8446,7 @@
           <a:lstStyle/>
           <a:p>
             <a:pPr algn="ctr"/>
+            <a:endParaRPr/>
           </a:p>
         </p:txBody>
       </p:sp>
@@ -8642,6 +8524,7 @@
           <a:lstStyle/>
           <a:p>
             <a:pPr algn="ctr"/>
+            <a:endParaRPr/>
           </a:p>
         </p:txBody>
       </p:sp>
@@ -8685,6 +8568,7 @@
           <a:lstStyle/>
           <a:p>
             <a:pPr algn="ctr"/>
+            <a:endParaRPr/>
           </a:p>
         </p:txBody>
       </p:sp>
@@ -8762,6 +8646,7 @@
           <a:lstStyle/>
           <a:p>
             <a:pPr algn="ctr"/>
+            <a:endParaRPr/>
           </a:p>
         </p:txBody>
       </p:sp>
@@ -8805,6 +8690,7 @@
           <a:lstStyle/>
           <a:p>
             <a:pPr algn="ctr"/>
+            <a:endParaRPr/>
           </a:p>
         </p:txBody>
       </p:sp>
@@ -8885,7 +8771,7 @@
 </file>
 
 <file path=ppt/slides/slide13.xml><?xml version="1.0" encoding="utf-8"?>
-<p:sld xmlns:a="http://schemas.openxmlformats.org/drawingml/2006/main" xmlns:p="http://schemas.openxmlformats.org/presentationml/2006/main" xmlns:r="http://schemas.openxmlformats.org/officeDocument/2006/relationships">
+<p:sld xmlns:a="http://schemas.openxmlformats.org/drawingml/2006/main" xmlns:r="http://schemas.openxmlformats.org/officeDocument/2006/relationships" xmlns:p="http://schemas.openxmlformats.org/presentationml/2006/main">
   <p:cSld>
     <p:spTree>
       <p:nvGrpSpPr>
@@ -8893,7 +8779,14 @@
         <p:cNvGrpSpPr/>
         <p:nvPr/>
       </p:nvGrpSpPr>
-      <p:grpSpPr/>
+      <p:grpSpPr>
+        <a:xfrm>
+          <a:off x="0" y="0"/>
+          <a:ext cx="0" cy="0"/>
+          <a:chOff x="0" y="0"/>
+          <a:chExt cx="0" cy="0"/>
+        </a:xfrm>
+      </p:grpSpPr>
       <p:sp>
         <p:nvSpPr>
           <p:cNvPr id="2" name="Rectangle 1"/>
@@ -8934,6 +8827,7 @@
           <a:lstStyle/>
           <a:p>
             <a:pPr algn="ctr"/>
+            <a:endParaRPr/>
           </a:p>
         </p:txBody>
       </p:sp>
@@ -8977,6 +8871,7 @@
           <a:lstStyle/>
           <a:p>
             <a:pPr algn="ctr"/>
+            <a:endParaRPr/>
           </a:p>
         </p:txBody>
       </p:sp>
@@ -9088,6 +8983,7 @@
           <a:lstStyle/>
           <a:p>
             <a:pPr algn="ctr"/>
+            <a:endParaRPr/>
           </a:p>
         </p:txBody>
       </p:sp>
@@ -9134,7 +9030,7 @@
           <p:nvPr/>
         </p:nvPicPr>
         <p:blipFill>
-          <a:blip r:embed="rId2"/>
+          <a:blip r:embed="rId3"/>
           <a:stretch>
             <a:fillRect/>
           </a:stretch>
@@ -9189,6 +9085,7 @@
           <a:lstStyle/>
           <a:p>
             <a:pPr algn="ctr"/>
+            <a:endParaRPr/>
           </a:p>
         </p:txBody>
       </p:sp>
@@ -9300,6 +9197,7 @@
           <a:lstStyle/>
           <a:p>
             <a:pPr algn="ctr"/>
+            <a:endParaRPr/>
           </a:p>
         </p:txBody>
       </p:sp>
@@ -9343,6 +9241,7 @@
           <a:lstStyle/>
           <a:p>
             <a:pPr algn="ctr"/>
+            <a:endParaRPr/>
           </a:p>
         </p:txBody>
       </p:sp>
@@ -9420,6 +9319,7 @@
           <a:lstStyle/>
           <a:p>
             <a:pPr algn="ctr"/>
+            <a:endParaRPr/>
           </a:p>
         </p:txBody>
       </p:sp>
@@ -9463,6 +9363,7 @@
           <a:lstStyle/>
           <a:p>
             <a:pPr algn="ctr"/>
+            <a:endParaRPr/>
           </a:p>
         </p:txBody>
       </p:sp>
@@ -9540,6 +9441,7 @@
           <a:lstStyle/>
           <a:p>
             <a:pPr algn="ctr"/>
+            <a:endParaRPr/>
           </a:p>
         </p:txBody>
       </p:sp>
@@ -9583,6 +9485,7 @@
           <a:lstStyle/>
           <a:p>
             <a:pPr algn="ctr"/>
+            <a:endParaRPr/>
           </a:p>
         </p:txBody>
       </p:sp>
@@ -9660,6 +9563,7 @@
           <a:lstStyle/>
           <a:p>
             <a:pPr algn="ctr"/>
+            <a:endParaRPr/>
           </a:p>
         </p:txBody>
       </p:sp>
@@ -9703,6 +9607,7 @@
           <a:lstStyle/>
           <a:p>
             <a:pPr algn="ctr"/>
+            <a:endParaRPr/>
           </a:p>
         </p:txBody>
       </p:sp>
@@ -9780,6 +9685,7 @@
           <a:lstStyle/>
           <a:p>
             <a:pPr algn="ctr"/>
+            <a:endParaRPr/>
           </a:p>
         </p:txBody>
       </p:sp>
@@ -9823,6 +9729,7 @@
           <a:lstStyle/>
           <a:p>
             <a:pPr algn="ctr"/>
+            <a:endParaRPr/>
           </a:p>
         </p:txBody>
       </p:sp>
@@ -9934,6 +9841,7 @@
           <a:lstStyle/>
           <a:p>
             <a:pPr algn="ctr"/>
+            <a:endParaRPr/>
           </a:p>
         </p:txBody>
       </p:sp>
@@ -9977,6 +9885,7 @@
           <a:lstStyle/>
           <a:p>
             <a:pPr algn="ctr"/>
+            <a:endParaRPr/>
           </a:p>
         </p:txBody>
       </p:sp>
@@ -10094,7 +10003,7 @@
 </file>
 
 <file path=ppt/slides/slide14.xml><?xml version="1.0" encoding="utf-8"?>
-<p:sld xmlns:a="http://schemas.openxmlformats.org/drawingml/2006/main" xmlns:p="http://schemas.openxmlformats.org/presentationml/2006/main" xmlns:r="http://schemas.openxmlformats.org/officeDocument/2006/relationships">
+<p:sld xmlns:a="http://schemas.openxmlformats.org/drawingml/2006/main" xmlns:r="http://schemas.openxmlformats.org/officeDocument/2006/relationships" xmlns:p="http://schemas.openxmlformats.org/presentationml/2006/main">
   <p:cSld>
     <p:spTree>
       <p:nvGrpSpPr>
@@ -10102,7 +10011,14 @@
         <p:cNvGrpSpPr/>
         <p:nvPr/>
       </p:nvGrpSpPr>
-      <p:grpSpPr/>
+      <p:grpSpPr>
+        <a:xfrm>
+          <a:off x="0" y="0"/>
+          <a:ext cx="0" cy="0"/>
+          <a:chOff x="0" y="0"/>
+          <a:chExt cx="0" cy="0"/>
+        </a:xfrm>
+      </p:grpSpPr>
       <p:sp>
         <p:nvSpPr>
           <p:cNvPr id="2" name="Rectangle 1"/>
@@ -10143,6 +10059,7 @@
           <a:lstStyle/>
           <a:p>
             <a:pPr algn="ctr"/>
+            <a:endParaRPr/>
           </a:p>
         </p:txBody>
       </p:sp>
@@ -10186,6 +10103,7 @@
           <a:lstStyle/>
           <a:p>
             <a:pPr algn="ctr"/>
+            <a:endParaRPr/>
           </a:p>
         </p:txBody>
       </p:sp>
@@ -10297,6 +10215,7 @@
           <a:lstStyle/>
           <a:p>
             <a:pPr algn="ctr"/>
+            <a:endParaRPr/>
           </a:p>
         </p:txBody>
       </p:sp>
@@ -10337,107 +10256,6 @@
       <p:pic>
         <p:nvPicPr>
           <p:cNvPr id="8" name="Picture 7" descr="discover_page.jpeg"/>
-          <p:cNvPicPr>
-            <a:picLocks noChangeAspect="1"/>
-          </p:cNvPicPr>
-          <p:nvPr/>
-        </p:nvPicPr>
-        <p:blipFill>
-          <a:blip r:embed="rId2"/>
-          <a:stretch>
-            <a:fillRect/>
-          </a:stretch>
-        </p:blipFill>
-        <p:spPr>
-          <a:xfrm>
-            <a:off x="502920" y="1097280"/>
-            <a:ext cx="6035040" cy="2912763"/>
-          </a:xfrm>
-          <a:prstGeom prst="rect">
-            <a:avLst/>
-          </a:prstGeom>
-        </p:spPr>
-      </p:pic>
-      <p:sp>
-        <p:nvSpPr>
-          <p:cNvPr id="9" name="Rectangle 8"/>
-          <p:cNvSpPr/>
-          <p:nvPr/>
-        </p:nvSpPr>
-        <p:spPr>
-          <a:xfrm>
-            <a:off x="502920" y="5440680"/>
-            <a:ext cx="6035040" cy="347472"/>
-          </a:xfrm>
-          <a:prstGeom prst="rect">
-            <a:avLst/>
-          </a:prstGeom>
-          <a:solidFill>
-            <a:srgbClr val="080D18"/>
-          </a:solidFill>
-          <a:ln>
-            <a:noFill/>
-          </a:ln>
-        </p:spPr>
-        <p:style>
-          <a:lnRef idx="1">
-            <a:schemeClr val="accent1"/>
-          </a:lnRef>
-          <a:fillRef idx="3">
-            <a:schemeClr val="accent1"/>
-          </a:fillRef>
-          <a:effectRef idx="2">
-            <a:schemeClr val="accent1"/>
-          </a:effectRef>
-          <a:fontRef idx="minor">
-            <a:schemeClr val="lt1"/>
-          </a:fontRef>
-        </p:style>
-        <p:txBody>
-          <a:bodyPr rtlCol="0" anchor="ctr"/>
-          <a:lstStyle/>
-          <a:p>
-            <a:pPr algn="ctr"/>
-          </a:p>
-        </p:txBody>
-      </p:sp>
-      <p:sp>
-        <p:nvSpPr>
-          <p:cNvPr id="10" name="TextBox 9"/>
-          <p:cNvSpPr txBox="1"/>
-          <p:nvPr/>
-        </p:nvSpPr>
-        <p:spPr>
-          <a:xfrm>
-            <a:off x="594360" y="5477256"/>
-            <a:ext cx="5852159" cy="274320"/>
-          </a:xfrm>
-          <a:prstGeom prst="rect">
-            <a:avLst/>
-          </a:prstGeom>
-          <a:noFill/>
-        </p:spPr>
-        <p:txBody>
-          <a:bodyPr wrap="square">
-            <a:spAutoFit/>
-          </a:bodyPr>
-          <a:lstStyle/>
-          <a:p>
-            <a:pPr algn="l"/>
-            <a:r>
-              <a:rPr sz="1300" b="0" i="1">
-                <a:solidFill>
-                  <a:srgbClr val="7A8AA8"/>
-                </a:solidFill>
-              </a:rPr>
-              <a:t>Página de descubrimiento — Desktop (sidebar fija + grid fluido)</a:t>
-            </a:r>
-          </a:p>
-        </p:txBody>
-      </p:sp>
-      <p:pic>
-        <p:nvPicPr>
-          <p:cNvPr id="11" name="Picture 10" descr="responsive_ipad.jpeg"/>
           <p:cNvPicPr>
             <a:picLocks noChangeAspect="1"/>
           </p:cNvPicPr>
@@ -10451,8 +10269,8 @@
         </p:blipFill>
         <p:spPr>
           <a:xfrm>
-            <a:off x="6858000" y="1097280"/>
-            <a:ext cx="2468880" cy="3554816"/>
+            <a:off x="502920" y="1097280"/>
+            <a:ext cx="6035040" cy="2912763"/>
           </a:xfrm>
           <a:prstGeom prst="rect">
             <a:avLst/>
@@ -10461,14 +10279,14 @@
       </p:pic>
       <p:sp>
         <p:nvSpPr>
-          <p:cNvPr id="12" name="Rectangle 11"/>
+          <p:cNvPr id="9" name="Rectangle 8"/>
           <p:cNvSpPr/>
           <p:nvPr/>
         </p:nvSpPr>
         <p:spPr>
           <a:xfrm>
-            <a:off x="6858000" y="5440680"/>
-            <a:ext cx="4846320" cy="347472"/>
+            <a:off x="502920" y="5440680"/>
+            <a:ext cx="6035040" cy="347472"/>
           </a:xfrm>
           <a:prstGeom prst="rect">
             <a:avLst/>
@@ -10499,19 +10317,20 @@
           <a:lstStyle/>
           <a:p>
             <a:pPr algn="ctr"/>
-          </a:p>
-        </p:txBody>
-      </p:sp>
-      <p:sp>
-        <p:nvSpPr>
-          <p:cNvPr id="13" name="TextBox 12"/>
-          <p:cNvSpPr txBox="1"/>
-          <p:nvPr/>
-        </p:nvSpPr>
-        <p:spPr>
-          <a:xfrm>
-            <a:off x="6949440" y="5477256"/>
-            <a:ext cx="4663440" cy="274320"/>
+            <a:endParaRPr/>
+          </a:p>
+        </p:txBody>
+      </p:sp>
+      <p:sp>
+        <p:nvSpPr>
+          <p:cNvPr id="10" name="TextBox 9"/>
+          <p:cNvSpPr txBox="1"/>
+          <p:nvPr/>
+        </p:nvSpPr>
+        <p:spPr>
+          <a:xfrm>
+            <a:off x="594360" y="5477256"/>
+            <a:ext cx="5852159" cy="274320"/>
           </a:xfrm>
           <a:prstGeom prst="rect">
             <a:avLst/>
@@ -10531,61 +10350,51 @@
                   <a:srgbClr val="7A8AA8"/>
                 </a:solidFill>
               </a:rPr>
-              <a:t>iPad Air + iPhone 12 Pro — bottom nav</a:t>
-            </a:r>
-          </a:p>
-        </p:txBody>
-      </p:sp>
-      <p:sp>
-        <p:nvSpPr>
-          <p:cNvPr id="14" name="TextBox 13"/>
-          <p:cNvSpPr txBox="1"/>
-          <p:nvPr/>
-        </p:nvSpPr>
-        <p:spPr>
-          <a:xfrm>
-            <a:off x="9464040" y="1097280"/>
-            <a:ext cx="2606040" cy="347472"/>
-          </a:xfrm>
-          <a:prstGeom prst="rect">
-            <a:avLst/>
-          </a:prstGeom>
-          <a:noFill/>
-        </p:spPr>
-        <p:txBody>
-          <a:bodyPr wrap="square">
-            <a:spAutoFit/>
-          </a:bodyPr>
-          <a:lstStyle/>
-          <a:p>
-            <a:pPr algn="l"/>
-            <a:r>
-              <a:rPr sz="1600" b="1" i="0">
-                <a:solidFill>
-                  <a:srgbClr val="F5C518"/>
-                </a:solidFill>
-              </a:rPr>
-              <a:t>Sistema de diseño</a:t>
-            </a:r>
-          </a:p>
-        </p:txBody>
-      </p:sp>
-      <p:sp>
-        <p:nvSpPr>
-          <p:cNvPr id="15" name="Rectangle 14"/>
+              <a:t>Página de descubrimiento — Desktop (sidebar fija + grid fluido)</a:t>
+            </a:r>
+          </a:p>
+        </p:txBody>
+      </p:sp>
+      <p:pic>
+        <p:nvPicPr>
+          <p:cNvPr id="11" name="Picture 10" descr="responsive_ipad.jpeg"/>
+          <p:cNvPicPr>
+            <a:picLocks noChangeAspect="1"/>
+          </p:cNvPicPr>
+          <p:nvPr/>
+        </p:nvPicPr>
+        <p:blipFill>
+          <a:blip r:embed="rId4"/>
+          <a:stretch>
+            <a:fillRect/>
+          </a:stretch>
+        </p:blipFill>
+        <p:spPr>
+          <a:xfrm>
+            <a:off x="6858000" y="1097280"/>
+            <a:ext cx="2468880" cy="3554816"/>
+          </a:xfrm>
+          <a:prstGeom prst="rect">
+            <a:avLst/>
+          </a:prstGeom>
+        </p:spPr>
+      </p:pic>
+      <p:sp>
+        <p:nvSpPr>
+          <p:cNvPr id="12" name="Rectangle 11"/>
           <p:cNvSpPr/>
           <p:nvPr/>
         </p:nvSpPr>
         <p:spPr>
           <a:xfrm>
-            <a:off x="9464040" y="1536192"/>
-            <a:ext cx="2606040" cy="566928"/>
-          </a:xfrm>
-          <a:prstGeom prst="rect">
-            <a:avLst/>
-          </a:prstGeom>
-          <a:solidFill>
-            <a:srgbClr val="1A223A"/>
+            <a:off x="6858000" y="5440680"/>
+            <a:ext cx="4846320" cy="347472"/>
+          </a:xfrm>
+          <a:prstGeom prst="rect">
+            <a:avLst/>
+          </a:prstGeom>
+          <a:solidFill>
+            <a:srgbClr val="080D18"/>
           </a:solidFill>
           <a:ln>
             <a:noFill/>
@@ -10610,19 +10419,20 @@
           <a:lstStyle/>
           <a:p>
             <a:pPr algn="ctr"/>
-          </a:p>
-        </p:txBody>
-      </p:sp>
-      <p:sp>
-        <p:nvSpPr>
-          <p:cNvPr id="16" name="TextBox 15"/>
-          <p:cNvSpPr txBox="1"/>
-          <p:nvPr/>
-        </p:nvSpPr>
-        <p:spPr>
-          <a:xfrm>
-            <a:off x="9601200" y="1600200"/>
-            <a:ext cx="914400" cy="402336"/>
+            <a:endParaRPr/>
+          </a:p>
+        </p:txBody>
+      </p:sp>
+      <p:sp>
+        <p:nvSpPr>
+          <p:cNvPr id="13" name="TextBox 12"/>
+          <p:cNvSpPr txBox="1"/>
+          <p:nvPr/>
+        </p:nvSpPr>
+        <p:spPr>
+          <a:xfrm>
+            <a:off x="6949440" y="5477256"/>
+            <a:ext cx="4663440" cy="274320"/>
           </a:xfrm>
           <a:prstGeom prst="rect">
             <a:avLst/>
@@ -10637,59 +10447,59 @@
           <a:p>
             <a:pPr algn="l"/>
             <a:r>
-              <a:rPr sz="1300" b="1" i="0">
+              <a:rPr sz="1300" b="0" i="1">
+                <a:solidFill>
+                  <a:srgbClr val="7A8AA8"/>
+                </a:solidFill>
+              </a:rPr>
+              <a:t>iPad Air + iPhone 12 Pro — bottom nav</a:t>
+            </a:r>
+          </a:p>
+        </p:txBody>
+      </p:sp>
+      <p:sp>
+        <p:nvSpPr>
+          <p:cNvPr id="14" name="TextBox 13"/>
+          <p:cNvSpPr txBox="1"/>
+          <p:nvPr/>
+        </p:nvSpPr>
+        <p:spPr>
+          <a:xfrm>
+            <a:off x="9464040" y="1097280"/>
+            <a:ext cx="2606040" cy="347472"/>
+          </a:xfrm>
+          <a:prstGeom prst="rect">
+            <a:avLst/>
+          </a:prstGeom>
+          <a:noFill/>
+        </p:spPr>
+        <p:txBody>
+          <a:bodyPr wrap="square">
+            <a:spAutoFit/>
+          </a:bodyPr>
+          <a:lstStyle/>
+          <a:p>
+            <a:pPr algn="l"/>
+            <a:r>
+              <a:rPr sz="1600" b="1" i="0">
                 <a:solidFill>
                   <a:srgbClr val="F5C518"/>
                 </a:solidFill>
               </a:rPr>
-              <a:t>Fondo:</a:t>
-            </a:r>
-          </a:p>
-        </p:txBody>
-      </p:sp>
-      <p:sp>
-        <p:nvSpPr>
-          <p:cNvPr id="17" name="TextBox 16"/>
-          <p:cNvSpPr txBox="1"/>
-          <p:nvPr/>
-        </p:nvSpPr>
-        <p:spPr>
-          <a:xfrm>
-            <a:off x="10561320" y="1600200"/>
-            <a:ext cx="1417320" cy="402336"/>
-          </a:xfrm>
-          <a:prstGeom prst="rect">
-            <a:avLst/>
-          </a:prstGeom>
-          <a:noFill/>
-        </p:spPr>
-        <p:txBody>
-          <a:bodyPr wrap="square">
-            <a:spAutoFit/>
-          </a:bodyPr>
-          <a:lstStyle/>
-          <a:p>
-            <a:pPr algn="l"/>
-            <a:r>
-              <a:rPr sz="1200" b="0" i="0">
-                <a:solidFill>
-                  <a:srgbClr val="C8D0E0"/>
-                </a:solidFill>
-              </a:rPr>
-              <a:t>#0D121F navy → charcoal</a:t>
-            </a:r>
-          </a:p>
-        </p:txBody>
-      </p:sp>
-      <p:sp>
-        <p:nvSpPr>
-          <p:cNvPr id="18" name="Rectangle 17"/>
+              <a:t>Sistema de diseño</a:t>
+            </a:r>
+          </a:p>
+        </p:txBody>
+      </p:sp>
+      <p:sp>
+        <p:nvSpPr>
+          <p:cNvPr id="15" name="Rectangle 14"/>
           <p:cNvSpPr/>
           <p:nvPr/>
         </p:nvSpPr>
         <p:spPr>
           <a:xfrm>
-            <a:off x="9464040" y="2185415"/>
+            <a:off x="9464040" y="1536192"/>
             <a:ext cx="2606040" cy="566928"/>
           </a:xfrm>
           <a:prstGeom prst="rect">
@@ -10721,18 +10531,19 @@
           <a:lstStyle/>
           <a:p>
             <a:pPr algn="ctr"/>
-          </a:p>
-        </p:txBody>
-      </p:sp>
-      <p:sp>
-        <p:nvSpPr>
-          <p:cNvPr id="19" name="TextBox 18"/>
-          <p:cNvSpPr txBox="1"/>
-          <p:nvPr/>
-        </p:nvSpPr>
-        <p:spPr>
-          <a:xfrm>
-            <a:off x="9601200" y="2249424"/>
+            <a:endParaRPr/>
+          </a:p>
+        </p:txBody>
+      </p:sp>
+      <p:sp>
+        <p:nvSpPr>
+          <p:cNvPr id="16" name="TextBox 15"/>
+          <p:cNvSpPr txBox="1"/>
+          <p:nvPr/>
+        </p:nvSpPr>
+        <p:spPr>
+          <a:xfrm>
+            <a:off x="9601200" y="1600200"/>
             <a:ext cx="914400" cy="402336"/>
           </a:xfrm>
           <a:prstGeom prst="rect">
@@ -10753,20 +10564,20 @@
                   <a:srgbClr val="F5C518"/>
                 </a:solidFill>
               </a:rPr>
-              <a:t>Acento:</a:t>
-            </a:r>
-          </a:p>
-        </p:txBody>
-      </p:sp>
-      <p:sp>
-        <p:nvSpPr>
-          <p:cNvPr id="20" name="TextBox 19"/>
-          <p:cNvSpPr txBox="1"/>
-          <p:nvPr/>
-        </p:nvSpPr>
-        <p:spPr>
-          <a:xfrm>
-            <a:off x="10561320" y="2249424"/>
+              <a:t>Fondo:</a:t>
+            </a:r>
+          </a:p>
+        </p:txBody>
+      </p:sp>
+      <p:sp>
+        <p:nvSpPr>
+          <p:cNvPr id="17" name="TextBox 16"/>
+          <p:cNvSpPr txBox="1"/>
+          <p:nvPr/>
+        </p:nvSpPr>
+        <p:spPr>
+          <a:xfrm>
+            <a:off x="10561320" y="1600200"/>
             <a:ext cx="1417320" cy="402336"/>
           </a:xfrm>
           <a:prstGeom prst="rect">
@@ -10787,20 +10598,20 @@
                   <a:srgbClr val="C8D0E0"/>
                 </a:solidFill>
               </a:rPr>
-              <a:t>#F5C518 dorado (UI interactiva)</a:t>
-            </a:r>
-          </a:p>
-        </p:txBody>
-      </p:sp>
-      <p:sp>
-        <p:nvSpPr>
-          <p:cNvPr id="21" name="Rectangle 20"/>
+              <a:t>#0D121F navy → charcoal</a:t>
+            </a:r>
+          </a:p>
+        </p:txBody>
+      </p:sp>
+      <p:sp>
+        <p:nvSpPr>
+          <p:cNvPr id="18" name="Rectangle 17"/>
           <p:cNvSpPr/>
           <p:nvPr/>
         </p:nvSpPr>
         <p:spPr>
           <a:xfrm>
-            <a:off x="9464040" y="2834639"/>
+            <a:off x="9464040" y="2185415"/>
             <a:ext cx="2606040" cy="566928"/>
           </a:xfrm>
           <a:prstGeom prst="rect">
@@ -10832,18 +10643,19 @@
           <a:lstStyle/>
           <a:p>
             <a:pPr algn="ctr"/>
-          </a:p>
-        </p:txBody>
-      </p:sp>
-      <p:sp>
-        <p:nvSpPr>
-          <p:cNvPr id="22" name="TextBox 21"/>
-          <p:cNvSpPr txBox="1"/>
-          <p:nvPr/>
-        </p:nvSpPr>
-        <p:spPr>
-          <a:xfrm>
-            <a:off x="9601200" y="2898648"/>
+            <a:endParaRPr/>
+          </a:p>
+        </p:txBody>
+      </p:sp>
+      <p:sp>
+        <p:nvSpPr>
+          <p:cNvPr id="19" name="TextBox 18"/>
+          <p:cNvSpPr txBox="1"/>
+          <p:nvPr/>
+        </p:nvSpPr>
+        <p:spPr>
+          <a:xfrm>
+            <a:off x="9601200" y="2249424"/>
             <a:ext cx="914400" cy="402336"/>
           </a:xfrm>
           <a:prstGeom prst="rect">
@@ -10864,20 +10676,20 @@
                   <a:srgbClr val="F5C518"/>
                 </a:solidFill>
               </a:rPr>
-              <a:t>Títulos:</a:t>
-            </a:r>
-          </a:p>
-        </p:txBody>
-      </p:sp>
-      <p:sp>
-        <p:nvSpPr>
-          <p:cNvPr id="23" name="TextBox 22"/>
-          <p:cNvSpPr txBox="1"/>
-          <p:nvPr/>
-        </p:nvSpPr>
-        <p:spPr>
-          <a:xfrm>
-            <a:off x="10561320" y="2898648"/>
+              <a:t>Acento:</a:t>
+            </a:r>
+          </a:p>
+        </p:txBody>
+      </p:sp>
+      <p:sp>
+        <p:nvSpPr>
+          <p:cNvPr id="20" name="TextBox 19"/>
+          <p:cNvSpPr txBox="1"/>
+          <p:nvPr/>
+        </p:nvSpPr>
+        <p:spPr>
+          <a:xfrm>
+            <a:off x="10561320" y="2249424"/>
             <a:ext cx="1417320" cy="402336"/>
           </a:xfrm>
           <a:prstGeom prst="rect">
@@ -10898,20 +10710,20 @@
                   <a:srgbClr val="C8D0E0"/>
                 </a:solidFill>
               </a:rPr>
-              <a:t>Playfair Display</a:t>
-            </a:r>
-          </a:p>
-        </p:txBody>
-      </p:sp>
-      <p:sp>
-        <p:nvSpPr>
-          <p:cNvPr id="24" name="Rectangle 23"/>
+              <a:t>#F5C518 dorado (UI interactiva)</a:t>
+            </a:r>
+          </a:p>
+        </p:txBody>
+      </p:sp>
+      <p:sp>
+        <p:nvSpPr>
+          <p:cNvPr id="21" name="Rectangle 20"/>
           <p:cNvSpPr/>
           <p:nvPr/>
         </p:nvSpPr>
         <p:spPr>
           <a:xfrm>
-            <a:off x="9464040" y="3483863"/>
+            <a:off x="9464040" y="2834639"/>
             <a:ext cx="2606040" cy="566928"/>
           </a:xfrm>
           <a:prstGeom prst="rect">
@@ -10943,18 +10755,19 @@
           <a:lstStyle/>
           <a:p>
             <a:pPr algn="ctr"/>
-          </a:p>
-        </p:txBody>
-      </p:sp>
-      <p:sp>
-        <p:nvSpPr>
-          <p:cNvPr id="25" name="TextBox 24"/>
-          <p:cNvSpPr txBox="1"/>
-          <p:nvPr/>
-        </p:nvSpPr>
-        <p:spPr>
-          <a:xfrm>
-            <a:off x="9601200" y="3547872"/>
+            <a:endParaRPr/>
+          </a:p>
+        </p:txBody>
+      </p:sp>
+      <p:sp>
+        <p:nvSpPr>
+          <p:cNvPr id="22" name="TextBox 21"/>
+          <p:cNvSpPr txBox="1"/>
+          <p:nvPr/>
+        </p:nvSpPr>
+        <p:spPr>
+          <a:xfrm>
+            <a:off x="9601200" y="2898648"/>
             <a:ext cx="914400" cy="402336"/>
           </a:xfrm>
           <a:prstGeom prst="rect">
@@ -10975,20 +10788,20 @@
                   <a:srgbClr val="F5C518"/>
                 </a:solidFill>
               </a:rPr>
-              <a:t>Cuerpo:</a:t>
-            </a:r>
-          </a:p>
-        </p:txBody>
-      </p:sp>
-      <p:sp>
-        <p:nvSpPr>
-          <p:cNvPr id="26" name="TextBox 25"/>
-          <p:cNvSpPr txBox="1"/>
-          <p:nvPr/>
-        </p:nvSpPr>
-        <p:spPr>
-          <a:xfrm>
-            <a:off x="10561320" y="3547872"/>
+              <a:t>Títulos:</a:t>
+            </a:r>
+          </a:p>
+        </p:txBody>
+      </p:sp>
+      <p:sp>
+        <p:nvSpPr>
+          <p:cNvPr id="23" name="TextBox 22"/>
+          <p:cNvSpPr txBox="1"/>
+          <p:nvPr/>
+        </p:nvSpPr>
+        <p:spPr>
+          <a:xfrm>
+            <a:off x="10561320" y="2898648"/>
             <a:ext cx="1417320" cy="402336"/>
           </a:xfrm>
           <a:prstGeom prst="rect">
@@ -11009,20 +10822,20 @@
                   <a:srgbClr val="C8D0E0"/>
                 </a:solidFill>
               </a:rPr>
-              <a:t>DM Sans</a:t>
-            </a:r>
-          </a:p>
-        </p:txBody>
-      </p:sp>
-      <p:sp>
-        <p:nvSpPr>
-          <p:cNvPr id="27" name="Rectangle 26"/>
+              <a:t>Playfair Display</a:t>
+            </a:r>
+          </a:p>
+        </p:txBody>
+      </p:sp>
+      <p:sp>
+        <p:nvSpPr>
+          <p:cNvPr id="24" name="Rectangle 23"/>
           <p:cNvSpPr/>
           <p:nvPr/>
         </p:nvSpPr>
         <p:spPr>
           <a:xfrm>
-            <a:off x="9464040" y="4133087"/>
+            <a:off x="9464040" y="3483863"/>
             <a:ext cx="2606040" cy="566928"/>
           </a:xfrm>
           <a:prstGeom prst="rect">
@@ -11054,18 +10867,19 @@
           <a:lstStyle/>
           <a:p>
             <a:pPr algn="ctr"/>
-          </a:p>
-        </p:txBody>
-      </p:sp>
-      <p:sp>
-        <p:nvSpPr>
-          <p:cNvPr id="28" name="TextBox 27"/>
-          <p:cNvSpPr txBox="1"/>
-          <p:nvPr/>
-        </p:nvSpPr>
-        <p:spPr>
-          <a:xfrm>
-            <a:off x="9601200" y="4197096"/>
+            <a:endParaRPr/>
+          </a:p>
+        </p:txBody>
+      </p:sp>
+      <p:sp>
+        <p:nvSpPr>
+          <p:cNvPr id="25" name="TextBox 24"/>
+          <p:cNvSpPr txBox="1"/>
+          <p:nvPr/>
+        </p:nvSpPr>
+        <p:spPr>
+          <a:xfrm>
+            <a:off x="9601200" y="3547872"/>
             <a:ext cx="914400" cy="402336"/>
           </a:xfrm>
           <a:prstGeom prst="rect">
@@ -11086,20 +10900,20 @@
                   <a:srgbClr val="F5C518"/>
                 </a:solidFill>
               </a:rPr>
-              <a:t>Componentes:</a:t>
-            </a:r>
-          </a:p>
-        </p:txBody>
-      </p:sp>
-      <p:sp>
-        <p:nvSpPr>
-          <p:cNvPr id="29" name="TextBox 28"/>
-          <p:cNvSpPr txBox="1"/>
-          <p:nvPr/>
-        </p:nvSpPr>
-        <p:spPr>
-          <a:xfrm>
-            <a:off x="10561320" y="4197096"/>
+              <a:t>Cuerpo:</a:t>
+            </a:r>
+          </a:p>
+        </p:txBody>
+      </p:sp>
+      <p:sp>
+        <p:nvSpPr>
+          <p:cNvPr id="26" name="TextBox 25"/>
+          <p:cNvSpPr txBox="1"/>
+          <p:nvPr/>
+        </p:nvSpPr>
+        <p:spPr>
+          <a:xfrm>
+            <a:off x="10561320" y="3547872"/>
             <a:ext cx="1417320" cy="402336"/>
           </a:xfrm>
           <a:prstGeom prst="rect">
@@ -11120,20 +10934,20 @@
                   <a:srgbClr val="C8D0E0"/>
                 </a:solidFill>
               </a:rPr>
-              <a:t>Radix UI + shadcn/ui</a:t>
-            </a:r>
-          </a:p>
-        </p:txBody>
-      </p:sp>
-      <p:sp>
-        <p:nvSpPr>
-          <p:cNvPr id="30" name="Rectangle 29"/>
+              <a:t>DM Sans</a:t>
+            </a:r>
+          </a:p>
+        </p:txBody>
+      </p:sp>
+      <p:sp>
+        <p:nvSpPr>
+          <p:cNvPr id="27" name="Rectangle 26"/>
           <p:cNvSpPr/>
           <p:nvPr/>
         </p:nvSpPr>
         <p:spPr>
           <a:xfrm>
-            <a:off x="9464040" y="4782312"/>
+            <a:off x="9464040" y="4133087"/>
             <a:ext cx="2606040" cy="566928"/>
           </a:xfrm>
           <a:prstGeom prst="rect">
@@ -11165,6 +10979,119 @@
           <a:lstStyle/>
           <a:p>
             <a:pPr algn="ctr"/>
+            <a:endParaRPr/>
+          </a:p>
+        </p:txBody>
+      </p:sp>
+      <p:sp>
+        <p:nvSpPr>
+          <p:cNvPr id="28" name="TextBox 27"/>
+          <p:cNvSpPr txBox="1"/>
+          <p:nvPr/>
+        </p:nvSpPr>
+        <p:spPr>
+          <a:xfrm>
+            <a:off x="9601200" y="4197096"/>
+            <a:ext cx="914400" cy="402336"/>
+          </a:xfrm>
+          <a:prstGeom prst="rect">
+            <a:avLst/>
+          </a:prstGeom>
+          <a:noFill/>
+        </p:spPr>
+        <p:txBody>
+          <a:bodyPr wrap="square">
+            <a:spAutoFit/>
+          </a:bodyPr>
+          <a:lstStyle/>
+          <a:p>
+            <a:pPr algn="l"/>
+            <a:r>
+              <a:rPr sz="1300" b="1" i="0">
+                <a:solidFill>
+                  <a:srgbClr val="F5C518"/>
+                </a:solidFill>
+              </a:rPr>
+              <a:t>Componentes:</a:t>
+            </a:r>
+          </a:p>
+        </p:txBody>
+      </p:sp>
+      <p:sp>
+        <p:nvSpPr>
+          <p:cNvPr id="29" name="TextBox 28"/>
+          <p:cNvSpPr txBox="1"/>
+          <p:nvPr/>
+        </p:nvSpPr>
+        <p:spPr>
+          <a:xfrm>
+            <a:off x="10561320" y="4197096"/>
+            <a:ext cx="1417320" cy="402336"/>
+          </a:xfrm>
+          <a:prstGeom prst="rect">
+            <a:avLst/>
+          </a:prstGeom>
+          <a:noFill/>
+        </p:spPr>
+        <p:txBody>
+          <a:bodyPr wrap="square">
+            <a:spAutoFit/>
+          </a:bodyPr>
+          <a:lstStyle/>
+          <a:p>
+            <a:pPr algn="l"/>
+            <a:r>
+              <a:rPr sz="1200" b="0" i="0">
+                <a:solidFill>
+                  <a:srgbClr val="C8D0E0"/>
+                </a:solidFill>
+              </a:rPr>
+              <a:t>Radix UI + shadcn/ui</a:t>
+            </a:r>
+          </a:p>
+        </p:txBody>
+      </p:sp>
+      <p:sp>
+        <p:nvSpPr>
+          <p:cNvPr id="30" name="Rectangle 29"/>
+          <p:cNvSpPr/>
+          <p:nvPr/>
+        </p:nvSpPr>
+        <p:spPr>
+          <a:xfrm>
+            <a:off x="9464040" y="4782312"/>
+            <a:ext cx="2606040" cy="566928"/>
+          </a:xfrm>
+          <a:prstGeom prst="rect">
+            <a:avLst/>
+          </a:prstGeom>
+          <a:solidFill>
+            <a:srgbClr val="1A223A"/>
+          </a:solidFill>
+          <a:ln>
+            <a:noFill/>
+          </a:ln>
+        </p:spPr>
+        <p:style>
+          <a:lnRef idx="1">
+            <a:schemeClr val="accent1"/>
+          </a:lnRef>
+          <a:fillRef idx="3">
+            <a:schemeClr val="accent1"/>
+          </a:fillRef>
+          <a:effectRef idx="2">
+            <a:schemeClr val="accent1"/>
+          </a:effectRef>
+          <a:fontRef idx="minor">
+            <a:schemeClr val="lt1"/>
+          </a:fontRef>
+        </p:style>
+        <p:txBody>
+          <a:bodyPr rtlCol="0" anchor="ctr"/>
+          <a:lstStyle/>
+          <a:p>
+            <a:pPr algn="ctr"/>
+            <a:endParaRPr/>
           </a:p>
         </p:txBody>
       </p:sp>
@@ -11279,7 +11206,7 @@
 </file>
 
 <file path=ppt/slides/slide15.xml><?xml version="1.0" encoding="utf-8"?>
-<p:sld xmlns:a="http://schemas.openxmlformats.org/drawingml/2006/main" xmlns:p="http://schemas.openxmlformats.org/presentationml/2006/main" xmlns:r="http://schemas.openxmlformats.org/officeDocument/2006/relationships">
+<p:sld xmlns:a="http://schemas.openxmlformats.org/drawingml/2006/main" xmlns:r="http://schemas.openxmlformats.org/officeDocument/2006/relationships" xmlns:p="http://schemas.openxmlformats.org/presentationml/2006/main">
   <p:cSld>
     <p:spTree>
       <p:nvGrpSpPr>
@@ -11287,7 +11214,14 @@
         <p:cNvGrpSpPr/>
         <p:nvPr/>
       </p:nvGrpSpPr>
-      <p:grpSpPr/>
+      <p:grpSpPr>
+        <a:xfrm>
+          <a:off x="0" y="0"/>
+          <a:ext cx="0" cy="0"/>
+          <a:chOff x="0" y="0"/>
+          <a:chExt cx="0" cy="0"/>
+        </a:xfrm>
+      </p:grpSpPr>
       <p:sp>
         <p:nvSpPr>
           <p:cNvPr id="2" name="Rectangle 1"/>
@@ -11328,6 +11262,7 @@
           <a:lstStyle/>
           <a:p>
             <a:pPr algn="ctr"/>
+            <a:endParaRPr/>
           </a:p>
         </p:txBody>
       </p:sp>
@@ -11371,6 +11306,7 @@
           <a:lstStyle/>
           <a:p>
             <a:pPr algn="ctr"/>
+            <a:endParaRPr/>
           </a:p>
         </p:txBody>
       </p:sp>
@@ -11482,6 +11418,7 @@
           <a:lstStyle/>
           <a:p>
             <a:pPr algn="ctr"/>
+            <a:endParaRPr/>
           </a:p>
         </p:txBody>
       </p:sp>
@@ -11562,7 +11499,7 @@
           <p:nvPr/>
         </p:nvPicPr>
         <p:blipFill>
-          <a:blip r:embed="rId2"/>
+          <a:blip r:embed="rId3"/>
           <a:stretch>
             <a:fillRect/>
           </a:stretch>
@@ -11617,6 +11554,7 @@
           <a:lstStyle/>
           <a:p>
             <a:pPr algn="ctr"/>
+            <a:endParaRPr/>
           </a:p>
         </p:txBody>
       </p:sp>
@@ -11694,6 +11632,7 @@
           <a:lstStyle/>
           <a:p>
             <a:pPr algn="ctr"/>
+            <a:endParaRPr/>
           </a:p>
         </p:txBody>
       </p:sp>
@@ -11805,6 +11744,7 @@
           <a:lstStyle/>
           <a:p>
             <a:pPr algn="ctr"/>
+            <a:endParaRPr/>
           </a:p>
         </p:txBody>
       </p:sp>
@@ -11848,6 +11788,7 @@
           <a:lstStyle/>
           <a:p>
             <a:pPr algn="ctr"/>
+            <a:endParaRPr/>
           </a:p>
         </p:txBody>
       </p:sp>
@@ -12129,6 +12070,7 @@
           <a:lstStyle/>
           <a:p>
             <a:pPr algn="ctr"/>
+            <a:endParaRPr/>
           </a:p>
         </p:txBody>
       </p:sp>
@@ -12206,6 +12148,7 @@
           <a:lstStyle/>
           <a:p>
             <a:pPr algn="ctr"/>
+            <a:endParaRPr/>
           </a:p>
         </p:txBody>
       </p:sp>
@@ -12317,6 +12260,7 @@
           <a:lstStyle/>
           <a:p>
             <a:pPr algn="ctr"/>
+            <a:endParaRPr/>
           </a:p>
         </p:txBody>
       </p:sp>
@@ -12428,6 +12372,7 @@
           <a:lstStyle/>
           <a:p>
             <a:pPr algn="ctr"/>
+            <a:endParaRPr/>
           </a:p>
         </p:txBody>
       </p:sp>
@@ -12539,6 +12484,7 @@
           <a:lstStyle/>
           <a:p>
             <a:pPr algn="ctr"/>
+            <a:endParaRPr/>
           </a:p>
         </p:txBody>
       </p:sp>
@@ -12650,6 +12596,7 @@
           <a:lstStyle/>
           <a:p>
             <a:pPr algn="ctr"/>
+            <a:endParaRPr/>
           </a:p>
         </p:txBody>
       </p:sp>
@@ -12764,7 +12711,7 @@
 </file>
 
 <file path=ppt/slides/slide16.xml><?xml version="1.0" encoding="utf-8"?>
-<p:sld xmlns:a="http://schemas.openxmlformats.org/drawingml/2006/main" xmlns:p="http://schemas.openxmlformats.org/presentationml/2006/main" xmlns:r="http://schemas.openxmlformats.org/officeDocument/2006/relationships">
+<p:sld xmlns:a="http://schemas.openxmlformats.org/drawingml/2006/main" xmlns:r="http://schemas.openxmlformats.org/officeDocument/2006/relationships" xmlns:p="http://schemas.openxmlformats.org/presentationml/2006/main">
   <p:cSld>
     <p:spTree>
       <p:nvGrpSpPr>
@@ -12772,7 +12719,14 @@
         <p:cNvGrpSpPr/>
         <p:nvPr/>
       </p:nvGrpSpPr>
-      <p:grpSpPr/>
+      <p:grpSpPr>
+        <a:xfrm>
+          <a:off x="0" y="0"/>
+          <a:ext cx="0" cy="0"/>
+          <a:chOff x="0" y="0"/>
+          <a:chExt cx="0" cy="0"/>
+        </a:xfrm>
+      </p:grpSpPr>
       <p:sp>
         <p:nvSpPr>
           <p:cNvPr id="2" name="Rectangle 1"/>
@@ -12813,6 +12767,7 @@
           <a:lstStyle/>
           <a:p>
             <a:pPr algn="ctr"/>
+            <a:endParaRPr/>
           </a:p>
         </p:txBody>
       </p:sp>
@@ -12856,6 +12811,7 @@
           <a:lstStyle/>
           <a:p>
             <a:pPr algn="ctr"/>
+            <a:endParaRPr/>
           </a:p>
         </p:txBody>
       </p:sp>
@@ -12967,6 +12923,7 @@
           <a:lstStyle/>
           <a:p>
             <a:pPr algn="ctr"/>
+            <a:endParaRPr/>
           </a:p>
         </p:txBody>
       </p:sp>
@@ -13041,107 +12998,6 @@
       <p:pic>
         <p:nvPicPr>
           <p:cNvPr id="9" name="Picture 8" descr="ci_pipeline.png"/>
-          <p:cNvPicPr>
-            <a:picLocks noChangeAspect="1"/>
-          </p:cNvPicPr>
-          <p:nvPr/>
-        </p:nvPicPr>
-        <p:blipFill>
-          <a:blip r:embed="rId2"/>
-          <a:stretch>
-            <a:fillRect/>
-          </a:stretch>
-        </p:blipFill>
-        <p:spPr>
-          <a:xfrm>
-            <a:off x="502920" y="1572768"/>
-            <a:ext cx="11155680" cy="5336968"/>
-          </a:xfrm>
-          <a:prstGeom prst="rect">
-            <a:avLst/>
-          </a:prstGeom>
-        </p:spPr>
-      </p:pic>
-      <p:sp>
-        <p:nvSpPr>
-          <p:cNvPr id="10" name="Rectangle 9"/>
-          <p:cNvSpPr/>
-          <p:nvPr/>
-        </p:nvSpPr>
-        <p:spPr>
-          <a:xfrm>
-            <a:off x="502920" y="4526280"/>
-            <a:ext cx="11155680" cy="347472"/>
-          </a:xfrm>
-          <a:prstGeom prst="rect">
-            <a:avLst/>
-          </a:prstGeom>
-          <a:solidFill>
-            <a:srgbClr val="080D18"/>
-          </a:solidFill>
-          <a:ln>
-            <a:noFill/>
-          </a:ln>
-        </p:spPr>
-        <p:style>
-          <a:lnRef idx="1">
-            <a:schemeClr val="accent1"/>
-          </a:lnRef>
-          <a:fillRef idx="3">
-            <a:schemeClr val="accent1"/>
-          </a:fillRef>
-          <a:effectRef idx="2">
-            <a:schemeClr val="accent1"/>
-          </a:effectRef>
-          <a:fontRef idx="minor">
-            <a:schemeClr val="lt1"/>
-          </a:fontRef>
-        </p:style>
-        <p:txBody>
-          <a:bodyPr rtlCol="0" anchor="ctr"/>
-          <a:lstStyle/>
-          <a:p>
-            <a:pPr algn="ctr"/>
-          </a:p>
-        </p:txBody>
-      </p:sp>
-      <p:sp>
-        <p:nvSpPr>
-          <p:cNvPr id="11" name="TextBox 10"/>
-          <p:cNvSpPr txBox="1"/>
-          <p:nvPr/>
-        </p:nvSpPr>
-        <p:spPr>
-          <a:xfrm>
-            <a:off x="594360" y="4562856"/>
-            <a:ext cx="10972800" cy="274320"/>
-          </a:xfrm>
-          <a:prstGeom prst="rect">
-            <a:avLst/>
-          </a:prstGeom>
-          <a:noFill/>
-        </p:spPr>
-        <p:txBody>
-          <a:bodyPr wrap="square">
-            <a:spAutoFit/>
-          </a:bodyPr>
-          <a:lstStyle/>
-          <a:p>
-            <a:pPr algn="l"/>
-            <a:r>
-              <a:rPr sz="1300" b="0" i="1">
-                <a:solidFill>
-                  <a:srgbClr val="7A8AA8"/>
-                </a:solidFill>
-              </a:rPr>
-              <a:t>Fig. 34 — Pipeline CI: tests · build JAR · build FE · verify Docker</a:t>
-            </a:r>
-          </a:p>
-        </p:txBody>
-      </p:sp>
-      <p:pic>
-        <p:nvPicPr>
-          <p:cNvPr id="12" name="Picture 11" descr="cd_pipeline.png"/>
           <p:cNvPicPr>
             <a:picLocks noChangeAspect="1"/>
           </p:cNvPicPr>
@@ -13155,8 +13011,8 @@
         </p:blipFill>
         <p:spPr>
           <a:xfrm>
-            <a:off x="502920" y="4828032"/>
-            <a:ext cx="11155680" cy="4883562"/>
+            <a:off x="502920" y="1572768"/>
+            <a:ext cx="11155680" cy="5336968"/>
           </a:xfrm>
           <a:prstGeom prst="rect">
             <a:avLst/>
@@ -13165,13 +13021,13 @@
       </p:pic>
       <p:sp>
         <p:nvSpPr>
-          <p:cNvPr id="13" name="Rectangle 12"/>
+          <p:cNvPr id="10" name="Rectangle 9"/>
           <p:cNvSpPr/>
           <p:nvPr/>
         </p:nvSpPr>
         <p:spPr>
           <a:xfrm>
-            <a:off x="502920" y="6080760"/>
+            <a:off x="502920" y="4526280"/>
             <a:ext cx="11155680" cy="347472"/>
           </a:xfrm>
           <a:prstGeom prst="rect">
@@ -13203,6 +13059,109 @@
           <a:lstStyle/>
           <a:p>
             <a:pPr algn="ctr"/>
+            <a:endParaRPr/>
+          </a:p>
+        </p:txBody>
+      </p:sp>
+      <p:sp>
+        <p:nvSpPr>
+          <p:cNvPr id="11" name="TextBox 10"/>
+          <p:cNvSpPr txBox="1"/>
+          <p:nvPr/>
+        </p:nvSpPr>
+        <p:spPr>
+          <a:xfrm>
+            <a:off x="594360" y="4562856"/>
+            <a:ext cx="10972800" cy="274320"/>
+          </a:xfrm>
+          <a:prstGeom prst="rect">
+            <a:avLst/>
+          </a:prstGeom>
+          <a:noFill/>
+        </p:spPr>
+        <p:txBody>
+          <a:bodyPr wrap="square">
+            <a:spAutoFit/>
+          </a:bodyPr>
+          <a:lstStyle/>
+          <a:p>
+            <a:pPr algn="l"/>
+            <a:r>
+              <a:rPr sz="1300" b="0" i="1">
+                <a:solidFill>
+                  <a:srgbClr val="7A8AA8"/>
+                </a:solidFill>
+              </a:rPr>
+              <a:t>Fig. 34 — Pipeline CI: tests · build JAR · build FE · verify Docker</a:t>
+            </a:r>
+          </a:p>
+        </p:txBody>
+      </p:sp>
+      <p:pic>
+        <p:nvPicPr>
+          <p:cNvPr id="12" name="Picture 11" descr="cd_pipeline.png"/>
+          <p:cNvPicPr>
+            <a:picLocks noChangeAspect="1"/>
+          </p:cNvPicPr>
+          <p:nvPr/>
+        </p:nvPicPr>
+        <p:blipFill>
+          <a:blip r:embed="rId4"/>
+          <a:stretch>
+            <a:fillRect/>
+          </a:stretch>
+        </p:blipFill>
+        <p:spPr>
+          <a:xfrm>
+            <a:off x="502920" y="4828032"/>
+            <a:ext cx="11155680" cy="4883562"/>
+          </a:xfrm>
+          <a:prstGeom prst="rect">
+            <a:avLst/>
+          </a:prstGeom>
+        </p:spPr>
+      </p:pic>
+      <p:sp>
+        <p:nvSpPr>
+          <p:cNvPr id="13" name="Rectangle 12"/>
+          <p:cNvSpPr/>
+          <p:nvPr/>
+        </p:nvSpPr>
+        <p:spPr>
+          <a:xfrm>
+            <a:off x="502920" y="6080760"/>
+            <a:ext cx="11155680" cy="347472"/>
+          </a:xfrm>
+          <a:prstGeom prst="rect">
+            <a:avLst/>
+          </a:prstGeom>
+          <a:solidFill>
+            <a:srgbClr val="080D18"/>
+          </a:solidFill>
+          <a:ln>
+            <a:noFill/>
+          </a:ln>
+        </p:spPr>
+        <p:style>
+          <a:lnRef idx="1">
+            <a:schemeClr val="accent1"/>
+          </a:lnRef>
+          <a:fillRef idx="3">
+            <a:schemeClr val="accent1"/>
+          </a:fillRef>
+          <a:effectRef idx="2">
+            <a:schemeClr val="accent1"/>
+          </a:effectRef>
+          <a:fontRef idx="minor">
+            <a:schemeClr val="lt1"/>
+          </a:fontRef>
+        </p:style>
+        <p:txBody>
+          <a:bodyPr rtlCol="0" anchor="ctr"/>
+          <a:lstStyle/>
+          <a:p>
+            <a:pPr algn="ctr"/>
+            <a:endParaRPr/>
           </a:p>
         </p:txBody>
       </p:sp>
@@ -13283,7 +13242,7 @@
 </file>
 
 <file path=ppt/slides/slide17.xml><?xml version="1.0" encoding="utf-8"?>
-<p:sld xmlns:a="http://schemas.openxmlformats.org/drawingml/2006/main" xmlns:p="http://schemas.openxmlformats.org/presentationml/2006/main" xmlns:r="http://schemas.openxmlformats.org/officeDocument/2006/relationships">
+<p:sld xmlns:a="http://schemas.openxmlformats.org/drawingml/2006/main" xmlns:r="http://schemas.openxmlformats.org/officeDocument/2006/relationships" xmlns:p="http://schemas.openxmlformats.org/presentationml/2006/main">
   <p:cSld>
     <p:spTree>
       <p:nvGrpSpPr>
@@ -13291,7 +13250,14 @@
         <p:cNvGrpSpPr/>
         <p:nvPr/>
       </p:nvGrpSpPr>
-      <p:grpSpPr/>
+      <p:grpSpPr>
+        <a:xfrm>
+          <a:off x="0" y="0"/>
+          <a:ext cx="0" cy="0"/>
+          <a:chOff x="0" y="0"/>
+          <a:chExt cx="0" cy="0"/>
+        </a:xfrm>
+      </p:grpSpPr>
       <p:sp>
         <p:nvSpPr>
           <p:cNvPr id="2" name="Rectangle 1"/>
@@ -13332,6 +13298,7 @@
           <a:lstStyle/>
           <a:p>
             <a:pPr algn="ctr"/>
+            <a:endParaRPr/>
           </a:p>
         </p:txBody>
       </p:sp>
@@ -13375,6 +13342,7 @@
           <a:lstStyle/>
           <a:p>
             <a:pPr algn="ctr"/>
+            <a:endParaRPr/>
           </a:p>
         </p:txBody>
       </p:sp>
@@ -13452,113 +13420,13 @@
           <a:lstStyle/>
           <a:p>
             <a:pPr algn="ctr"/>
+            <a:endParaRPr/>
           </a:p>
         </p:txBody>
       </p:sp>
       <p:pic>
         <p:nvPicPr>
           <p:cNvPr id="6" name="Picture 5" descr="homepage.jpeg"/>
-          <p:cNvPicPr>
-            <a:picLocks noChangeAspect="1"/>
-          </p:cNvPicPr>
-          <p:nvPr/>
-        </p:nvPicPr>
-        <p:blipFill>
-          <a:blip r:embed="rId2"/>
-          <a:stretch>
-            <a:fillRect/>
-          </a:stretch>
-        </p:blipFill>
-        <p:spPr>
-          <a:xfrm>
-            <a:off x="457200" y="1005840"/>
-            <a:ext cx="3657600" cy="1771505"/>
-          </a:xfrm>
-          <a:prstGeom prst="rect">
-            <a:avLst/>
-          </a:prstGeom>
-        </p:spPr>
-      </p:pic>
-      <p:sp>
-        <p:nvSpPr>
-          <p:cNvPr id="7" name="Rectangle 6"/>
-          <p:cNvSpPr/>
-          <p:nvPr/>
-        </p:nvSpPr>
-        <p:spPr>
-          <a:xfrm>
-            <a:off x="457200" y="3529584"/>
-            <a:ext cx="3657600" cy="347472"/>
-          </a:xfrm>
-          <a:prstGeom prst="rect">
-            <a:avLst/>
-          </a:prstGeom>
-          <a:solidFill>
-            <a:srgbClr val="080D18"/>
-          </a:solidFill>
-          <a:ln>
-            <a:noFill/>
-          </a:ln>
-        </p:spPr>
-        <p:style>
-          <a:lnRef idx="1">
-            <a:schemeClr val="accent1"/>
-          </a:lnRef>
-          <a:fillRef idx="3">
-            <a:schemeClr val="accent1"/>
-          </a:fillRef>
-          <a:effectRef idx="2">
-            <a:schemeClr val="accent1"/>
-          </a:effectRef>
-          <a:fontRef idx="minor">
-            <a:schemeClr val="lt1"/>
-          </a:fontRef>
-        </p:style>
-        <p:txBody>
-          <a:bodyPr rtlCol="0" anchor="ctr"/>
-          <a:lstStyle/>
-          <a:p>
-            <a:pPr algn="ctr"/>
-          </a:p>
-        </p:txBody>
-      </p:sp>
-      <p:sp>
-        <p:nvSpPr>
-          <p:cNvPr id="8" name="TextBox 7"/>
-          <p:cNvSpPr txBox="1"/>
-          <p:nvPr/>
-        </p:nvSpPr>
-        <p:spPr>
-          <a:xfrm>
-            <a:off x="548640" y="3566160"/>
-            <a:ext cx="3474720" cy="274320"/>
-          </a:xfrm>
-          <a:prstGeom prst="rect">
-            <a:avLst/>
-          </a:prstGeom>
-          <a:noFill/>
-        </p:spPr>
-        <p:txBody>
-          <a:bodyPr wrap="square">
-            <a:spAutoFit/>
-          </a:bodyPr>
-          <a:lstStyle/>
-          <a:p>
-            <a:pPr algn="l"/>
-            <a:r>
-              <a:rPr sz="1300" b="0" i="1">
-                <a:solidFill>
-                  <a:srgbClr val="7A8AA8"/>
-                </a:solidFill>
-              </a:rPr>
-              <a:t>Inicio — tendencias + recomendaciones</a:t>
-            </a:r>
-          </a:p>
-        </p:txBody>
-      </p:sp>
-      <p:pic>
-        <p:nvPicPr>
-          <p:cNvPr id="9" name="Picture 8" descr="discover_page.jpeg"/>
           <p:cNvPicPr>
             <a:picLocks noChangeAspect="1"/>
           </p:cNvPicPr>
@@ -13572,8 +13440,8 @@
         </p:blipFill>
         <p:spPr>
           <a:xfrm>
-            <a:off x="4297680" y="1005840"/>
-            <a:ext cx="3657600" cy="1765311"/>
+            <a:off x="457200" y="1005840"/>
+            <a:ext cx="3657600" cy="1771505"/>
           </a:xfrm>
           <a:prstGeom prst="rect">
             <a:avLst/>
@@ -13582,13 +13450,13 @@
       </p:pic>
       <p:sp>
         <p:nvSpPr>
-          <p:cNvPr id="10" name="Rectangle 9"/>
+          <p:cNvPr id="7" name="Rectangle 6"/>
           <p:cNvSpPr/>
           <p:nvPr/>
         </p:nvSpPr>
         <p:spPr>
           <a:xfrm>
-            <a:off x="4297680" y="3529584"/>
+            <a:off x="457200" y="3529584"/>
             <a:ext cx="3657600" cy="347472"/>
           </a:xfrm>
           <a:prstGeom prst="rect">
@@ -13620,18 +13488,19 @@
           <a:lstStyle/>
           <a:p>
             <a:pPr algn="ctr"/>
-          </a:p>
-        </p:txBody>
-      </p:sp>
-      <p:sp>
-        <p:nvSpPr>
-          <p:cNvPr id="11" name="TextBox 10"/>
-          <p:cNvSpPr txBox="1"/>
-          <p:nvPr/>
-        </p:nvSpPr>
-        <p:spPr>
-          <a:xfrm>
-            <a:off x="4389120" y="3566160"/>
+            <a:endParaRPr/>
+          </a:p>
+        </p:txBody>
+      </p:sp>
+      <p:sp>
+        <p:nvSpPr>
+          <p:cNvPr id="8" name="TextBox 7"/>
+          <p:cNvSpPr txBox="1"/>
+          <p:nvPr/>
+        </p:nvSpPr>
+        <p:spPr>
+          <a:xfrm>
+            <a:off x="548640" y="3566160"/>
             <a:ext cx="3474720" cy="274320"/>
           </a:xfrm>
           <a:prstGeom prst="rect">
@@ -13652,14 +13521,14 @@
                   <a:srgbClr val="7A8AA8"/>
                 </a:solidFill>
               </a:rPr>
-              <a:t>Descubrimiento — búsqueda global</a:t>
+              <a:t>Inicio — tendencias + recomendaciones</a:t>
             </a:r>
           </a:p>
         </p:txBody>
       </p:sp>
       <p:pic>
         <p:nvPicPr>
-          <p:cNvPr id="12" name="Picture 11" descr="content_detail.jpeg"/>
+          <p:cNvPr id="9" name="Picture 8" descr="discover_page.jpeg"/>
           <p:cNvPicPr>
             <a:picLocks noChangeAspect="1"/>
           </p:cNvPicPr>
@@ -13673,8 +13542,8 @@
         </p:blipFill>
         <p:spPr>
           <a:xfrm>
-            <a:off x="8138160" y="1005840"/>
-            <a:ext cx="3657600" cy="1759117"/>
+            <a:off x="4297680" y="1005840"/>
+            <a:ext cx="3657600" cy="1765311"/>
           </a:xfrm>
           <a:prstGeom prst="rect">
             <a:avLst/>
@@ -13683,13 +13552,13 @@
       </p:pic>
       <p:sp>
         <p:nvSpPr>
-          <p:cNvPr id="13" name="Rectangle 12"/>
+          <p:cNvPr id="10" name="Rectangle 9"/>
           <p:cNvSpPr/>
           <p:nvPr/>
         </p:nvSpPr>
         <p:spPr>
           <a:xfrm>
-            <a:off x="8138160" y="3529584"/>
+            <a:off x="4297680" y="3529584"/>
             <a:ext cx="3657600" cy="347472"/>
           </a:xfrm>
           <a:prstGeom prst="rect">
@@ -13721,18 +13590,19 @@
           <a:lstStyle/>
           <a:p>
             <a:pPr algn="ctr"/>
-          </a:p>
-        </p:txBody>
-      </p:sp>
-      <p:sp>
-        <p:nvSpPr>
-          <p:cNvPr id="14" name="TextBox 13"/>
-          <p:cNvSpPr txBox="1"/>
-          <p:nvPr/>
-        </p:nvSpPr>
-        <p:spPr>
-          <a:xfrm>
-            <a:off x="8229600" y="3566160"/>
+            <a:endParaRPr/>
+          </a:p>
+        </p:txBody>
+      </p:sp>
+      <p:sp>
+        <p:nvSpPr>
+          <p:cNvPr id="11" name="TextBox 10"/>
+          <p:cNvSpPr txBox="1"/>
+          <p:nvPr/>
+        </p:nvSpPr>
+        <p:spPr>
+          <a:xfrm>
+            <a:off x="4389120" y="3566160"/>
             <a:ext cx="3474720" cy="274320"/>
           </a:xfrm>
           <a:prstGeom prst="rect">
@@ -13753,14 +13623,14 @@
                   <a:srgbClr val="7A8AA8"/>
                 </a:solidFill>
               </a:rPr>
-              <a:t>Ficha — valoración + tracking</a:t>
+              <a:t>Descubrimiento — búsqueda global</a:t>
             </a:r>
           </a:p>
         </p:txBody>
       </p:sp>
       <p:pic>
         <p:nvPicPr>
-          <p:cNvPr id="15" name="Picture 14" descr="profile_page.jpeg"/>
+          <p:cNvPr id="12" name="Picture 11" descr="content_detail.jpeg"/>
           <p:cNvPicPr>
             <a:picLocks noChangeAspect="1"/>
           </p:cNvPicPr>
@@ -13774,8 +13644,8 @@
         </p:blipFill>
         <p:spPr>
           <a:xfrm>
-            <a:off x="457200" y="3794760"/>
-            <a:ext cx="3657600" cy="1762214"/>
+            <a:off x="8138160" y="1005840"/>
+            <a:ext cx="3657600" cy="1759117"/>
           </a:xfrm>
           <a:prstGeom prst="rect">
             <a:avLst/>
@@ -13784,13 +13654,13 @@
       </p:pic>
       <p:sp>
         <p:nvSpPr>
-          <p:cNvPr id="16" name="Rectangle 15"/>
+          <p:cNvPr id="13" name="Rectangle 12"/>
           <p:cNvSpPr/>
           <p:nvPr/>
         </p:nvSpPr>
         <p:spPr>
           <a:xfrm>
-            <a:off x="457200" y="6318504"/>
+            <a:off x="8138160" y="3529584"/>
             <a:ext cx="3657600" cy="347472"/>
           </a:xfrm>
           <a:prstGeom prst="rect">
@@ -13822,18 +13692,19 @@
           <a:lstStyle/>
           <a:p>
             <a:pPr algn="ctr"/>
-          </a:p>
-        </p:txBody>
-      </p:sp>
-      <p:sp>
-        <p:nvSpPr>
-          <p:cNvPr id="17" name="TextBox 16"/>
-          <p:cNvSpPr txBox="1"/>
-          <p:nvPr/>
-        </p:nvSpPr>
-        <p:spPr>
-          <a:xfrm>
-            <a:off x="548640" y="6355080"/>
+            <a:endParaRPr/>
+          </a:p>
+        </p:txBody>
+      </p:sp>
+      <p:sp>
+        <p:nvSpPr>
+          <p:cNvPr id="14" name="TextBox 13"/>
+          <p:cNvSpPr txBox="1"/>
+          <p:nvPr/>
+        </p:nvSpPr>
+        <p:spPr>
+          <a:xfrm>
+            <a:off x="8229600" y="3566160"/>
             <a:ext cx="3474720" cy="274320"/>
           </a:xfrm>
           <a:prstGeom prst="rect">
@@ -13854,14 +13725,14 @@
                   <a:srgbClr val="7A8AA8"/>
                 </a:solidFill>
               </a:rPr>
-              <a:t>Perfil — stats + insignias + listas</a:t>
+              <a:t>Ficha — valoración + tracking</a:t>
             </a:r>
           </a:p>
         </p:txBody>
       </p:sp>
       <p:pic>
         <p:nvPicPr>
-          <p:cNvPr id="18" name="Picture 17" descr="activity_page.jpeg"/>
+          <p:cNvPr id="15" name="Picture 14" descr="profile_page.jpeg"/>
           <p:cNvPicPr>
             <a:picLocks noChangeAspect="1"/>
           </p:cNvPicPr>
@@ -13875,7 +13746,7 @@
         </p:blipFill>
         <p:spPr>
           <a:xfrm>
-            <a:off x="4297680" y="3794760"/>
+            <a:off x="457200" y="3794760"/>
             <a:ext cx="3657600" cy="1762214"/>
           </a:xfrm>
           <a:prstGeom prst="rect">
@@ -13885,13 +13756,13 @@
       </p:pic>
       <p:sp>
         <p:nvSpPr>
-          <p:cNvPr id="19" name="Rectangle 18"/>
+          <p:cNvPr id="16" name="Rectangle 15"/>
           <p:cNvSpPr/>
           <p:nvPr/>
         </p:nvSpPr>
         <p:spPr>
           <a:xfrm>
-            <a:off x="4297680" y="6318504"/>
+            <a:off x="457200" y="6318504"/>
             <a:ext cx="3657600" cy="347472"/>
           </a:xfrm>
           <a:prstGeom prst="rect">
@@ -13923,18 +13794,19 @@
           <a:lstStyle/>
           <a:p>
             <a:pPr algn="ctr"/>
-          </a:p>
-        </p:txBody>
-      </p:sp>
-      <p:sp>
-        <p:nvSpPr>
-          <p:cNvPr id="20" name="TextBox 19"/>
-          <p:cNvSpPr txBox="1"/>
-          <p:nvPr/>
-        </p:nvSpPr>
-        <p:spPr>
-          <a:xfrm>
-            <a:off x="4389120" y="6355080"/>
+            <a:endParaRPr/>
+          </a:p>
+        </p:txBody>
+      </p:sp>
+      <p:sp>
+        <p:nvSpPr>
+          <p:cNvPr id="17" name="TextBox 16"/>
+          <p:cNvSpPr txBox="1"/>
+          <p:nvPr/>
+        </p:nvSpPr>
+        <p:spPr>
+          <a:xfrm>
+            <a:off x="548640" y="6355080"/>
             <a:ext cx="3474720" cy="274320"/>
           </a:xfrm>
           <a:prstGeom prst="rect">
@@ -13955,14 +13827,14 @@
                   <a:srgbClr val="7A8AA8"/>
                 </a:solidFill>
               </a:rPr>
-              <a:t>Actividad — feed social</a:t>
+              <a:t>Perfil — stats + insignias + listas</a:t>
             </a:r>
           </a:p>
         </p:txBody>
       </p:sp>
       <p:pic>
         <p:nvPicPr>
-          <p:cNvPr id="21" name="Picture 20" descr="admin_panel.png"/>
+          <p:cNvPr id="18" name="Picture 17" descr="activity_page.jpeg"/>
           <p:cNvPicPr>
             <a:picLocks noChangeAspect="1"/>
           </p:cNvPicPr>
@@ -13976,8 +13848,8 @@
         </p:blipFill>
         <p:spPr>
           <a:xfrm>
-            <a:off x="8138160" y="3794760"/>
-            <a:ext cx="3657600" cy="1762408"/>
+            <a:off x="4297680" y="3794760"/>
+            <a:ext cx="3657600" cy="1762214"/>
           </a:xfrm>
           <a:prstGeom prst="rect">
             <a:avLst/>
@@ -13986,13 +13858,13 @@
       </p:pic>
       <p:sp>
         <p:nvSpPr>
-          <p:cNvPr id="22" name="Rectangle 21"/>
+          <p:cNvPr id="19" name="Rectangle 18"/>
           <p:cNvSpPr/>
           <p:nvPr/>
         </p:nvSpPr>
         <p:spPr>
           <a:xfrm>
-            <a:off x="8138160" y="6318504"/>
+            <a:off x="4297680" y="6318504"/>
             <a:ext cx="3657600" cy="347472"/>
           </a:xfrm>
           <a:prstGeom prst="rect">
@@ -14024,6 +13896,109 @@
           <a:lstStyle/>
           <a:p>
             <a:pPr algn="ctr"/>
+            <a:endParaRPr/>
+          </a:p>
+        </p:txBody>
+      </p:sp>
+      <p:sp>
+        <p:nvSpPr>
+          <p:cNvPr id="20" name="TextBox 19"/>
+          <p:cNvSpPr txBox="1"/>
+          <p:nvPr/>
+        </p:nvSpPr>
+        <p:spPr>
+          <a:xfrm>
+            <a:off x="4389120" y="6355080"/>
+            <a:ext cx="3474720" cy="274320"/>
+          </a:xfrm>
+          <a:prstGeom prst="rect">
+            <a:avLst/>
+          </a:prstGeom>
+          <a:noFill/>
+        </p:spPr>
+        <p:txBody>
+          <a:bodyPr wrap="square">
+            <a:spAutoFit/>
+          </a:bodyPr>
+          <a:lstStyle/>
+          <a:p>
+            <a:pPr algn="l"/>
+            <a:r>
+              <a:rPr sz="1300" b="0" i="1">
+                <a:solidFill>
+                  <a:srgbClr val="7A8AA8"/>
+                </a:solidFill>
+              </a:rPr>
+              <a:t>Actividad — feed social</a:t>
+            </a:r>
+          </a:p>
+        </p:txBody>
+      </p:sp>
+      <p:pic>
+        <p:nvPicPr>
+          <p:cNvPr id="21" name="Picture 20" descr="admin_panel.png"/>
+          <p:cNvPicPr>
+            <a:picLocks noChangeAspect="1"/>
+          </p:cNvPicPr>
+          <p:nvPr/>
+        </p:nvPicPr>
+        <p:blipFill>
+          <a:blip r:embed="rId8"/>
+          <a:stretch>
+            <a:fillRect/>
+          </a:stretch>
+        </p:blipFill>
+        <p:spPr>
+          <a:xfrm>
+            <a:off x="8138160" y="3794760"/>
+            <a:ext cx="3657600" cy="1762408"/>
+          </a:xfrm>
+          <a:prstGeom prst="rect">
+            <a:avLst/>
+          </a:prstGeom>
+        </p:spPr>
+      </p:pic>
+      <p:sp>
+        <p:nvSpPr>
+          <p:cNvPr id="22" name="Rectangle 21"/>
+          <p:cNvSpPr/>
+          <p:nvPr/>
+        </p:nvSpPr>
+        <p:spPr>
+          <a:xfrm>
+            <a:off x="8138160" y="6318504"/>
+            <a:ext cx="3657600" cy="347472"/>
+          </a:xfrm>
+          <a:prstGeom prst="rect">
+            <a:avLst/>
+          </a:prstGeom>
+          <a:solidFill>
+            <a:srgbClr val="080D18"/>
+          </a:solidFill>
+          <a:ln>
+            <a:noFill/>
+          </a:ln>
+        </p:spPr>
+        <p:style>
+          <a:lnRef idx="1">
+            <a:schemeClr val="accent1"/>
+          </a:lnRef>
+          <a:fillRef idx="3">
+            <a:schemeClr val="accent1"/>
+          </a:fillRef>
+          <a:effectRef idx="2">
+            <a:schemeClr val="accent1"/>
+          </a:effectRef>
+          <a:fontRef idx="minor">
+            <a:schemeClr val="lt1"/>
+          </a:fontRef>
+        </p:style>
+        <p:txBody>
+          <a:bodyPr rtlCol="0" anchor="ctr"/>
+          <a:lstStyle/>
+          <a:p>
+            <a:pPr algn="ctr"/>
+            <a:endParaRPr/>
           </a:p>
         </p:txBody>
       </p:sp>
@@ -14104,7 +14079,7 @@
 </file>
 
 <file path=ppt/slides/slide18.xml><?xml version="1.0" encoding="utf-8"?>
-<p:sld xmlns:a="http://schemas.openxmlformats.org/drawingml/2006/main" xmlns:p="http://schemas.openxmlformats.org/presentationml/2006/main" xmlns:r="http://schemas.openxmlformats.org/officeDocument/2006/relationships">
+<p:sld xmlns:a="http://schemas.openxmlformats.org/drawingml/2006/main" xmlns:r="http://schemas.openxmlformats.org/officeDocument/2006/relationships" xmlns:p="http://schemas.openxmlformats.org/presentationml/2006/main">
   <p:cSld>
     <p:spTree>
       <p:nvGrpSpPr>
@@ -14112,7 +14087,14 @@
         <p:cNvGrpSpPr/>
         <p:nvPr/>
       </p:nvGrpSpPr>
-      <p:grpSpPr/>
+      <p:grpSpPr>
+        <a:xfrm>
+          <a:off x="0" y="0"/>
+          <a:ext cx="0" cy="0"/>
+          <a:chOff x="0" y="0"/>
+          <a:chExt cx="0" cy="0"/>
+        </a:xfrm>
+      </p:grpSpPr>
       <p:sp>
         <p:nvSpPr>
           <p:cNvPr id="2" name="Rectangle 1"/>
@@ -14153,6 +14135,7 @@
           <a:lstStyle/>
           <a:p>
             <a:pPr algn="ctr"/>
+            <a:endParaRPr/>
           </a:p>
         </p:txBody>
       </p:sp>
@@ -14196,6 +14179,7 @@
           <a:lstStyle/>
           <a:p>
             <a:pPr algn="ctr"/>
+            <a:endParaRPr/>
           </a:p>
         </p:txBody>
       </p:sp>
@@ -14307,6 +14291,7 @@
           <a:lstStyle/>
           <a:p>
             <a:pPr algn="ctr"/>
+            <a:endParaRPr/>
           </a:p>
         </p:txBody>
       </p:sp>
@@ -14353,7 +14338,7 @@
           <p:nvPr/>
         </p:nvPicPr>
         <p:blipFill>
-          <a:blip r:embed="rId2"/>
+          <a:blip r:embed="rId3"/>
           <a:stretch>
             <a:fillRect/>
           </a:stretch>
@@ -14408,6 +14393,7 @@
           <a:lstStyle/>
           <a:p>
             <a:pPr algn="ctr"/>
+            <a:endParaRPr/>
           </a:p>
         </p:txBody>
       </p:sp>
@@ -14519,6 +14505,7 @@
           <a:lstStyle/>
           <a:p>
             <a:pPr algn="ctr"/>
+            <a:endParaRPr/>
           </a:p>
         </p:txBody>
       </p:sp>
@@ -14562,6 +14549,7 @@
           <a:lstStyle/>
           <a:p>
             <a:pPr algn="ctr"/>
+            <a:endParaRPr/>
           </a:p>
         </p:txBody>
       </p:sp>
@@ -14673,6 +14661,7 @@
           <a:lstStyle/>
           <a:p>
             <a:pPr algn="ctr"/>
+            <a:endParaRPr/>
           </a:p>
         </p:txBody>
       </p:sp>
@@ -14716,6 +14705,7 @@
           <a:lstStyle/>
           <a:p>
             <a:pPr algn="ctr"/>
+            <a:endParaRPr/>
           </a:p>
         </p:txBody>
       </p:sp>
@@ -14827,6 +14817,7 @@
           <a:lstStyle/>
           <a:p>
             <a:pPr algn="ctr"/>
+            <a:endParaRPr/>
           </a:p>
         </p:txBody>
       </p:sp>
@@ -14870,6 +14861,7 @@
           <a:lstStyle/>
           <a:p>
             <a:pPr algn="ctr"/>
+            <a:endParaRPr/>
           </a:p>
         </p:txBody>
       </p:sp>
@@ -14981,6 +14973,7 @@
           <a:lstStyle/>
           <a:p>
             <a:pPr algn="ctr"/>
+            <a:endParaRPr/>
           </a:p>
         </p:txBody>
       </p:sp>
@@ -15024,6 +15017,7 @@
           <a:lstStyle/>
           <a:p>
             <a:pPr algn="ctr"/>
+            <a:endParaRPr/>
           </a:p>
         </p:txBody>
       </p:sp>
@@ -15135,6 +15129,7 @@
           <a:lstStyle/>
           <a:p>
             <a:pPr algn="ctr"/>
+            <a:endParaRPr/>
           </a:p>
         </p:txBody>
       </p:sp>
@@ -15178,6 +15173,7 @@
           <a:lstStyle/>
           <a:p>
             <a:pPr algn="ctr"/>
+            <a:endParaRPr/>
           </a:p>
         </p:txBody>
       </p:sp>
@@ -15292,7 +15288,7 @@
 </file>
 
 <file path=ppt/slides/slide19.xml><?xml version="1.0" encoding="utf-8"?>
-<p:sld xmlns:a="http://schemas.openxmlformats.org/drawingml/2006/main" xmlns:p="http://schemas.openxmlformats.org/presentationml/2006/main" xmlns:r="http://schemas.openxmlformats.org/officeDocument/2006/relationships">
+<p:sld xmlns:a="http://schemas.openxmlformats.org/drawingml/2006/main" xmlns:r="http://schemas.openxmlformats.org/officeDocument/2006/relationships" xmlns:p="http://schemas.openxmlformats.org/presentationml/2006/main">
   <p:cSld>
     <p:spTree>
       <p:nvGrpSpPr>
@@ -15300,7 +15296,14 @@
         <p:cNvGrpSpPr/>
         <p:nvPr/>
       </p:nvGrpSpPr>
-      <p:grpSpPr/>
+      <p:grpSpPr>
+        <a:xfrm>
+          <a:off x="0" y="0"/>
+          <a:ext cx="0" cy="0"/>
+          <a:chOff x="0" y="0"/>
+          <a:chExt cx="0" cy="0"/>
+        </a:xfrm>
+      </p:grpSpPr>
       <p:sp>
         <p:nvSpPr>
           <p:cNvPr id="2" name="Rectangle 1"/>
@@ -15341,6 +15344,7 @@
           <a:lstStyle/>
           <a:p>
             <a:pPr algn="ctr"/>
+            <a:endParaRPr/>
           </a:p>
         </p:txBody>
       </p:sp>
@@ -15384,6 +15388,7 @@
           <a:lstStyle/>
           <a:p>
             <a:pPr algn="ctr"/>
+            <a:endParaRPr/>
           </a:p>
         </p:txBody>
       </p:sp>
@@ -15495,6 +15500,7 @@
           <a:lstStyle/>
           <a:p>
             <a:pPr algn="ctr"/>
+            <a:endParaRPr/>
           </a:p>
         </p:txBody>
       </p:sp>
@@ -15606,6 +15612,7 @@
           <a:lstStyle/>
           <a:p>
             <a:pPr algn="ctr"/>
+            <a:endParaRPr/>
           </a:p>
         </p:txBody>
       </p:sp>
@@ -15649,6 +15656,7 @@
           <a:lstStyle/>
           <a:p>
             <a:pPr algn="ctr"/>
+            <a:endParaRPr/>
           </a:p>
         </p:txBody>
       </p:sp>
@@ -15760,6 +15768,7 @@
           <a:lstStyle/>
           <a:p>
             <a:pPr algn="ctr"/>
+            <a:endParaRPr/>
           </a:p>
         </p:txBody>
       </p:sp>
@@ -15803,6 +15812,7 @@
           <a:lstStyle/>
           <a:p>
             <a:pPr algn="ctr"/>
+            <a:endParaRPr/>
           </a:p>
         </p:txBody>
       </p:sp>
@@ -15914,6 +15924,7 @@
           <a:lstStyle/>
           <a:p>
             <a:pPr algn="ctr"/>
+            <a:endParaRPr/>
           </a:p>
         </p:txBody>
       </p:sp>
@@ -15957,6 +15968,7 @@
           <a:lstStyle/>
           <a:p>
             <a:pPr algn="ctr"/>
+            <a:endParaRPr/>
           </a:p>
         </p:txBody>
       </p:sp>
@@ -16068,6 +16080,7 @@
           <a:lstStyle/>
           <a:p>
             <a:pPr algn="ctr"/>
+            <a:endParaRPr/>
           </a:p>
         </p:txBody>
       </p:sp>
@@ -16111,6 +16124,7 @@
           <a:lstStyle/>
           <a:p>
             <a:pPr algn="ctr"/>
+            <a:endParaRPr/>
           </a:p>
         </p:txBody>
       </p:sp>
@@ -16222,6 +16236,7 @@
           <a:lstStyle/>
           <a:p>
             <a:pPr algn="ctr"/>
+            <a:endParaRPr/>
           </a:p>
         </p:txBody>
       </p:sp>
@@ -16265,6 +16280,7 @@
           <a:lstStyle/>
           <a:p>
             <a:pPr algn="ctr"/>
+            <a:endParaRPr/>
           </a:p>
         </p:txBody>
       </p:sp>
@@ -16376,6 +16392,7 @@
           <a:lstStyle/>
           <a:p>
             <a:pPr algn="ctr"/>
+            <a:endParaRPr/>
           </a:p>
         </p:txBody>
       </p:sp>
@@ -16419,6 +16436,7 @@
           <a:lstStyle/>
           <a:p>
             <a:pPr algn="ctr"/>
+            <a:endParaRPr/>
           </a:p>
         </p:txBody>
       </p:sp>
@@ -16533,7 +16551,7 @@
 </file>
 
 <file path=ppt/slides/slide2.xml><?xml version="1.0" encoding="utf-8"?>
-<p:sld xmlns:a="http://schemas.openxmlformats.org/drawingml/2006/main" xmlns:p="http://schemas.openxmlformats.org/presentationml/2006/main" xmlns:r="http://schemas.openxmlformats.org/officeDocument/2006/relationships">
+<p:sld xmlns:a="http://schemas.openxmlformats.org/drawingml/2006/main" xmlns:r="http://schemas.openxmlformats.org/officeDocument/2006/relationships" xmlns:p="http://schemas.openxmlformats.org/presentationml/2006/main">
   <p:cSld>
     <p:spTree>
       <p:nvGrpSpPr>
@@ -16541,7 +16559,14 @@
         <p:cNvGrpSpPr/>
         <p:nvPr/>
       </p:nvGrpSpPr>
-      <p:grpSpPr/>
+      <p:grpSpPr>
+        <a:xfrm>
+          <a:off x="0" y="0"/>
+          <a:ext cx="0" cy="0"/>
+          <a:chOff x="0" y="0"/>
+          <a:chExt cx="0" cy="0"/>
+        </a:xfrm>
+      </p:grpSpPr>
       <p:sp>
         <p:nvSpPr>
           <p:cNvPr id="2" name="Rectangle 1"/>
@@ -16582,6 +16607,7 @@
           <a:lstStyle/>
           <a:p>
             <a:pPr algn="ctr"/>
+            <a:endParaRPr/>
           </a:p>
         </p:txBody>
       </p:sp>
@@ -16625,6 +16651,7 @@
           <a:lstStyle/>
           <a:p>
             <a:pPr algn="ctr"/>
+            <a:endParaRPr/>
           </a:p>
         </p:txBody>
       </p:sp>
@@ -16702,6 +16729,7 @@
           <a:lstStyle/>
           <a:p>
             <a:pPr algn="ctr"/>
+            <a:endParaRPr/>
           </a:p>
         </p:txBody>
       </p:sp>
@@ -16745,6 +16773,7 @@
           <a:lstStyle/>
           <a:p>
             <a:pPr algn="ctr"/>
+            <a:endParaRPr/>
           </a:p>
         </p:txBody>
       </p:sp>
@@ -16788,6 +16817,7 @@
           <a:lstStyle/>
           <a:p>
             <a:pPr algn="ctr"/>
+            <a:endParaRPr/>
           </a:p>
         </p:txBody>
       </p:sp>
@@ -16933,6 +16963,7 @@
           <a:lstStyle/>
           <a:p>
             <a:pPr algn="ctr"/>
+            <a:endParaRPr/>
           </a:p>
         </p:txBody>
       </p:sp>
@@ -16976,6 +17007,7 @@
           <a:lstStyle/>
           <a:p>
             <a:pPr algn="ctr"/>
+            <a:endParaRPr/>
           </a:p>
         </p:txBody>
       </p:sp>
@@ -17121,6 +17153,7 @@
           <a:lstStyle/>
           <a:p>
             <a:pPr algn="ctr"/>
+            <a:endParaRPr/>
           </a:p>
         </p:txBody>
       </p:sp>
@@ -17164,6 +17197,7 @@
           <a:lstStyle/>
           <a:p>
             <a:pPr algn="ctr"/>
+            <a:endParaRPr/>
           </a:p>
         </p:txBody>
       </p:sp>
@@ -17225,13 +17259,34 @@
           <a:p>
             <a:pPr algn="l"/>
             <a:r>
-              <a:rPr sz="2000" b="1" i="0">
+              <a:rPr sz="2000" b="1" i="0" dirty="0" err="1">
                 <a:solidFill>
                   <a:srgbClr val="FFFFFF"/>
                 </a:solidFill>
               </a:rPr>
-              <a:t>Objetivos y metodología</a:t>
-            </a:r>
+              <a:t>Objetivos</a:t>
+            </a:r>
+            <a:r>
+              <a:rPr sz="2000" b="1" i="0" dirty="0">
+                <a:solidFill>
+                  <a:srgbClr val="FFFFFF"/>
+                </a:solidFill>
+              </a:rPr>
+              <a:t> y </a:t>
+            </a:r>
+            <a:r>
+              <a:rPr sz="2000" b="1" i="0" dirty="0" err="1">
+                <a:solidFill>
+                  <a:srgbClr val="FFFFFF"/>
+                </a:solidFill>
+              </a:rPr>
+              <a:t>metodología</a:t>
+            </a:r>
+            <a:endParaRPr sz="2000" b="1" i="0" dirty="0">
+              <a:solidFill>
+                <a:srgbClr val="FFFFFF"/>
+              </a:solidFill>
+            </a:endParaRPr>
           </a:p>
         </p:txBody>
       </p:sp>
@@ -17309,6 +17364,7 @@
           <a:lstStyle/>
           <a:p>
             <a:pPr algn="ctr"/>
+            <a:endParaRPr/>
           </a:p>
         </p:txBody>
       </p:sp>
@@ -17352,6 +17408,7 @@
           <a:lstStyle/>
           <a:p>
             <a:pPr algn="ctr"/>
+            <a:endParaRPr/>
           </a:p>
         </p:txBody>
       </p:sp>
@@ -17398,7 +17455,7 @@
         <p:spPr>
           <a:xfrm>
             <a:off x="1234440" y="3529584"/>
-            <a:ext cx="4389120" cy="347472"/>
+            <a:ext cx="4389120" cy="400110"/>
           </a:xfrm>
           <a:prstGeom prst="rect">
             <a:avLst/>
@@ -17413,13 +17470,34 @@
           <a:p>
             <a:pPr algn="l"/>
             <a:r>
-              <a:rPr sz="2000" b="1" i="0">
+              <a:rPr sz="2000" b="1" i="0" dirty="0" err="1">
                 <a:solidFill>
                   <a:srgbClr val="FFFFFF"/>
                 </a:solidFill>
               </a:rPr>
-              <a:t>Diseño y resolución</a:t>
-            </a:r>
+              <a:t>Diseño</a:t>
+            </a:r>
+            <a:r>
+              <a:rPr sz="2000" b="1" i="0" dirty="0">
+                <a:solidFill>
+                  <a:srgbClr val="FFFFFF"/>
+                </a:solidFill>
+              </a:rPr>
+              <a:t> </a:t>
+            </a:r>
+            <a:r>
+              <a:rPr lang="es-ES" sz="2000" b="1" i="0" dirty="0">
+                <a:solidFill>
+                  <a:srgbClr val="FFFFFF"/>
+                </a:solidFill>
+              </a:rPr>
+              <a:t>e implementación</a:t>
+            </a:r>
+            <a:endParaRPr sz="2000" b="1" i="0" dirty="0">
+              <a:solidFill>
+                <a:srgbClr val="FFFFFF"/>
+              </a:solidFill>
+            </a:endParaRPr>
           </a:p>
         </p:txBody>
       </p:sp>
@@ -17447,12 +17525,36 @@
           <a:p>
             <a:pPr algn="l"/>
             <a:r>
-              <a:rPr sz="1400" b="0" i="0">
+              <a:rPr sz="1400" b="0" i="0" dirty="0" err="1">
                 <a:solidFill>
                   <a:srgbClr val="7A8AA8"/>
                 </a:solidFill>
               </a:rPr>
-              <a:t>Arquitectura · Back-end · Front-end · UI</a:t>
+              <a:t>Arquitectura</a:t>
+            </a:r>
+            <a:r>
+              <a:rPr sz="1400" b="0" i="0" dirty="0">
+                <a:solidFill>
+                  <a:srgbClr val="7A8AA8"/>
+                </a:solidFill>
+              </a:rPr>
+              <a:t> · Back-end · Front-end · </a:t>
+            </a:r>
+            <a:r>
+              <a:rPr lang="es-ES" sz="1400" b="0" i="0" dirty="0">
+                <a:solidFill>
+                  <a:srgbClr val="7A8AA8"/>
+                </a:solidFill>
+              </a:rPr>
+              <a:t>U</a:t>
+            </a:r>
+            <a:r>
+              <a:rPr sz="1400" b="0" i="0" dirty="0">
+                <a:solidFill>
+                  <a:srgbClr val="7A8AA8"/>
+                </a:solidFill>
+              </a:rPr>
+              <a:t>I</a:t>
             </a:r>
           </a:p>
         </p:txBody>
@@ -17497,6 +17599,7 @@
           <a:lstStyle/>
           <a:p>
             <a:pPr algn="ctr"/>
+            <a:endParaRPr/>
           </a:p>
         </p:txBody>
       </p:sp>
@@ -17540,6 +17643,7 @@
           <a:lstStyle/>
           <a:p>
             <a:pPr algn="ctr"/>
+            <a:endParaRPr/>
           </a:p>
         </p:txBody>
       </p:sp>
@@ -17601,13 +17705,34 @@
           <a:p>
             <a:pPr algn="l"/>
             <a:r>
-              <a:rPr sz="2000" b="1" i="0">
+              <a:rPr sz="2000" b="1" i="0" dirty="0" err="1">
                 <a:solidFill>
                   <a:srgbClr val="FFFFFF"/>
                 </a:solidFill>
               </a:rPr>
-              <a:t>Pruebas y despliegue</a:t>
-            </a:r>
+              <a:t>Pruebas</a:t>
+            </a:r>
+            <a:r>
+              <a:rPr sz="2000" b="1" i="0" dirty="0">
+                <a:solidFill>
+                  <a:srgbClr val="FFFFFF"/>
+                </a:solidFill>
+              </a:rPr>
+              <a:t> y </a:t>
+            </a:r>
+            <a:r>
+              <a:rPr sz="2000" b="1" i="0" dirty="0" err="1">
+                <a:solidFill>
+                  <a:srgbClr val="FFFFFF"/>
+                </a:solidFill>
+              </a:rPr>
+              <a:t>despliegue</a:t>
+            </a:r>
+            <a:endParaRPr sz="2000" b="1" i="0" dirty="0">
+              <a:solidFill>
+                <a:srgbClr val="FFFFFF"/>
+              </a:solidFill>
+            </a:endParaRPr>
           </a:p>
         </p:txBody>
       </p:sp>
@@ -17620,7 +17745,7 @@
         <p:spPr>
           <a:xfrm>
             <a:off x="1234440" y="4690872"/>
-            <a:ext cx="8686800" cy="256032"/>
+            <a:ext cx="8686800" cy="307777"/>
           </a:xfrm>
           <a:prstGeom prst="rect">
             <a:avLst/>
@@ -17635,12 +17760,20 @@
           <a:p>
             <a:pPr algn="l"/>
             <a:r>
-              <a:rPr sz="1400" b="0" i="0">
+              <a:rPr lang="es-ES" sz="1400" b="0" i="0" dirty="0">
                 <a:solidFill>
                   <a:srgbClr val="7A8AA8"/>
                 </a:solidFill>
               </a:rPr>
-              <a:t>340 tests · Docker · CI/CD</a:t>
+              <a:t>Calidad</a:t>
+            </a:r>
+            <a:r>
+              <a:rPr sz="1400" b="0" i="0" dirty="0">
+                <a:solidFill>
+                  <a:srgbClr val="7A8AA8"/>
+                </a:solidFill>
+              </a:rPr>
+              <a:t>· Docker · CI/CD</a:t>
             </a:r>
           </a:p>
         </p:txBody>
@@ -17685,6 +17818,7 @@
           <a:lstStyle/>
           <a:p>
             <a:pPr algn="ctr"/>
+            <a:endParaRPr/>
           </a:p>
         </p:txBody>
       </p:sp>
@@ -17728,6 +17862,7 @@
           <a:lstStyle/>
           <a:p>
             <a:pPr algn="ctr"/>
+            <a:endParaRPr/>
           </a:p>
         </p:txBody>
       </p:sp>
@@ -17876,7 +18011,7 @@
 </file>
 
 <file path=ppt/slides/slide20.xml><?xml version="1.0" encoding="utf-8"?>
-<p:sld xmlns:a="http://schemas.openxmlformats.org/drawingml/2006/main" xmlns:p="http://schemas.openxmlformats.org/presentationml/2006/main" xmlns:r="http://schemas.openxmlformats.org/officeDocument/2006/relationships">
+<p:sld xmlns:a="http://schemas.openxmlformats.org/drawingml/2006/main" xmlns:r="http://schemas.openxmlformats.org/officeDocument/2006/relationships" xmlns:p="http://schemas.openxmlformats.org/presentationml/2006/main">
   <p:cSld>
     <p:spTree>
       <p:nvGrpSpPr>
@@ -17884,7 +18019,14 @@
         <p:cNvGrpSpPr/>
         <p:nvPr/>
       </p:nvGrpSpPr>
-      <p:grpSpPr/>
+      <p:grpSpPr>
+        <a:xfrm>
+          <a:off x="0" y="0"/>
+          <a:ext cx="0" cy="0"/>
+          <a:chOff x="0" y="0"/>
+          <a:chExt cx="0" cy="0"/>
+        </a:xfrm>
+      </p:grpSpPr>
       <p:sp>
         <p:nvSpPr>
           <p:cNvPr id="2" name="Rectangle 1"/>
@@ -17925,6 +18067,7 @@
           <a:lstStyle/>
           <a:p>
             <a:pPr algn="ctr"/>
+            <a:endParaRPr/>
           </a:p>
         </p:txBody>
       </p:sp>
@@ -17968,6 +18111,7 @@
           <a:lstStyle/>
           <a:p>
             <a:pPr algn="ctr"/>
+            <a:endParaRPr/>
           </a:p>
         </p:txBody>
       </p:sp>
@@ -18011,6 +18155,7 @@
           <a:lstStyle/>
           <a:p>
             <a:pPr algn="ctr"/>
+            <a:endParaRPr/>
           </a:p>
         </p:txBody>
       </p:sp>
@@ -18054,6 +18199,7 @@
           <a:lstStyle/>
           <a:p>
             <a:pPr algn="ctr"/>
+            <a:endParaRPr/>
           </a:p>
         </p:txBody>
       </p:sp>
@@ -18165,6 +18311,7 @@
           <a:lstStyle/>
           <a:p>
             <a:pPr algn="ctr"/>
+            <a:endParaRPr/>
           </a:p>
         </p:txBody>
       </p:sp>
@@ -18313,7 +18460,7 @@
 </file>
 
 <file path=ppt/slides/slide3.xml><?xml version="1.0" encoding="utf-8"?>
-<p:sld xmlns:a="http://schemas.openxmlformats.org/drawingml/2006/main" xmlns:p="http://schemas.openxmlformats.org/presentationml/2006/main" xmlns:r="http://schemas.openxmlformats.org/officeDocument/2006/relationships">
+<p:sld xmlns:a="http://schemas.openxmlformats.org/drawingml/2006/main" xmlns:r="http://schemas.openxmlformats.org/officeDocument/2006/relationships" xmlns:p="http://schemas.openxmlformats.org/presentationml/2006/main">
   <p:cSld>
     <p:spTree>
       <p:nvGrpSpPr>
@@ -18321,7 +18468,14 @@
         <p:cNvGrpSpPr/>
         <p:nvPr/>
       </p:nvGrpSpPr>
-      <p:grpSpPr/>
+      <p:grpSpPr>
+        <a:xfrm>
+          <a:off x="0" y="0"/>
+          <a:ext cx="0" cy="0"/>
+          <a:chOff x="0" y="0"/>
+          <a:chExt cx="0" cy="0"/>
+        </a:xfrm>
+      </p:grpSpPr>
       <p:sp>
         <p:nvSpPr>
           <p:cNvPr id="2" name="Rectangle 1"/>
@@ -18362,6 +18516,7 @@
           <a:lstStyle/>
           <a:p>
             <a:pPr algn="ctr"/>
+            <a:endParaRPr/>
           </a:p>
         </p:txBody>
       </p:sp>
@@ -18405,6 +18560,7 @@
           <a:lstStyle/>
           <a:p>
             <a:pPr algn="ctr"/>
+            <a:endParaRPr/>
           </a:p>
         </p:txBody>
       </p:sp>
@@ -18516,6 +18672,7 @@
           <a:lstStyle/>
           <a:p>
             <a:pPr algn="ctr"/>
+            <a:endParaRPr/>
           </a:p>
         </p:txBody>
       </p:sp>
@@ -18596,7 +18753,7 @@
           <p:nvPr/>
         </p:nvPicPr>
         <p:blipFill>
-          <a:blip r:embed="rId2"/>
+          <a:blip r:embed="rId3"/>
           <a:stretch>
             <a:fillRect/>
           </a:stretch>
@@ -18620,7 +18777,7 @@
           <p:nvPr/>
         </p:nvPicPr>
         <p:blipFill>
-          <a:blip r:embed="rId3"/>
+          <a:blip r:embed="rId4"/>
           <a:stretch>
             <a:fillRect/>
           </a:stretch>
@@ -18644,7 +18801,7 @@
           <p:nvPr/>
         </p:nvPicPr>
         <p:blipFill>
-          <a:blip r:embed="rId4"/>
+          <a:blip r:embed="rId5"/>
           <a:stretch>
             <a:fillRect/>
           </a:stretch>
@@ -18699,6 +18856,7 @@
           <a:lstStyle/>
           <a:p>
             <a:pPr algn="ctr"/>
+            <a:endParaRPr/>
           </a:p>
         </p:txBody>
       </p:sp>
@@ -18776,6 +18934,7 @@
           <a:lstStyle/>
           <a:p>
             <a:pPr algn="ctr"/>
+            <a:endParaRPr/>
           </a:p>
         </p:txBody>
       </p:sp>
@@ -18853,6 +19012,7 @@
           <a:lstStyle/>
           <a:p>
             <a:pPr algn="ctr"/>
+            <a:endParaRPr/>
           </a:p>
         </p:txBody>
       </p:sp>
@@ -18930,6 +19090,7 @@
           <a:lstStyle/>
           <a:p>
             <a:pPr algn="ctr"/>
+            <a:endParaRPr/>
           </a:p>
         </p:txBody>
       </p:sp>
@@ -18976,7 +19137,7 @@
 </file>
 
 <file path=ppt/slides/slide4.xml><?xml version="1.0" encoding="utf-8"?>
-<p:sld xmlns:a="http://schemas.openxmlformats.org/drawingml/2006/main" xmlns:p="http://schemas.openxmlformats.org/presentationml/2006/main" xmlns:r="http://schemas.openxmlformats.org/officeDocument/2006/relationships">
+<p:sld xmlns:a="http://schemas.openxmlformats.org/drawingml/2006/main" xmlns:r="http://schemas.openxmlformats.org/officeDocument/2006/relationships" xmlns:p="http://schemas.openxmlformats.org/presentationml/2006/main">
   <p:cSld>
     <p:spTree>
       <p:nvGrpSpPr>
@@ -18984,7 +19145,14 @@
         <p:cNvGrpSpPr/>
         <p:nvPr/>
       </p:nvGrpSpPr>
-      <p:grpSpPr/>
+      <p:grpSpPr>
+        <a:xfrm>
+          <a:off x="0" y="0"/>
+          <a:ext cx="0" cy="0"/>
+          <a:chOff x="0" y="0"/>
+          <a:chExt cx="0" cy="0"/>
+        </a:xfrm>
+      </p:grpSpPr>
       <p:sp>
         <p:nvSpPr>
           <p:cNvPr id="2" name="Rectangle 1"/>
@@ -19025,6 +19193,7 @@
           <a:lstStyle/>
           <a:p>
             <a:pPr algn="ctr"/>
+            <a:endParaRPr/>
           </a:p>
         </p:txBody>
       </p:sp>
@@ -19068,6 +19237,7 @@
           <a:lstStyle/>
           <a:p>
             <a:pPr algn="ctr"/>
+            <a:endParaRPr/>
           </a:p>
         </p:txBody>
       </p:sp>
@@ -19179,6 +19349,7 @@
           <a:lstStyle/>
           <a:p>
             <a:pPr algn="ctr"/>
+            <a:endParaRPr/>
           </a:p>
         </p:txBody>
       </p:sp>
@@ -19259,7 +19430,7 @@
           <p:nvPr/>
         </p:nvPicPr>
         <p:blipFill>
-          <a:blip r:embed="rId2"/>
+          <a:blip r:embed="rId3"/>
           <a:stretch>
             <a:fillRect/>
           </a:stretch>
@@ -19314,6 +19485,7 @@
           <a:lstStyle/>
           <a:p>
             <a:pPr algn="ctr"/>
+            <a:endParaRPr/>
           </a:p>
         </p:txBody>
       </p:sp>
@@ -19357,6 +19529,7 @@
           <a:lstStyle/>
           <a:p>
             <a:pPr algn="ctr"/>
+            <a:endParaRPr/>
           </a:p>
         </p:txBody>
       </p:sp>
@@ -19434,6 +19607,7 @@
           <a:lstStyle/>
           <a:p>
             <a:pPr algn="ctr"/>
+            <a:endParaRPr/>
           </a:p>
         </p:txBody>
       </p:sp>
@@ -19477,6 +19651,7 @@
           <a:lstStyle/>
           <a:p>
             <a:pPr algn="ctr"/>
+            <a:endParaRPr/>
           </a:p>
         </p:txBody>
       </p:sp>
@@ -19554,6 +19729,7 @@
           <a:lstStyle/>
           <a:p>
             <a:pPr algn="ctr"/>
+            <a:endParaRPr/>
           </a:p>
         </p:txBody>
       </p:sp>
@@ -19597,6 +19773,7 @@
           <a:lstStyle/>
           <a:p>
             <a:pPr algn="ctr"/>
+            <a:endParaRPr/>
           </a:p>
         </p:txBody>
       </p:sp>
@@ -19674,6 +19851,7 @@
           <a:lstStyle/>
           <a:p>
             <a:pPr algn="ctr"/>
+            <a:endParaRPr/>
           </a:p>
         </p:txBody>
       </p:sp>
@@ -19717,6 +19895,7 @@
           <a:lstStyle/>
           <a:p>
             <a:pPr algn="ctr"/>
+            <a:endParaRPr/>
           </a:p>
         </p:txBody>
       </p:sp>
@@ -19794,6 +19973,7 @@
           <a:lstStyle/>
           <a:p>
             <a:pPr algn="ctr"/>
+            <a:endParaRPr/>
           </a:p>
         </p:txBody>
       </p:sp>
@@ -19837,6 +20017,7 @@
           <a:lstStyle/>
           <a:p>
             <a:pPr algn="ctr"/>
+            <a:endParaRPr/>
           </a:p>
         </p:txBody>
       </p:sp>
@@ -19914,6 +20095,7 @@
           <a:lstStyle/>
           <a:p>
             <a:pPr algn="ctr"/>
+            <a:endParaRPr/>
           </a:p>
         </p:txBody>
       </p:sp>
@@ -19957,6 +20139,7 @@
           <a:lstStyle/>
           <a:p>
             <a:pPr algn="ctr"/>
+            <a:endParaRPr/>
           </a:p>
         </p:txBody>
       </p:sp>
@@ -20003,7 +20186,7 @@
 </file>
 
 <file path=ppt/slides/slide5.xml><?xml version="1.0" encoding="utf-8"?>
-<p:sld xmlns:a="http://schemas.openxmlformats.org/drawingml/2006/main" xmlns:p="http://schemas.openxmlformats.org/presentationml/2006/main" xmlns:r="http://schemas.openxmlformats.org/officeDocument/2006/relationships">
+<p:sld xmlns:a="http://schemas.openxmlformats.org/drawingml/2006/main" xmlns:r="http://schemas.openxmlformats.org/officeDocument/2006/relationships" xmlns:p="http://schemas.openxmlformats.org/presentationml/2006/main">
   <p:cSld>
     <p:spTree>
       <p:nvGrpSpPr>
@@ -20011,7 +20194,14 @@
         <p:cNvGrpSpPr/>
         <p:nvPr/>
       </p:nvGrpSpPr>
-      <p:grpSpPr/>
+      <p:grpSpPr>
+        <a:xfrm>
+          <a:off x="0" y="0"/>
+          <a:ext cx="0" cy="0"/>
+          <a:chOff x="0" y="0"/>
+          <a:chExt cx="0" cy="0"/>
+        </a:xfrm>
+      </p:grpSpPr>
       <p:sp>
         <p:nvSpPr>
           <p:cNvPr id="2" name="Rectangle 1"/>
@@ -20052,6 +20242,7 @@
           <a:lstStyle/>
           <a:p>
             <a:pPr algn="ctr"/>
+            <a:endParaRPr/>
           </a:p>
         </p:txBody>
       </p:sp>
@@ -20095,6 +20286,7 @@
           <a:lstStyle/>
           <a:p>
             <a:pPr algn="ctr"/>
+            <a:endParaRPr/>
           </a:p>
         </p:txBody>
       </p:sp>
@@ -20206,6 +20398,7 @@
           <a:lstStyle/>
           <a:p>
             <a:pPr algn="ctr"/>
+            <a:endParaRPr/>
           </a:p>
         </p:txBody>
       </p:sp>
@@ -20252,7 +20445,7 @@
           <p:nvPr/>
         </p:nvPicPr>
         <p:blipFill>
-          <a:blip r:embed="rId2"/>
+          <a:blip r:embed="rId3"/>
           <a:stretch>
             <a:fillRect/>
           </a:stretch>
@@ -20276,7 +20469,7 @@
           <p:nvPr/>
         </p:nvPicPr>
         <p:blipFill>
-          <a:blip r:embed="rId3"/>
+          <a:blip r:embed="rId4"/>
           <a:stretch>
             <a:fillRect/>
           </a:stretch>
@@ -20300,7 +20493,7 @@
           <p:nvPr/>
         </p:nvPicPr>
         <p:blipFill>
-          <a:blip r:embed="rId4"/>
+          <a:blip r:embed="rId5"/>
           <a:stretch>
             <a:fillRect/>
           </a:stretch>
@@ -20355,6 +20548,7 @@
           <a:lstStyle/>
           <a:p>
             <a:pPr algn="ctr"/>
+            <a:endParaRPr/>
           </a:p>
         </p:txBody>
       </p:sp>
@@ -20432,6 +20626,7 @@
           <a:lstStyle/>
           <a:p>
             <a:pPr algn="ctr"/>
+            <a:endParaRPr/>
           </a:p>
         </p:txBody>
       </p:sp>
@@ -20509,6 +20704,7 @@
           <a:lstStyle/>
           <a:p>
             <a:pPr algn="ctr"/>
+            <a:endParaRPr/>
           </a:p>
         </p:txBody>
       </p:sp>
@@ -20586,6 +20782,7 @@
           <a:lstStyle/>
           <a:p>
             <a:pPr algn="ctr"/>
+            <a:endParaRPr/>
           </a:p>
         </p:txBody>
       </p:sp>
@@ -20663,6 +20860,7 @@
           <a:lstStyle/>
           <a:p>
             <a:pPr algn="ctr"/>
+            <a:endParaRPr/>
           </a:p>
         </p:txBody>
       </p:sp>
@@ -20740,6 +20938,7 @@
           <a:lstStyle/>
           <a:p>
             <a:pPr algn="ctr"/>
+            <a:endParaRPr/>
           </a:p>
         </p:txBody>
       </p:sp>
@@ -20817,6 +21016,7 @@
           <a:lstStyle/>
           <a:p>
             <a:pPr algn="ctr"/>
+            <a:endParaRPr/>
           </a:p>
         </p:txBody>
       </p:sp>
@@ -20894,6 +21094,7 @@
           <a:lstStyle/>
           <a:p>
             <a:pPr algn="ctr"/>
+            <a:endParaRPr/>
           </a:p>
         </p:txBody>
       </p:sp>
@@ -20971,6 +21172,7 @@
           <a:lstStyle/>
           <a:p>
             <a:pPr algn="ctr"/>
+            <a:endParaRPr/>
           </a:p>
         </p:txBody>
       </p:sp>
@@ -21048,6 +21250,7 @@
           <a:lstStyle/>
           <a:p>
             <a:pPr algn="ctr"/>
+            <a:endParaRPr/>
           </a:p>
         </p:txBody>
       </p:sp>
@@ -21125,6 +21328,7 @@
           <a:lstStyle/>
           <a:p>
             <a:pPr algn="ctr"/>
+            <a:endParaRPr/>
           </a:p>
         </p:txBody>
       </p:sp>
@@ -21202,6 +21406,7 @@
           <a:lstStyle/>
           <a:p>
             <a:pPr algn="ctr"/>
+            <a:endParaRPr/>
           </a:p>
         </p:txBody>
       </p:sp>
@@ -21279,6 +21484,7 @@
           <a:lstStyle/>
           <a:p>
             <a:pPr algn="ctr"/>
+            <a:endParaRPr/>
           </a:p>
         </p:txBody>
       </p:sp>
@@ -21356,6 +21562,7 @@
           <a:lstStyle/>
           <a:p>
             <a:pPr algn="ctr"/>
+            <a:endParaRPr/>
           </a:p>
         </p:txBody>
       </p:sp>
@@ -21433,6 +21640,7 @@
           <a:lstStyle/>
           <a:p>
             <a:pPr algn="ctr"/>
+            <a:endParaRPr/>
           </a:p>
         </p:txBody>
       </p:sp>
@@ -21510,6 +21718,7 @@
           <a:lstStyle/>
           <a:p>
             <a:pPr algn="ctr"/>
+            <a:endParaRPr/>
           </a:p>
         </p:txBody>
       </p:sp>
@@ -21587,6 +21796,7 @@
           <a:lstStyle/>
           <a:p>
             <a:pPr algn="ctr"/>
+            <a:endParaRPr/>
           </a:p>
         </p:txBody>
       </p:sp>
@@ -21664,6 +21874,7 @@
           <a:lstStyle/>
           <a:p>
             <a:pPr algn="ctr"/>
+            <a:endParaRPr/>
           </a:p>
         </p:txBody>
       </p:sp>
@@ -21741,6 +21952,7 @@
           <a:lstStyle/>
           <a:p>
             <a:pPr algn="ctr"/>
+            <a:endParaRPr/>
           </a:p>
         </p:txBody>
       </p:sp>
@@ -21818,6 +22030,7 @@
           <a:lstStyle/>
           <a:p>
             <a:pPr algn="ctr"/>
+            <a:endParaRPr/>
           </a:p>
         </p:txBody>
       </p:sp>
@@ -21895,6 +22108,7 @@
           <a:lstStyle/>
           <a:p>
             <a:pPr algn="ctr"/>
+            <a:endParaRPr/>
           </a:p>
         </p:txBody>
       </p:sp>
@@ -21972,6 +22186,7 @@
           <a:lstStyle/>
           <a:p>
             <a:pPr algn="ctr"/>
+            <a:endParaRPr/>
           </a:p>
         </p:txBody>
       </p:sp>
@@ -22049,6 +22264,7 @@
           <a:lstStyle/>
           <a:p>
             <a:pPr algn="ctr"/>
+            <a:endParaRPr/>
           </a:p>
         </p:txBody>
       </p:sp>
@@ -22126,6 +22342,7 @@
           <a:lstStyle/>
           <a:p>
             <a:pPr algn="ctr"/>
+            <a:endParaRPr/>
           </a:p>
         </p:txBody>
       </p:sp>
@@ -22203,6 +22420,7 @@
           <a:lstStyle/>
           <a:p>
             <a:pPr algn="ctr"/>
+            <a:endParaRPr/>
           </a:p>
         </p:txBody>
       </p:sp>
@@ -22280,6 +22498,7 @@
           <a:lstStyle/>
           <a:p>
             <a:pPr algn="ctr"/>
+            <a:endParaRPr/>
           </a:p>
         </p:txBody>
       </p:sp>
@@ -22357,6 +22576,7 @@
           <a:lstStyle/>
           <a:p>
             <a:pPr algn="ctr"/>
+            <a:endParaRPr/>
           </a:p>
         </p:txBody>
       </p:sp>
@@ -22434,6 +22654,7 @@
           <a:lstStyle/>
           <a:p>
             <a:pPr algn="ctr"/>
+            <a:endParaRPr/>
           </a:p>
         </p:txBody>
       </p:sp>
@@ -22511,6 +22732,7 @@
           <a:lstStyle/>
           <a:p>
             <a:pPr algn="ctr"/>
+            <a:endParaRPr/>
           </a:p>
         </p:txBody>
       </p:sp>
@@ -22588,6 +22810,7 @@
           <a:lstStyle/>
           <a:p>
             <a:pPr algn="ctr"/>
+            <a:endParaRPr/>
           </a:p>
         </p:txBody>
       </p:sp>
@@ -22665,6 +22888,7 @@
           <a:lstStyle/>
           <a:p>
             <a:pPr algn="ctr"/>
+            <a:endParaRPr/>
           </a:p>
         </p:txBody>
       </p:sp>
@@ -22742,6 +22966,7 @@
           <a:lstStyle/>
           <a:p>
             <a:pPr algn="ctr"/>
+            <a:endParaRPr/>
           </a:p>
         </p:txBody>
       </p:sp>
@@ -22819,6 +23044,7 @@
           <a:lstStyle/>
           <a:p>
             <a:pPr algn="ctr"/>
+            <a:endParaRPr/>
           </a:p>
         </p:txBody>
       </p:sp>
@@ -22896,6 +23122,7 @@
           <a:lstStyle/>
           <a:p>
             <a:pPr algn="ctr"/>
+            <a:endParaRPr/>
           </a:p>
         </p:txBody>
       </p:sp>
@@ -22973,6 +23200,7 @@
           <a:lstStyle/>
           <a:p>
             <a:pPr algn="ctr"/>
+            <a:endParaRPr/>
           </a:p>
         </p:txBody>
       </p:sp>
@@ -23050,6 +23278,7 @@
           <a:lstStyle/>
           <a:p>
             <a:pPr algn="ctr"/>
+            <a:endParaRPr/>
           </a:p>
         </p:txBody>
       </p:sp>
@@ -23127,6 +23356,7 @@
           <a:lstStyle/>
           <a:p>
             <a:pPr algn="ctr"/>
+            <a:endParaRPr/>
           </a:p>
         </p:txBody>
       </p:sp>
@@ -23204,6 +23434,7 @@
           <a:lstStyle/>
           <a:p>
             <a:pPr algn="ctr"/>
+            <a:endParaRPr/>
           </a:p>
         </p:txBody>
       </p:sp>
@@ -23281,6 +23512,7 @@
           <a:lstStyle/>
           <a:p>
             <a:pPr algn="ctr"/>
+            <a:endParaRPr/>
           </a:p>
         </p:txBody>
       </p:sp>
@@ -23358,6 +23590,7 @@
           <a:lstStyle/>
           <a:p>
             <a:pPr algn="ctr"/>
+            <a:endParaRPr/>
           </a:p>
         </p:txBody>
       </p:sp>
@@ -23435,6 +23668,7 @@
           <a:lstStyle/>
           <a:p>
             <a:pPr algn="ctr"/>
+            <a:endParaRPr/>
           </a:p>
         </p:txBody>
       </p:sp>
@@ -23512,6 +23746,7 @@
           <a:lstStyle/>
           <a:p>
             <a:pPr algn="ctr"/>
+            <a:endParaRPr/>
           </a:p>
         </p:txBody>
       </p:sp>
@@ -23589,6 +23824,7 @@
           <a:lstStyle/>
           <a:p>
             <a:pPr algn="ctr"/>
+            <a:endParaRPr/>
           </a:p>
         </p:txBody>
       </p:sp>
@@ -23666,6 +23902,7 @@
           <a:lstStyle/>
           <a:p>
             <a:pPr algn="ctr"/>
+            <a:endParaRPr/>
           </a:p>
         </p:txBody>
       </p:sp>
@@ -23743,6 +23980,7 @@
           <a:lstStyle/>
           <a:p>
             <a:pPr algn="ctr"/>
+            <a:endParaRPr/>
           </a:p>
         </p:txBody>
       </p:sp>
@@ -23823,7 +24061,7 @@
 </file>
 
 <file path=ppt/slides/slide6.xml><?xml version="1.0" encoding="utf-8"?>
-<p:sld xmlns:a="http://schemas.openxmlformats.org/drawingml/2006/main" xmlns:p="http://schemas.openxmlformats.org/presentationml/2006/main" xmlns:r="http://schemas.openxmlformats.org/officeDocument/2006/relationships">
+<p:sld xmlns:a="http://schemas.openxmlformats.org/drawingml/2006/main" xmlns:r="http://schemas.openxmlformats.org/officeDocument/2006/relationships" xmlns:p="http://schemas.openxmlformats.org/presentationml/2006/main">
   <p:cSld>
     <p:spTree>
       <p:nvGrpSpPr>
@@ -23831,7 +24069,14 @@
         <p:cNvGrpSpPr/>
         <p:nvPr/>
       </p:nvGrpSpPr>
-      <p:grpSpPr/>
+      <p:grpSpPr>
+        <a:xfrm>
+          <a:off x="0" y="0"/>
+          <a:ext cx="0" cy="0"/>
+          <a:chOff x="0" y="0"/>
+          <a:chExt cx="0" cy="0"/>
+        </a:xfrm>
+      </p:grpSpPr>
       <p:sp>
         <p:nvSpPr>
           <p:cNvPr id="2" name="Rectangle 1"/>
@@ -23872,6 +24117,7 @@
           <a:lstStyle/>
           <a:p>
             <a:pPr algn="ctr"/>
+            <a:endParaRPr/>
           </a:p>
         </p:txBody>
       </p:sp>
@@ -23915,6 +24161,7 @@
           <a:lstStyle/>
           <a:p>
             <a:pPr algn="ctr"/>
+            <a:endParaRPr/>
           </a:p>
         </p:txBody>
       </p:sp>
@@ -24026,6 +24273,7 @@
           <a:lstStyle/>
           <a:p>
             <a:pPr algn="ctr"/>
+            <a:endParaRPr/>
           </a:p>
         </p:txBody>
       </p:sp>
@@ -24103,6 +24351,7 @@
           <a:lstStyle/>
           <a:p>
             <a:pPr algn="ctr"/>
+            <a:endParaRPr/>
           </a:p>
         </p:txBody>
       </p:sp>
@@ -24146,6 +24395,7 @@
           <a:lstStyle/>
           <a:p>
             <a:pPr algn="ctr"/>
+            <a:endParaRPr/>
           </a:p>
         </p:txBody>
       </p:sp>
@@ -24223,6 +24473,7 @@
           <a:lstStyle/>
           <a:p>
             <a:pPr algn="ctr"/>
+            <a:endParaRPr/>
           </a:p>
         </p:txBody>
       </p:sp>
@@ -24266,6 +24517,7 @@
           <a:lstStyle/>
           <a:p>
             <a:pPr algn="ctr"/>
+            <a:endParaRPr/>
           </a:p>
         </p:txBody>
       </p:sp>
@@ -24343,6 +24595,7 @@
           <a:lstStyle/>
           <a:p>
             <a:pPr algn="ctr"/>
+            <a:endParaRPr/>
           </a:p>
         </p:txBody>
       </p:sp>
@@ -24386,6 +24639,7 @@
           <a:lstStyle/>
           <a:p>
             <a:pPr algn="ctr"/>
+            <a:endParaRPr/>
           </a:p>
         </p:txBody>
       </p:sp>
@@ -24463,6 +24717,7 @@
           <a:lstStyle/>
           <a:p>
             <a:pPr algn="ctr"/>
+            <a:endParaRPr/>
           </a:p>
         </p:txBody>
       </p:sp>
@@ -24506,6 +24761,7 @@
           <a:lstStyle/>
           <a:p>
             <a:pPr algn="ctr"/>
+            <a:endParaRPr/>
           </a:p>
         </p:txBody>
       </p:sp>
@@ -24583,6 +24839,7 @@
           <a:lstStyle/>
           <a:p>
             <a:pPr algn="ctr"/>
+            <a:endParaRPr/>
           </a:p>
         </p:txBody>
       </p:sp>
@@ -24626,6 +24883,7 @@
           <a:lstStyle/>
           <a:p>
             <a:pPr algn="ctr"/>
+            <a:endParaRPr/>
           </a:p>
         </p:txBody>
       </p:sp>
@@ -24703,6 +24961,7 @@
           <a:lstStyle/>
           <a:p>
             <a:pPr algn="ctr"/>
+            <a:endParaRPr/>
           </a:p>
         </p:txBody>
       </p:sp>
@@ -24746,6 +25005,7 @@
           <a:lstStyle/>
           <a:p>
             <a:pPr algn="ctr"/>
+            <a:endParaRPr/>
           </a:p>
         </p:txBody>
       </p:sp>
@@ -24823,6 +25083,7 @@
           <a:lstStyle/>
           <a:p>
             <a:pPr algn="ctr"/>
+            <a:endParaRPr/>
           </a:p>
         </p:txBody>
       </p:sp>
@@ -24866,6 +25127,7 @@
           <a:lstStyle/>
           <a:p>
             <a:pPr algn="ctr"/>
+            <a:endParaRPr/>
           </a:p>
         </p:txBody>
       </p:sp>
@@ -24943,6 +25205,7 @@
           <a:lstStyle/>
           <a:p>
             <a:pPr algn="ctr"/>
+            <a:endParaRPr/>
           </a:p>
         </p:txBody>
       </p:sp>
@@ -24986,6 +25249,7 @@
           <a:lstStyle/>
           <a:p>
             <a:pPr algn="ctr"/>
+            <a:endParaRPr/>
           </a:p>
         </p:txBody>
       </p:sp>
@@ -25063,6 +25327,7 @@
           <a:lstStyle/>
           <a:p>
             <a:pPr algn="ctr"/>
+            <a:endParaRPr/>
           </a:p>
         </p:txBody>
       </p:sp>
@@ -25106,6 +25371,7 @@
           <a:lstStyle/>
           <a:p>
             <a:pPr algn="ctr"/>
+            <a:endParaRPr/>
           </a:p>
         </p:txBody>
       </p:sp>
@@ -25183,6 +25449,7 @@
           <a:lstStyle/>
           <a:p>
             <a:pPr algn="ctr"/>
+            <a:endParaRPr/>
           </a:p>
         </p:txBody>
       </p:sp>
@@ -25226,6 +25493,7 @@
           <a:lstStyle/>
           <a:p>
             <a:pPr algn="ctr"/>
+            <a:endParaRPr/>
           </a:p>
         </p:txBody>
       </p:sp>
@@ -25303,6 +25571,7 @@
           <a:lstStyle/>
           <a:p>
             <a:pPr algn="ctr"/>
+            <a:endParaRPr/>
           </a:p>
         </p:txBody>
       </p:sp>
@@ -25346,6 +25615,7 @@
           <a:lstStyle/>
           <a:p>
             <a:pPr algn="ctr"/>
+            <a:endParaRPr/>
           </a:p>
         </p:txBody>
       </p:sp>
@@ -25423,6 +25693,7 @@
           <a:lstStyle/>
           <a:p>
             <a:pPr algn="ctr"/>
+            <a:endParaRPr/>
           </a:p>
         </p:txBody>
       </p:sp>
@@ -25466,6 +25737,7 @@
           <a:lstStyle/>
           <a:p>
             <a:pPr algn="ctr"/>
+            <a:endParaRPr/>
           </a:p>
         </p:txBody>
       </p:sp>
@@ -25543,6 +25815,7 @@
           <a:lstStyle/>
           <a:p>
             <a:pPr algn="ctr"/>
+            <a:endParaRPr/>
           </a:p>
         </p:txBody>
       </p:sp>
@@ -25586,6 +25859,7 @@
           <a:lstStyle/>
           <a:p>
             <a:pPr algn="ctr"/>
+            <a:endParaRPr/>
           </a:p>
         </p:txBody>
       </p:sp>
@@ -25663,6 +25937,7 @@
           <a:lstStyle/>
           <a:p>
             <a:pPr algn="ctr"/>
+            <a:endParaRPr/>
           </a:p>
         </p:txBody>
       </p:sp>
@@ -25706,6 +25981,7 @@
           <a:lstStyle/>
           <a:p>
             <a:pPr algn="ctr"/>
+            <a:endParaRPr/>
           </a:p>
         </p:txBody>
       </p:sp>
@@ -25783,6 +26059,7 @@
           <a:lstStyle/>
           <a:p>
             <a:pPr algn="ctr"/>
+            <a:endParaRPr/>
           </a:p>
         </p:txBody>
       </p:sp>
@@ -25826,6 +26103,7 @@
           <a:lstStyle/>
           <a:p>
             <a:pPr algn="ctr"/>
+            <a:endParaRPr/>
           </a:p>
         </p:txBody>
       </p:sp>
@@ -25903,6 +26181,7 @@
           <a:lstStyle/>
           <a:p>
             <a:pPr algn="ctr"/>
+            <a:endParaRPr/>
           </a:p>
         </p:txBody>
       </p:sp>
@@ -25946,6 +26225,7 @@
           <a:lstStyle/>
           <a:p>
             <a:pPr algn="ctr"/>
+            <a:endParaRPr/>
           </a:p>
         </p:txBody>
       </p:sp>
@@ -26023,6 +26303,7 @@
           <a:lstStyle/>
           <a:p>
             <a:pPr algn="ctr"/>
+            <a:endParaRPr/>
           </a:p>
         </p:txBody>
       </p:sp>
@@ -26066,6 +26347,7 @@
           <a:lstStyle/>
           <a:p>
             <a:pPr algn="ctr"/>
+            <a:endParaRPr/>
           </a:p>
         </p:txBody>
       </p:sp>
@@ -26143,6 +26425,7 @@
           <a:lstStyle/>
           <a:p>
             <a:pPr algn="ctr"/>
+            <a:endParaRPr/>
           </a:p>
         </p:txBody>
       </p:sp>
@@ -26186,6 +26469,7 @@
           <a:lstStyle/>
           <a:p>
             <a:pPr algn="ctr"/>
+            <a:endParaRPr/>
           </a:p>
         </p:txBody>
       </p:sp>
@@ -26263,6 +26547,7 @@
           <a:lstStyle/>
           <a:p>
             <a:pPr algn="ctr"/>
+            <a:endParaRPr/>
           </a:p>
         </p:txBody>
       </p:sp>
@@ -26306,6 +26591,7 @@
           <a:lstStyle/>
           <a:p>
             <a:pPr algn="ctr"/>
+            <a:endParaRPr/>
           </a:p>
         </p:txBody>
       </p:sp>
@@ -26383,6 +26669,7 @@
           <a:lstStyle/>
           <a:p>
             <a:pPr algn="ctr"/>
+            <a:endParaRPr/>
           </a:p>
         </p:txBody>
       </p:sp>
@@ -26426,6 +26713,7 @@
           <a:lstStyle/>
           <a:p>
             <a:pPr algn="ctr"/>
+            <a:endParaRPr/>
           </a:p>
         </p:txBody>
       </p:sp>
@@ -26503,6 +26791,7 @@
           <a:lstStyle/>
           <a:p>
             <a:pPr algn="ctr"/>
+            <a:endParaRPr/>
           </a:p>
         </p:txBody>
       </p:sp>
@@ -26546,6 +26835,7 @@
           <a:lstStyle/>
           <a:p>
             <a:pPr algn="ctr"/>
+            <a:endParaRPr/>
           </a:p>
         </p:txBody>
       </p:sp>
@@ -26626,7 +26916,7 @@
 </file>
 
 <file path=ppt/slides/slide7.xml><?xml version="1.0" encoding="utf-8"?>
-<p:sld xmlns:a="http://schemas.openxmlformats.org/drawingml/2006/main" xmlns:p="http://schemas.openxmlformats.org/presentationml/2006/main" xmlns:r="http://schemas.openxmlformats.org/officeDocument/2006/relationships">
+<p:sld xmlns:a="http://schemas.openxmlformats.org/drawingml/2006/main" xmlns:r="http://schemas.openxmlformats.org/officeDocument/2006/relationships" xmlns:p="http://schemas.openxmlformats.org/presentationml/2006/main">
   <p:cSld>
     <p:spTree>
       <p:nvGrpSpPr>
@@ -26634,7 +26924,14 @@
         <p:cNvGrpSpPr/>
         <p:nvPr/>
       </p:nvGrpSpPr>
-      <p:grpSpPr/>
+      <p:grpSpPr>
+        <a:xfrm>
+          <a:off x="0" y="0"/>
+          <a:ext cx="0" cy="0"/>
+          <a:chOff x="0" y="0"/>
+          <a:chExt cx="0" cy="0"/>
+        </a:xfrm>
+      </p:grpSpPr>
       <p:sp>
         <p:nvSpPr>
           <p:cNvPr id="2" name="Rectangle 1"/>
@@ -26675,6 +26972,7 @@
           <a:lstStyle/>
           <a:p>
             <a:pPr algn="ctr"/>
+            <a:endParaRPr/>
           </a:p>
         </p:txBody>
       </p:sp>
@@ -26718,6 +27016,7 @@
           <a:lstStyle/>
           <a:p>
             <a:pPr algn="ctr"/>
+            <a:endParaRPr/>
           </a:p>
         </p:txBody>
       </p:sp>
@@ -26829,6 +27128,7 @@
           <a:lstStyle/>
           <a:p>
             <a:pPr algn="ctr"/>
+            <a:endParaRPr/>
           </a:p>
         </p:txBody>
       </p:sp>
@@ -26974,6 +27274,7 @@
           <a:lstStyle/>
           <a:p>
             <a:pPr algn="ctr"/>
+            <a:endParaRPr/>
           </a:p>
         </p:txBody>
       </p:sp>
@@ -27017,6 +27318,7 @@
           <a:lstStyle/>
           <a:p>
             <a:pPr algn="ctr"/>
+            <a:endParaRPr/>
           </a:p>
         </p:txBody>
       </p:sp>
@@ -27094,6 +27396,7 @@
           <a:lstStyle/>
           <a:p>
             <a:pPr algn="ctr"/>
+            <a:endParaRPr/>
           </a:p>
         </p:txBody>
       </p:sp>
@@ -27137,6 +27440,7 @@
           <a:lstStyle/>
           <a:p>
             <a:pPr algn="ctr"/>
+            <a:endParaRPr/>
           </a:p>
         </p:txBody>
       </p:sp>
@@ -27214,6 +27518,7 @@
           <a:lstStyle/>
           <a:p>
             <a:pPr algn="ctr"/>
+            <a:endParaRPr/>
           </a:p>
         </p:txBody>
       </p:sp>
@@ -27257,6 +27562,7 @@
           <a:lstStyle/>
           <a:p>
             <a:pPr algn="ctr"/>
+            <a:endParaRPr/>
           </a:p>
         </p:txBody>
       </p:sp>
@@ -27334,6 +27640,7 @@
           <a:lstStyle/>
           <a:p>
             <a:pPr algn="ctr"/>
+            <a:endParaRPr/>
           </a:p>
         </p:txBody>
       </p:sp>
@@ -27377,6 +27684,7 @@
           <a:lstStyle/>
           <a:p>
             <a:pPr algn="ctr"/>
+            <a:endParaRPr/>
           </a:p>
         </p:txBody>
       </p:sp>
@@ -27454,6 +27762,7 @@
           <a:lstStyle/>
           <a:p>
             <a:pPr algn="ctr"/>
+            <a:endParaRPr/>
           </a:p>
         </p:txBody>
       </p:sp>
@@ -27497,6 +27806,7 @@
           <a:lstStyle/>
           <a:p>
             <a:pPr algn="ctr"/>
+            <a:endParaRPr/>
           </a:p>
         </p:txBody>
       </p:sp>
@@ -27574,6 +27884,7 @@
           <a:lstStyle/>
           <a:p>
             <a:pPr algn="ctr"/>
+            <a:endParaRPr/>
           </a:p>
         </p:txBody>
       </p:sp>
@@ -27617,6 +27928,7 @@
           <a:lstStyle/>
           <a:p>
             <a:pPr algn="ctr"/>
+            <a:endParaRPr/>
           </a:p>
         </p:txBody>
       </p:sp>
@@ -27728,6 +28040,7 @@
           <a:lstStyle/>
           <a:p>
             <a:pPr algn="ctr"/>
+            <a:endParaRPr/>
           </a:p>
         </p:txBody>
       </p:sp>
@@ -27771,6 +28084,7 @@
           <a:lstStyle/>
           <a:p>
             <a:pPr algn="ctr"/>
+            <a:endParaRPr/>
           </a:p>
         </p:txBody>
       </p:sp>
@@ -27916,6 +28230,7 @@
           <a:lstStyle/>
           <a:p>
             <a:pPr algn="ctr"/>
+            <a:endParaRPr/>
           </a:p>
         </p:txBody>
       </p:sp>
@@ -27959,6 +28274,7 @@
           <a:lstStyle/>
           <a:p>
             <a:pPr algn="ctr"/>
+            <a:endParaRPr/>
           </a:p>
         </p:txBody>
       </p:sp>
@@ -28104,6 +28420,7 @@
           <a:lstStyle/>
           <a:p>
             <a:pPr algn="ctr"/>
+            <a:endParaRPr/>
           </a:p>
         </p:txBody>
       </p:sp>
@@ -28147,6 +28464,7 @@
           <a:lstStyle/>
           <a:p>
             <a:pPr algn="ctr"/>
+            <a:endParaRPr/>
           </a:p>
         </p:txBody>
       </p:sp>
@@ -28292,6 +28610,7 @@
           <a:lstStyle/>
           <a:p>
             <a:pPr algn="ctr"/>
+            <a:endParaRPr/>
           </a:p>
         </p:txBody>
       </p:sp>
@@ -28335,6 +28654,7 @@
           <a:lstStyle/>
           <a:p>
             <a:pPr algn="ctr"/>
+            <a:endParaRPr/>
           </a:p>
         </p:txBody>
       </p:sp>
@@ -28480,6 +28800,7 @@
           <a:lstStyle/>
           <a:p>
             <a:pPr algn="ctr"/>
+            <a:endParaRPr/>
           </a:p>
         </p:txBody>
       </p:sp>
@@ -28523,6 +28844,7 @@
           <a:lstStyle/>
           <a:p>
             <a:pPr algn="ctr"/>
+            <a:endParaRPr/>
           </a:p>
         </p:txBody>
       </p:sp>
@@ -28671,7 +28993,7 @@
 </file>
 
 <file path=ppt/slides/slide8.xml><?xml version="1.0" encoding="utf-8"?>
-<p:sld xmlns:a="http://schemas.openxmlformats.org/drawingml/2006/main" xmlns:p="http://schemas.openxmlformats.org/presentationml/2006/main" xmlns:r="http://schemas.openxmlformats.org/officeDocument/2006/relationships">
+<p:sld xmlns:a="http://schemas.openxmlformats.org/drawingml/2006/main" xmlns:r="http://schemas.openxmlformats.org/officeDocument/2006/relationships" xmlns:p="http://schemas.openxmlformats.org/presentationml/2006/main">
   <p:cSld>
     <p:spTree>
       <p:nvGrpSpPr>
@@ -28679,7 +29001,14 @@
         <p:cNvGrpSpPr/>
         <p:nvPr/>
       </p:nvGrpSpPr>
-      <p:grpSpPr/>
+      <p:grpSpPr>
+        <a:xfrm>
+          <a:off x="0" y="0"/>
+          <a:ext cx="0" cy="0"/>
+          <a:chOff x="0" y="0"/>
+          <a:chExt cx="0" cy="0"/>
+        </a:xfrm>
+      </p:grpSpPr>
       <p:sp>
         <p:nvSpPr>
           <p:cNvPr id="2" name="Rectangle 1"/>
@@ -28720,6 +29049,7 @@
           <a:lstStyle/>
           <a:p>
             <a:pPr algn="ctr"/>
+            <a:endParaRPr/>
           </a:p>
         </p:txBody>
       </p:sp>
@@ -28763,6 +29093,7 @@
           <a:lstStyle/>
           <a:p>
             <a:pPr algn="ctr"/>
+            <a:endParaRPr/>
           </a:p>
         </p:txBody>
       </p:sp>
@@ -28874,6 +29205,7 @@
           <a:lstStyle/>
           <a:p>
             <a:pPr algn="ctr"/>
+            <a:endParaRPr/>
           </a:p>
         </p:txBody>
       </p:sp>
@@ -28954,7 +29286,7 @@
           <p:nvPr/>
         </p:nvPicPr>
         <p:blipFill>
-          <a:blip r:embed="rId2"/>
+          <a:blip r:embed="rId3"/>
           <a:stretch>
             <a:fillRect/>
           </a:stretch>
@@ -29009,6 +29341,7 @@
           <a:lstStyle/>
           <a:p>
             <a:pPr algn="ctr"/>
+            <a:endParaRPr/>
           </a:p>
         </p:txBody>
       </p:sp>
@@ -29089,7 +29422,7 @@
 </file>
 
 <file path=ppt/slides/slide9.xml><?xml version="1.0" encoding="utf-8"?>
-<p:sld xmlns:a="http://schemas.openxmlformats.org/drawingml/2006/main" xmlns:p="http://schemas.openxmlformats.org/presentationml/2006/main" xmlns:r="http://schemas.openxmlformats.org/officeDocument/2006/relationships">
+<p:sld xmlns:a="http://schemas.openxmlformats.org/drawingml/2006/main" xmlns:r="http://schemas.openxmlformats.org/officeDocument/2006/relationships" xmlns:p="http://schemas.openxmlformats.org/presentationml/2006/main">
   <p:cSld>
     <p:spTree>
       <p:nvGrpSpPr>
@@ -29097,7 +29430,14 @@
         <p:cNvGrpSpPr/>
         <p:nvPr/>
       </p:nvGrpSpPr>
-      <p:grpSpPr/>
+      <p:grpSpPr>
+        <a:xfrm>
+          <a:off x="0" y="0"/>
+          <a:ext cx="0" cy="0"/>
+          <a:chOff x="0" y="0"/>
+          <a:chExt cx="0" cy="0"/>
+        </a:xfrm>
+      </p:grpSpPr>
       <p:sp>
         <p:nvSpPr>
           <p:cNvPr id="2" name="Rectangle 1"/>
@@ -29138,6 +29478,7 @@
           <a:lstStyle/>
           <a:p>
             <a:pPr algn="ctr"/>
+            <a:endParaRPr/>
           </a:p>
         </p:txBody>
       </p:sp>
@@ -29181,6 +29522,7 @@
           <a:lstStyle/>
           <a:p>
             <a:pPr algn="ctr"/>
+            <a:endParaRPr/>
           </a:p>
         </p:txBody>
       </p:sp>
@@ -29292,6 +29634,7 @@
           <a:lstStyle/>
           <a:p>
             <a:pPr algn="ctr"/>
+            <a:endParaRPr/>
           </a:p>
         </p:txBody>
       </p:sp>
@@ -29372,7 +29715,7 @@
           <p:nvPr/>
         </p:nvPicPr>
         <p:blipFill>
-          <a:blip r:embed="rId2"/>
+          <a:blip r:embed="rId3"/>
           <a:stretch>
             <a:fillRect/>
           </a:stretch>
@@ -29427,6 +29770,7 @@
           <a:lstStyle/>
           <a:p>
             <a:pPr algn="ctr"/>
+            <a:endParaRPr/>
           </a:p>
         </p:txBody>
       </p:sp>
@@ -29827,7 +30171,7 @@
 </file>
 
 <file path=ppt/theme/theme2.xml><?xml version="1.0" encoding="utf-8"?>
-<a:theme xmlns:a="http://schemas.openxmlformats.org/drawingml/2006/main" name="Office Theme">
+<a:theme xmlns:a="http://schemas.openxmlformats.org/drawingml/2006/main" name="Tema de Office">
   <a:themeElements>
     <a:clrScheme name="Office">
       <a:dk1>
@@ -29837,44 +30181,44 @@
         <a:sysClr val="window" lastClr="FFFFFF"/>
       </a:lt1>
       <a:dk2>
-        <a:srgbClr val="1F497D"/>
+        <a:srgbClr val="0E2841"/>
       </a:dk2>
       <a:lt2>
-        <a:srgbClr val="EEECE1"/>
+        <a:srgbClr val="E8E8E8"/>
       </a:lt2>
       <a:accent1>
-        <a:srgbClr val="4F81BD"/>
+        <a:srgbClr val="156082"/>
       </a:accent1>
       <a:accent2>
-        <a:srgbClr val="C0504D"/>
+        <a:srgbClr val="E97132"/>
       </a:accent2>
       <a:accent3>
-        <a:srgbClr val="9BBB59"/>
+        <a:srgbClr val="196B24"/>
       </a:accent3>
       <a:accent4>
-        <a:srgbClr val="8064A2"/>
+        <a:srgbClr val="0F9ED5"/>
       </a:accent4>
       <a:accent5>
-        <a:srgbClr val="4BACC6"/>
+        <a:srgbClr val="A02B93"/>
       </a:accent5>
       <a:accent6>
-        <a:srgbClr val="F79646"/>
+        <a:srgbClr val="4EA72E"/>
       </a:accent6>
       <a:hlink>
-        <a:srgbClr val="0000FF"/>
+        <a:srgbClr val="467886"/>
       </a:hlink>
       <a:folHlink>
-        <a:srgbClr val="800080"/>
+        <a:srgbClr val="96607D"/>
       </a:folHlink>
     </a:clrScheme>
     <a:fontScheme name="Office">
       <a:majorFont>
-        <a:latin typeface="Calibri"/>
+        <a:latin typeface="Aptos Display" panose="02110004020202020204"/>
         <a:ea typeface=""/>
         <a:cs typeface=""/>
-        <a:font script="Jpan" typeface="ＭＳ Ｐゴシック"/>
+        <a:font script="Jpan" typeface="游ゴシック Light"/>
         <a:font script="Hang" typeface="맑은 고딕"/>
-        <a:font script="Hans" typeface="宋体"/>
+        <a:font script="Hans" typeface="等线 Light"/>
         <a:font script="Hant" typeface="新細明體"/>
         <a:font script="Arab" typeface="Times New Roman"/>
         <a:font script="Hebr" typeface="Times New Roman"/>
@@ -29902,14 +30246,31 @@
         <a:font script="Viet" typeface="Times New Roman"/>
         <a:font script="Uigh" typeface="Microsoft Uighur"/>
         <a:font script="Geor" typeface="Sylfaen"/>
+        <a:font script="Armn" typeface="Arial"/>
+        <a:font script="Bugi" typeface="Leelawadee UI"/>
+        <a:font script="Bopo" typeface="Microsoft JhengHei"/>
+        <a:font script="Java" typeface="Javanese Text"/>
+        <a:font script="Lisu" typeface="Segoe UI"/>
+        <a:font script="Mymr" typeface="Myanmar Text"/>
+        <a:font script="Nkoo" typeface="Ebrima"/>
+        <a:font script="Olck" typeface="Nirmala UI"/>
+        <a:font script="Osma" typeface="Ebrima"/>
+        <a:font script="Phag" typeface="Phagspa"/>
+        <a:font script="Syrn" typeface="Estrangelo Edessa"/>
+        <a:font script="Syrj" typeface="Estrangelo Edessa"/>
+        <a:font script="Syre" typeface="Estrangelo Edessa"/>
+        <a:font script="Sora" typeface="Nirmala UI"/>
+        <a:font script="Tale" typeface="Microsoft Tai Le"/>
+        <a:font script="Talu" typeface="Microsoft New Tai Lue"/>
+        <a:font script="Tfng" typeface="Ebrima"/>
       </a:majorFont>
       <a:minorFont>
-        <a:latin typeface="Calibri"/>
+        <a:latin typeface="Aptos" panose="02110004020202020204"/>
         <a:ea typeface=""/>
         <a:cs typeface=""/>
-        <a:font script="Jpan" typeface="ＭＳ Ｐゴシック"/>
+        <a:font script="Jpan" typeface="游ゴシック"/>
         <a:font script="Hang" typeface="맑은 고딕"/>
-        <a:font script="Hans" typeface="宋体"/>
+        <a:font script="Hans" typeface="等线"/>
         <a:font script="Hant" typeface="新細明體"/>
         <a:font script="Arab" typeface="Arial"/>
         <a:font script="Hebr" typeface="Arial"/>
@@ -29937,6 +30298,23 @@
         <a:font script="Viet" typeface="Arial"/>
         <a:font script="Uigh" typeface="Microsoft Uighur"/>
         <a:font script="Geor" typeface="Sylfaen"/>
+        <a:font script="Armn" typeface="Arial"/>
+        <a:font script="Bugi" typeface="Leelawadee UI"/>
+        <a:font script="Bopo" typeface="Microsoft JhengHei"/>
+        <a:font script="Java" typeface="Javanese Text"/>
+        <a:font script="Lisu" typeface="Segoe UI"/>
+        <a:font script="Mymr" typeface="Myanmar Text"/>
+        <a:font script="Nkoo" typeface="Ebrima"/>
+        <a:font script="Olck" typeface="Nirmala UI"/>
+        <a:font script="Osma" typeface="Ebrima"/>
+        <a:font script="Phag" typeface="Phagspa"/>
+        <a:font script="Syrn" typeface="Estrangelo Edessa"/>
+        <a:font script="Syrj" typeface="Estrangelo Edessa"/>
+        <a:font script="Syre" typeface="Estrangelo Edessa"/>
+        <a:font script="Sora" typeface="Nirmala UI"/>
+        <a:font script="Tale" typeface="Microsoft Tai Le"/>
+        <a:font script="Talu" typeface="Microsoft New Tai Lue"/>
+        <a:font script="Tfng" typeface="Ebrima"/>
       </a:minorFont>
     </a:fontScheme>
     <a:fmtScheme name="Office">
@@ -29948,180 +30326,136 @@
           <a:gsLst>
             <a:gs pos="0">
               <a:schemeClr val="phClr">
-                <a:tint val="50000"/>
-                <a:satMod val="300000"/>
+                <a:lumMod val="110000"/>
+                <a:satMod val="105000"/>
+                <a:tint val="67000"/>
               </a:schemeClr>
             </a:gs>
-            <a:gs pos="35000">
+            <a:gs pos="50000">
               <a:schemeClr val="phClr">
-                <a:tint val="37000"/>
-                <a:satMod val="300000"/>
+                <a:lumMod val="105000"/>
+                <a:satMod val="103000"/>
+                <a:tint val="73000"/>
               </a:schemeClr>
             </a:gs>
             <a:gs pos="100000">
               <a:schemeClr val="phClr">
-                <a:tint val="15000"/>
-                <a:satMod val="350000"/>
+                <a:lumMod val="105000"/>
+                <a:satMod val="109000"/>
+                <a:tint val="81000"/>
               </a:schemeClr>
             </a:gs>
           </a:gsLst>
-          <a:lin ang="16200000" scaled="1"/>
+          <a:lin ang="5400000" scaled="0"/>
         </a:gradFill>
         <a:gradFill rotWithShape="1">
           <a:gsLst>
             <a:gs pos="0">
               <a:schemeClr val="phClr">
-                <a:tint val="100000"/>
+                <a:satMod val="103000"/>
+                <a:lumMod val="102000"/>
+                <a:tint val="94000"/>
+              </a:schemeClr>
+            </a:gs>
+            <a:gs pos="50000">
+              <a:schemeClr val="phClr">
+                <a:satMod val="110000"/>
+                <a:lumMod val="100000"/>
                 <a:shade val="100000"/>
-                <a:satMod val="130000"/>
               </a:schemeClr>
             </a:gs>
             <a:gs pos="100000">
               <a:schemeClr val="phClr">
-                <a:tint val="50000"/>
-                <a:shade val="100000"/>
-                <a:satMod val="350000"/>
+                <a:lumMod val="99000"/>
+                <a:satMod val="120000"/>
+                <a:shade val="78000"/>
               </a:schemeClr>
             </a:gs>
           </a:gsLst>
-          <a:lin ang="16200000" scaled="0"/>
+          <a:lin ang="5400000" scaled="0"/>
         </a:gradFill>
       </a:fillStyleLst>
       <a:lnStyleLst>
-        <a:ln w="9525" cap="flat" cmpd="sng" algn="ctr">
-          <a:solidFill>
-            <a:schemeClr val="phClr">
-              <a:shade val="95000"/>
-              <a:satMod val="105000"/>
-            </a:schemeClr>
+        <a:ln w="12700" cap="flat" cmpd="sng" algn="ctr">
+          <a:solidFill>
+            <a:schemeClr val="phClr"/>
           </a:solidFill>
           <a:prstDash val="solid"/>
+          <a:miter lim="800000"/>
+        </a:ln>
+        <a:ln w="19050" cap="flat" cmpd="sng" algn="ctr">
+          <a:solidFill>
+            <a:schemeClr val="phClr"/>
+          </a:solidFill>
+          <a:prstDash val="solid"/>
+          <a:miter lim="800000"/>
         </a:ln>
         <a:ln w="25400" cap="flat" cmpd="sng" algn="ctr">
           <a:solidFill>
             <a:schemeClr val="phClr"/>
           </a:solidFill>
           <a:prstDash val="solid"/>
-        </a:ln>
-        <a:ln w="38100" cap="flat" cmpd="sng" algn="ctr">
-          <a:solidFill>
-            <a:schemeClr val="phClr"/>
-          </a:solidFill>
-          <a:prstDash val="solid"/>
+          <a:miter lim="800000"/>
         </a:ln>
       </a:lnStyleLst>
       <a:effectStyleLst>
         <a:effectStyle>
+          <a:effectLst/>
+        </a:effectStyle>
+        <a:effectStyle>
+          <a:effectLst/>
+        </a:effectStyle>
+        <a:effectStyle>
           <a:effectLst>
-            <a:outerShdw blurRad="40000" dist="20000" dir="5400000" rotWithShape="0">
+            <a:outerShdw blurRad="57150" dist="19050" dir="5400000" algn="ctr" rotWithShape="0">
               <a:srgbClr val="000000">
-                <a:alpha val="38000"/>
+                <a:alpha val="63000"/>
               </a:srgbClr>
             </a:outerShdw>
           </a:effectLst>
-        </a:effectStyle>
-        <a:effectStyle>
-          <a:effectLst>
-            <a:outerShdw blurRad="40000" dist="23000" dir="5400000" rotWithShape="0">
-              <a:srgbClr val="000000">
-                <a:alpha val="35000"/>
-              </a:srgbClr>
-            </a:outerShdw>
-          </a:effectLst>
-        </a:effectStyle>
-        <a:effectStyle>
-          <a:effectLst>
-            <a:outerShdw blurRad="40000" dist="23000" dir="5400000" rotWithShape="0">
-              <a:srgbClr val="000000">
-                <a:alpha val="35000"/>
-              </a:srgbClr>
-            </a:outerShdw>
-          </a:effectLst>
-          <a:scene3d>
-            <a:camera prst="orthographicFront">
-              <a:rot lat="0" lon="0" rev="0"/>
-            </a:camera>
-            <a:lightRig rig="threePt" dir="t">
-              <a:rot lat="0" lon="0" rev="1200000"/>
-            </a:lightRig>
-          </a:scene3d>
-          <a:sp3d>
-            <a:bevelT w="63500" h="25400"/>
-          </a:sp3d>
         </a:effectStyle>
       </a:effectStyleLst>
       <a:bgFillStyleLst>
         <a:solidFill>
           <a:schemeClr val="phClr"/>
         </a:solidFill>
+        <a:solidFill>
+          <a:schemeClr val="phClr">
+            <a:tint val="95000"/>
+            <a:satMod val="170000"/>
+          </a:schemeClr>
+        </a:solidFill>
         <a:gradFill rotWithShape="1">
           <a:gsLst>
             <a:gs pos="0">
               <a:schemeClr val="phClr">
-                <a:tint val="40000"/>
-                <a:satMod val="350000"/>
+                <a:tint val="93000"/>
+                <a:satMod val="150000"/>
+                <a:shade val="98000"/>
+                <a:lumMod val="102000"/>
               </a:schemeClr>
             </a:gs>
-            <a:gs pos="40000">
+            <a:gs pos="50000">
               <a:schemeClr val="phClr">
-                <a:tint val="45000"/>
-                <a:shade val="99000"/>
-                <a:satMod val="350000"/>
+                <a:tint val="98000"/>
+                <a:satMod val="130000"/>
+                <a:shade val="90000"/>
+                <a:lumMod val="103000"/>
               </a:schemeClr>
             </a:gs>
             <a:gs pos="100000">
               <a:schemeClr val="phClr">
-                <a:shade val="20000"/>
-                <a:satMod val="255000"/>
+                <a:shade val="63000"/>
+                <a:satMod val="120000"/>
               </a:schemeClr>
             </a:gs>
           </a:gsLst>
-          <a:path path="circle">
-            <a:fillToRect l="50000" t="-80000" r="50000" b="180000"/>
-          </a:path>
-        </a:gradFill>
-        <a:gradFill rotWithShape="1">
-          <a:gsLst>
-            <a:gs pos="0">
-              <a:schemeClr val="phClr">
-                <a:tint val="80000"/>
-                <a:satMod val="300000"/>
-              </a:schemeClr>
-            </a:gs>
-            <a:gs pos="100000">
-              <a:schemeClr val="phClr">
-                <a:shade val="30000"/>
-                <a:satMod val="200000"/>
-              </a:schemeClr>
-            </a:gs>
-          </a:gsLst>
-          <a:path path="circle">
-            <a:fillToRect l="50000" t="50000" r="50000" b="50000"/>
-          </a:path>
+          <a:lin ang="5400000" scaled="0"/>
         </a:gradFill>
       </a:bgFillStyleLst>
     </a:fmtScheme>
   </a:themeElements>
   <a:objectDefaults>
-    <a:spDef>
-      <a:spPr/>
-      <a:bodyPr/>
-      <a:lstStyle/>
-      <a:style>
-        <a:lnRef idx="1">
-          <a:schemeClr val="accent1"/>
-        </a:lnRef>
-        <a:fillRef idx="3">
-          <a:schemeClr val="accent1"/>
-        </a:fillRef>
-        <a:effectRef idx="2">
-          <a:schemeClr val="accent1"/>
-        </a:effectRef>
-        <a:fontRef idx="minor">
-          <a:schemeClr val="lt1"/>
-        </a:fontRef>
-      </a:style>
-    </a:spDef>
     <a:lnDef>
       <a:spPr/>
       <a:bodyPr/>
@@ -30143,5 +30477,10 @@
     </a:lnDef>
   </a:objectDefaults>
   <a:extraClrSchemeLst/>
+  <a:extLst>
+    <a:ext uri="{05A4C25C-085E-4340-85A3-A5531E510DB2}">
+      <thm15:themeFamily xmlns:thm15="http://schemas.microsoft.com/office/thememl/2012/main" name="Office Theme" id="{2E142A2C-CD16-42D6-873A-C26D2A0506FA}" vid="{1BDDFF52-6CD6-40A5-AB3C-68EB2F1E4D0A}"/>
+    </a:ext>
+  </a:extLst>
 </a:theme>
 </file>